--- a/Progression_P6/P6-L10_Mock_Paper_3_Speaking.pptx
+++ b/Progression_P6/P6-L10_Mock_Paper_3_Speaking.pptx
@@ -1,6 +1,6 @@
 
 <file path=ppt/presentation.xml><?xml version="1.0" encoding="utf-8"?>
-<p:presentation xmlns:a="http://schemas.openxmlformats.org/drawingml/2006/main" xmlns:r="http://schemas.openxmlformats.org/officeDocument/2006/relationships" xmlns:p="http://schemas.openxmlformats.org/presentationml/2006/main" saveSubsetFonts="1" autoCompressPictures="0">
+<p:presentation xmlns:a="http://schemas.openxmlformats.org/drawingml/2006/main" xmlns:r="http://schemas.openxmlformats.org/officeDocument/2006/relationships" xmlns:p="http://schemas.openxmlformats.org/presentationml/2006/main" embedTrueTypeFonts="1" saveSubsetFonts="1" autoCompressPictures="0">
   <p:sldMasterIdLst>
     <p:sldMasterId id="2147483648" r:id="rId1"/>
   </p:sldMasterIdLst>
@@ -28,6 +28,13 @@
   </p:notesMasterIdLst>
   <p:sldSz cx="12192000" cy="6858000"/>
   <p:notesSz cx="6858000" cy="12192000"/>
+  <p:embeddedFontLst>
+    <p:embeddedFont>
+      <p:font typeface="Amiri" pitchFamily="2" charset="-78"/>
+      <p:regular r:id="rIdFont1"/>
+      <p:bold r:id="rIdFont2"/>
+    </p:embeddedFont>
+  </p:embeddedFontLst>
   <p:defaultTextStyle>
     <a:lvl1pPr marL="0" algn="l" defTabSz="914400" rtl="0" eaLnBrk="1" latinLnBrk="0" hangingPunct="1">
       <a:defRPr sz="1800" kern="1200">
@@ -384,8 +391,7 @@
           <a:schemeClr val="tx1"/>
         </a:solidFill>
         <a:latin typeface="+mn-lt"/>
-        <a:ea typeface="+mn-ea"/>
-        <a:cs typeface="+mn-cs"/>
+        <a:cs typeface="Amiri" pitchFamily="2" charset="-78"/>
       </a:defRPr>
     </a:lvl1pPr>
     <a:lvl2pPr marL="457200" algn="l" defTabSz="914400" rtl="0" eaLnBrk="1" latinLnBrk="0" hangingPunct="1">
@@ -394,8 +400,7 @@
           <a:schemeClr val="tx1"/>
         </a:solidFill>
         <a:latin typeface="+mn-lt"/>
-        <a:ea typeface="+mn-ea"/>
-        <a:cs typeface="+mn-cs"/>
+        <a:cs typeface="Amiri" pitchFamily="2" charset="-78"/>
       </a:defRPr>
     </a:lvl2pPr>
     <a:lvl3pPr marL="914400" algn="l" defTabSz="914400" rtl="0" eaLnBrk="1" latinLnBrk="0" hangingPunct="1">
@@ -404,8 +409,7 @@
           <a:schemeClr val="tx1"/>
         </a:solidFill>
         <a:latin typeface="+mn-lt"/>
-        <a:ea typeface="+mn-ea"/>
-        <a:cs typeface="+mn-cs"/>
+        <a:cs typeface="Amiri" pitchFamily="2" charset="-78"/>
       </a:defRPr>
     </a:lvl3pPr>
     <a:lvl4pPr marL="1371600" algn="l" defTabSz="914400" rtl="0" eaLnBrk="1" latinLnBrk="0" hangingPunct="1">
@@ -414,8 +418,7 @@
           <a:schemeClr val="tx1"/>
         </a:solidFill>
         <a:latin typeface="+mn-lt"/>
-        <a:ea typeface="+mn-ea"/>
-        <a:cs typeface="+mn-cs"/>
+        <a:cs typeface="Amiri" pitchFamily="2" charset="-78"/>
       </a:defRPr>
     </a:lvl4pPr>
     <a:lvl5pPr marL="1828800" algn="l" defTabSz="914400" rtl="0" eaLnBrk="1" latinLnBrk="0" hangingPunct="1">
@@ -424,8 +427,7 @@
           <a:schemeClr val="tx1"/>
         </a:solidFill>
         <a:latin typeface="+mn-lt"/>
-        <a:ea typeface="+mn-ea"/>
-        <a:cs typeface="+mn-cs"/>
+        <a:cs typeface="Amiri" pitchFamily="2" charset="-78"/>
       </a:defRPr>
     </a:lvl5pPr>
     <a:lvl6pPr marL="2286000" algn="l" defTabSz="914400" rtl="0" eaLnBrk="1" latinLnBrk="0" hangingPunct="1">
@@ -434,8 +436,7 @@
           <a:schemeClr val="tx1"/>
         </a:solidFill>
         <a:latin typeface="+mn-lt"/>
-        <a:ea typeface="+mn-ea"/>
-        <a:cs typeface="+mn-cs"/>
+        <a:cs typeface="Amiri" pitchFamily="2" charset="-78"/>
       </a:defRPr>
     </a:lvl6pPr>
     <a:lvl7pPr marL="2743200" algn="l" defTabSz="914400" rtl="0" eaLnBrk="1" latinLnBrk="0" hangingPunct="1">
@@ -444,8 +445,7 @@
           <a:schemeClr val="tx1"/>
         </a:solidFill>
         <a:latin typeface="+mn-lt"/>
-        <a:ea typeface="+mn-ea"/>
-        <a:cs typeface="+mn-cs"/>
+        <a:cs typeface="Amiri" pitchFamily="2" charset="-78"/>
       </a:defRPr>
     </a:lvl7pPr>
     <a:lvl8pPr marL="3200400" algn="l" defTabSz="914400" rtl="0" eaLnBrk="1" latinLnBrk="0" hangingPunct="1">
@@ -454,8 +454,7 @@
           <a:schemeClr val="tx1"/>
         </a:solidFill>
         <a:latin typeface="+mn-lt"/>
-        <a:ea typeface="+mn-ea"/>
-        <a:cs typeface="+mn-cs"/>
+        <a:cs typeface="Amiri" pitchFamily="2" charset="-78"/>
       </a:defRPr>
     </a:lvl8pPr>
     <a:lvl9pPr marL="3657600" algn="l" defTabSz="914400" rtl="0" eaLnBrk="1" latinLnBrk="0" hangingPunct="1">
@@ -464,8 +463,7 @@
           <a:schemeClr val="tx1"/>
         </a:solidFill>
         <a:latin typeface="+mn-lt"/>
-        <a:ea typeface="+mn-ea"/>
-        <a:cs typeface="+mn-cs"/>
+        <a:cs typeface="Amiri" pitchFamily="2" charset="-78"/>
       </a:defRPr>
     </a:lvl9pPr>
   </p:notesStyle>
@@ -2072,8 +2070,7 @@
             <a:schemeClr val="tx1"/>
           </a:solidFill>
           <a:latin typeface="+mj-lt"/>
-          <a:ea typeface="+mj-ea"/>
-          <a:cs typeface="+mj-cs"/>
+          <a:cs typeface="Amiri" pitchFamily="2" charset="-78"/>
         </a:defRPr>
       </a:lvl1pPr>
     </p:titleStyle>
@@ -2089,8 +2086,7 @@
             <a:schemeClr val="tx1"/>
           </a:solidFill>
           <a:latin typeface="+mn-lt"/>
-          <a:ea typeface="+mn-ea"/>
-          <a:cs typeface="+mn-cs"/>
+          <a:cs typeface="Amiri" pitchFamily="2" charset="-78"/>
         </a:defRPr>
       </a:lvl1pPr>
       <a:lvl2pPr marL="742950" indent="-285750" algn="l" defTabSz="914400" rtl="0" eaLnBrk="1" latinLnBrk="0" hangingPunct="1">
@@ -2104,8 +2100,7 @@
             <a:schemeClr val="tx1"/>
           </a:solidFill>
           <a:latin typeface="+mn-lt"/>
-          <a:ea typeface="+mn-ea"/>
-          <a:cs typeface="+mn-cs"/>
+          <a:cs typeface="Amiri" pitchFamily="2" charset="-78"/>
         </a:defRPr>
       </a:lvl2pPr>
       <a:lvl3pPr marL="1143000" indent="-228600" algn="l" defTabSz="914400" rtl="0" eaLnBrk="1" latinLnBrk="0" hangingPunct="1">
@@ -2119,8 +2114,7 @@
             <a:schemeClr val="tx1"/>
           </a:solidFill>
           <a:latin typeface="+mn-lt"/>
-          <a:ea typeface="+mn-ea"/>
-          <a:cs typeface="+mn-cs"/>
+          <a:cs typeface="Amiri" pitchFamily="2" charset="-78"/>
         </a:defRPr>
       </a:lvl3pPr>
       <a:lvl4pPr marL="1600200" indent="-228600" algn="l" defTabSz="914400" rtl="0" eaLnBrk="1" latinLnBrk="0" hangingPunct="1">
@@ -2134,8 +2128,7 @@
             <a:schemeClr val="tx1"/>
           </a:solidFill>
           <a:latin typeface="+mn-lt"/>
-          <a:ea typeface="+mn-ea"/>
-          <a:cs typeface="+mn-cs"/>
+          <a:cs typeface="Amiri" pitchFamily="2" charset="-78"/>
         </a:defRPr>
       </a:lvl4pPr>
       <a:lvl5pPr marL="2057400" indent="-228600" algn="l" defTabSz="914400" rtl="0" eaLnBrk="1" latinLnBrk="0" hangingPunct="1">
@@ -2149,8 +2142,7 @@
             <a:schemeClr val="tx1"/>
           </a:solidFill>
           <a:latin typeface="+mn-lt"/>
-          <a:ea typeface="+mn-ea"/>
-          <a:cs typeface="+mn-cs"/>
+          <a:cs typeface="Amiri" pitchFamily="2" charset="-78"/>
         </a:defRPr>
       </a:lvl5pPr>
       <a:lvl6pPr marL="2514600" indent="-228600" algn="l" defTabSz="914400" rtl="0" eaLnBrk="1" latinLnBrk="0" hangingPunct="1">
@@ -2164,8 +2156,7 @@
             <a:schemeClr val="tx1"/>
           </a:solidFill>
           <a:latin typeface="+mn-lt"/>
-          <a:ea typeface="+mn-ea"/>
-          <a:cs typeface="+mn-cs"/>
+          <a:cs typeface="Amiri" pitchFamily="2" charset="-78"/>
         </a:defRPr>
       </a:lvl6pPr>
       <a:lvl7pPr marL="2971800" indent="-228600" algn="l" defTabSz="914400" rtl="0" eaLnBrk="1" latinLnBrk="0" hangingPunct="1">
@@ -2179,8 +2170,7 @@
             <a:schemeClr val="tx1"/>
           </a:solidFill>
           <a:latin typeface="+mn-lt"/>
-          <a:ea typeface="+mn-ea"/>
-          <a:cs typeface="+mn-cs"/>
+          <a:cs typeface="Amiri" pitchFamily="2" charset="-78"/>
         </a:defRPr>
       </a:lvl7pPr>
       <a:lvl8pPr marL="3429000" indent="-228600" algn="l" defTabSz="914400" rtl="0" eaLnBrk="1" latinLnBrk="0" hangingPunct="1">
@@ -2194,8 +2184,7 @@
             <a:schemeClr val="tx1"/>
           </a:solidFill>
           <a:latin typeface="+mn-lt"/>
-          <a:ea typeface="+mn-ea"/>
-          <a:cs typeface="+mn-cs"/>
+          <a:cs typeface="Amiri" pitchFamily="2" charset="-78"/>
         </a:defRPr>
       </a:lvl8pPr>
       <a:lvl9pPr marL="3886200" indent="-228600" algn="l" defTabSz="914400" rtl="0" eaLnBrk="1" latinLnBrk="0" hangingPunct="1">
@@ -2209,8 +2198,7 @@
             <a:schemeClr val="tx1"/>
           </a:solidFill>
           <a:latin typeface="+mn-lt"/>
-          <a:ea typeface="+mn-ea"/>
-          <a:cs typeface="+mn-cs"/>
+          <a:cs typeface="Amiri" pitchFamily="2" charset="-78"/>
         </a:defRPr>
       </a:lvl9pPr>
     </p:bodyStyle>
@@ -2224,8 +2212,7 @@
             <a:schemeClr val="tx1"/>
           </a:solidFill>
           <a:latin typeface="+mn-lt"/>
-          <a:ea typeface="+mn-ea"/>
-          <a:cs typeface="+mn-cs"/>
+          <a:cs typeface="Amiri" pitchFamily="2" charset="-78"/>
         </a:defRPr>
       </a:lvl1pPr>
       <a:lvl2pPr marL="457200" algn="l" defTabSz="914400" rtl="0" eaLnBrk="1" latinLnBrk="0" hangingPunct="1">
@@ -2234,8 +2221,7 @@
             <a:schemeClr val="tx1"/>
           </a:solidFill>
           <a:latin typeface="+mn-lt"/>
-          <a:ea typeface="+mn-ea"/>
-          <a:cs typeface="+mn-cs"/>
+          <a:cs typeface="Amiri" pitchFamily="2" charset="-78"/>
         </a:defRPr>
       </a:lvl2pPr>
       <a:lvl3pPr marL="914400" algn="l" defTabSz="914400" rtl="0" eaLnBrk="1" latinLnBrk="0" hangingPunct="1">
@@ -2244,8 +2230,7 @@
             <a:schemeClr val="tx1"/>
           </a:solidFill>
           <a:latin typeface="+mn-lt"/>
-          <a:ea typeface="+mn-ea"/>
-          <a:cs typeface="+mn-cs"/>
+          <a:cs typeface="Amiri" pitchFamily="2" charset="-78"/>
         </a:defRPr>
       </a:lvl3pPr>
       <a:lvl4pPr marL="1371600" algn="l" defTabSz="914400" rtl="0" eaLnBrk="1" latinLnBrk="0" hangingPunct="1">
@@ -2254,8 +2239,7 @@
             <a:schemeClr val="tx1"/>
           </a:solidFill>
           <a:latin typeface="+mn-lt"/>
-          <a:ea typeface="+mn-ea"/>
-          <a:cs typeface="+mn-cs"/>
+          <a:cs typeface="Amiri" pitchFamily="2" charset="-78"/>
         </a:defRPr>
       </a:lvl4pPr>
       <a:lvl5pPr marL="1828800" algn="l" defTabSz="914400" rtl="0" eaLnBrk="1" latinLnBrk="0" hangingPunct="1">
@@ -2264,8 +2248,7 @@
             <a:schemeClr val="tx1"/>
           </a:solidFill>
           <a:latin typeface="+mn-lt"/>
-          <a:ea typeface="+mn-ea"/>
-          <a:cs typeface="+mn-cs"/>
+          <a:cs typeface="Amiri" pitchFamily="2" charset="-78"/>
         </a:defRPr>
       </a:lvl5pPr>
       <a:lvl6pPr marL="2286000" algn="l" defTabSz="914400" rtl="0" eaLnBrk="1" latinLnBrk="0" hangingPunct="1">
@@ -2274,8 +2257,7 @@
             <a:schemeClr val="tx1"/>
           </a:solidFill>
           <a:latin typeface="+mn-lt"/>
-          <a:ea typeface="+mn-ea"/>
-          <a:cs typeface="+mn-cs"/>
+          <a:cs typeface="Amiri" pitchFamily="2" charset="-78"/>
         </a:defRPr>
       </a:lvl6pPr>
       <a:lvl7pPr marL="2743200" algn="l" defTabSz="914400" rtl="0" eaLnBrk="1" latinLnBrk="0" hangingPunct="1">
@@ -2284,8 +2266,7 @@
             <a:schemeClr val="tx1"/>
           </a:solidFill>
           <a:latin typeface="+mn-lt"/>
-          <a:ea typeface="+mn-ea"/>
-          <a:cs typeface="+mn-cs"/>
+          <a:cs typeface="Amiri" pitchFamily="2" charset="-78"/>
         </a:defRPr>
       </a:lvl7pPr>
       <a:lvl8pPr marL="3200400" algn="l" defTabSz="914400" rtl="0" eaLnBrk="1" latinLnBrk="0" hangingPunct="1">
@@ -2294,8 +2275,7 @@
             <a:schemeClr val="tx1"/>
           </a:solidFill>
           <a:latin typeface="+mn-lt"/>
-          <a:ea typeface="+mn-ea"/>
-          <a:cs typeface="+mn-cs"/>
+          <a:cs typeface="Amiri" pitchFamily="2" charset="-78"/>
         </a:defRPr>
       </a:lvl8pPr>
       <a:lvl9pPr marL="3657600" algn="l" defTabSz="914400" rtl="0" eaLnBrk="1" latinLnBrk="0" hangingPunct="1">
@@ -2304,8 +2284,7 @@
             <a:schemeClr val="tx1"/>
           </a:solidFill>
           <a:latin typeface="+mn-lt"/>
-          <a:ea typeface="+mn-ea"/>
-          <a:cs typeface="+mn-cs"/>
+          <a:cs typeface="Amiri" pitchFamily="2" charset="-78"/>
         </a:defRPr>
       </a:lvl9pPr>
     </p:otherStyle>
@@ -2465,9 +2444,8 @@
                 <a:solidFill>
                   <a:srgbClr val="D4AF37"/>
                 </a:solidFill>
-                <a:latin typeface="Amiri" pitchFamily="34" charset="0"/>
-                <a:ea typeface="Amiri" pitchFamily="34" charset="-122"/>
-                <a:cs typeface="Amiri" pitchFamily="34" charset="-120"/>
+                <a:latin typeface="Amiri" pitchFamily="2" charset="-78"/>
+                <a:cs typeface="Amiri" pitchFamily="2" charset="-78"/>
               </a:rPr>
               <a:t>م</a:t>
             </a:r>
@@ -2505,8 +2483,7 @@
                   <a:srgbClr val="FFFFFF"/>
                 </a:solidFill>
                 <a:latin typeface="Cambria" pitchFamily="34" charset="0"/>
-                <a:ea typeface="Cambria" pitchFamily="34" charset="-122"/>
-                <a:cs typeface="Cambria" pitchFamily="34" charset="-120"/>
+                <a:cs typeface="Amiri" pitchFamily="2" charset="-78"/>
               </a:rPr>
               <a:t>Al Madina Online School</a:t>
             </a:r>
@@ -2522,8 +2499,7 @@
                   <a:srgbClr val="D4AF37"/>
                 </a:solidFill>
                 <a:latin typeface="Calibri" pitchFamily="34" charset="0"/>
-                <a:ea typeface="Calibri" pitchFamily="34" charset="-122"/>
-                <a:cs typeface="Calibri" pitchFamily="34" charset="-120"/>
+                <a:cs typeface="Amiri" pitchFamily="2" charset="-78"/>
               </a:rPr>
               <a:t>ARABIC DEPARTMENT · MIFTAH ARABIC</a:t>
             </a:r>
@@ -2561,8 +2537,7 @@
                   <a:srgbClr val="D4AF37"/>
                 </a:solidFill>
                 <a:latin typeface="Calibri" pitchFamily="34" charset="0"/>
-                <a:ea typeface="Calibri" pitchFamily="34" charset="-122"/>
-                <a:cs typeface="Calibri" pitchFamily="34" charset="-120"/>
+                <a:cs typeface="Amiri" pitchFamily="2" charset="-78"/>
               </a:rPr>
               <a:t>CAMBRIDGE IGCSE ARABIC 0544  ·  YEAR 9  ·  PROGRESSION P6  ·  P6-L10</a:t>
             </a:r>
@@ -2600,8 +2575,7 @@
                   <a:srgbClr val="9FB3D1"/>
                 </a:solidFill>
                 <a:latin typeface="Cambria" pitchFamily="34" charset="0"/>
-                <a:ea typeface="Cambria" pitchFamily="34" charset="-122"/>
-                <a:cs typeface="Cambria" pitchFamily="34" charset="-120"/>
+                <a:cs typeface="Amiri" pitchFamily="2" charset="-78"/>
               </a:rPr>
               <a:t>P6-L10</a:t>
             </a:r>
@@ -2639,8 +2613,7 @@
                   <a:srgbClr val="FFFFFF"/>
                 </a:solidFill>
                 <a:latin typeface="Cambria" pitchFamily="34" charset="0"/>
-                <a:ea typeface="Cambria" pitchFamily="34" charset="-122"/>
-                <a:cs typeface="Cambria" pitchFamily="34" charset="-120"/>
+                <a:cs typeface="Amiri" pitchFamily="2" charset="-78"/>
               </a:rPr>
               <a:t>Mock Examination — Paper 3 Speaking (Full IGCSE Format)</a:t>
             </a:r>
@@ -2677,9 +2650,8 @@
                 <a:solidFill>
                   <a:srgbClr val="D4AF37"/>
                 </a:solidFill>
-                <a:latin typeface="Amiri" pitchFamily="34" charset="0"/>
-                <a:ea typeface="Amiri" pitchFamily="34" charset="-122"/>
-                <a:cs typeface="Amiri" pitchFamily="34" charset="-120"/>
+                <a:latin typeface="Amiri" pitchFamily="2" charset="-78"/>
+                <a:cs typeface="Amiri" pitchFamily="2" charset="-78"/>
               </a:rPr>
               <a:t>امْتِحَانُ المُحَاكَاةِ — الوَرَقَةُ الثَّالِثَةُ: التَّحَدُّثُ</a:t>
             </a:r>
@@ -2717,8 +2689,7 @@
                   <a:srgbClr val="C6D2E6"/>
                 </a:solidFill>
                 <a:latin typeface="Calibri" pitchFamily="34" charset="0"/>
-                <a:ea typeface="Calibri" pitchFamily="34" charset="-122"/>
-                <a:cs typeface="Calibri" pitchFamily="34" charset="-120"/>
+                <a:cs typeface="Amiri" pitchFamily="2" charset="-78"/>
               </a:rPr>
               <a:t>Sit the mock Paper 3 in full IGCSE format — a role play (10) and a topic conversation (20) — recorded under exam conditions, then self-mark Communication, Accuracy and Quality of Language against the scheme.</a:t>
             </a:r>
@@ -2783,8 +2754,7 @@
                   <a:srgbClr val="D4AF37"/>
                 </a:solidFill>
                 <a:latin typeface="Calibri" pitchFamily="34" charset="0"/>
-                <a:ea typeface="Calibri" pitchFamily="34" charset="-122"/>
-                <a:cs typeface="Calibri" pitchFamily="34" charset="-120"/>
+                <a:cs typeface="Amiri" pitchFamily="2" charset="-78"/>
               </a:rPr>
               <a:t>LESSON</a:t>
             </a:r>
@@ -2800,8 +2770,7 @@
                   <a:srgbClr val="FFFFFF"/>
                 </a:solidFill>
                 <a:latin typeface="Calibri" pitchFamily="34" charset="0"/>
-                <a:ea typeface="Calibri" pitchFamily="34" charset="-122"/>
-                <a:cs typeface="Calibri" pitchFamily="34" charset="-120"/>
+                <a:cs typeface="Amiri" pitchFamily="2" charset="-78"/>
               </a:rPr>
               <a:t>P6-L10 · Progression P6 · IGCSE Bridge</a:t>
             </a:r>
@@ -2866,8 +2835,7 @@
                   <a:srgbClr val="D4AF37"/>
                 </a:solidFill>
                 <a:latin typeface="Calibri" pitchFamily="34" charset="0"/>
-                <a:ea typeface="Calibri" pitchFamily="34" charset="-122"/>
-                <a:cs typeface="Calibri" pitchFamily="34" charset="-120"/>
+                <a:cs typeface="Amiri" pitchFamily="2" charset="-78"/>
               </a:rPr>
               <a:t>DURATION</a:t>
             </a:r>
@@ -2883,8 +2851,7 @@
                   <a:srgbClr val="FFFFFF"/>
                 </a:solidFill>
                 <a:latin typeface="Calibri" pitchFamily="34" charset="0"/>
-                <a:ea typeface="Calibri" pitchFamily="34" charset="-122"/>
-                <a:cs typeface="Calibri" pitchFamily="34" charset="-120"/>
+                <a:cs typeface="Amiri" pitchFamily="2" charset="-78"/>
               </a:rPr>
               <a:t>60 minutes · Teams</a:t>
             </a:r>
@@ -2949,8 +2916,7 @@
                   <a:srgbClr val="D4AF37"/>
                 </a:solidFill>
                 <a:latin typeface="Calibri" pitchFamily="34" charset="0"/>
-                <a:ea typeface="Calibri" pitchFamily="34" charset="-122"/>
-                <a:cs typeface="Calibri" pitchFamily="34" charset="-120"/>
+                <a:cs typeface="Amiri" pitchFamily="2" charset="-78"/>
               </a:rPr>
               <a:t>LEVEL</a:t>
             </a:r>
@@ -2966,8 +2932,7 @@
                   <a:srgbClr val="FFFFFF"/>
                 </a:solidFill>
                 <a:latin typeface="Calibri" pitchFamily="34" charset="0"/>
-                <a:ea typeface="Calibri" pitchFamily="34" charset="-122"/>
-                <a:cs typeface="Calibri" pitchFamily="34" charset="-120"/>
+                <a:cs typeface="Amiri" pitchFamily="2" charset="-78"/>
               </a:rPr>
               <a:t>Progression · B1 → B2</a:t>
             </a:r>
@@ -3032,8 +2997,7 @@
                   <a:srgbClr val="D4AF37"/>
                 </a:solidFill>
                 <a:latin typeface="Calibri" pitchFamily="34" charset="0"/>
-                <a:ea typeface="Calibri" pitchFamily="34" charset="-122"/>
-                <a:cs typeface="Calibri" pitchFamily="34" charset="-120"/>
+                <a:cs typeface="Amiri" pitchFamily="2" charset="-78"/>
               </a:rPr>
               <a:t>ON THE WEBSITE</a:t>
             </a:r>
@@ -3049,8 +3013,7 @@
                   <a:srgbClr val="FFFFFF"/>
                 </a:solidFill>
                 <a:latin typeface="Calibri" pitchFamily="34" charset="0"/>
-                <a:ea typeface="Calibri" pitchFamily="34" charset="-122"/>
-                <a:cs typeface="Calibri" pitchFamily="34" charset="-120"/>
+                <a:cs typeface="Amiri" pitchFamily="2" charset="-78"/>
               </a:rPr>
               <a:t>Pathways › Progression › P6 › P6-L10</a:t>
             </a:r>
@@ -3144,9 +3107,8 @@
                 <a:solidFill>
                   <a:srgbClr val="D4AF37"/>
                 </a:solidFill>
-                <a:latin typeface="Amiri" pitchFamily="34" charset="0"/>
-                <a:ea typeface="Amiri" pitchFamily="34" charset="-122"/>
-                <a:cs typeface="Amiri" pitchFamily="34" charset="-120"/>
+                <a:latin typeface="Amiri" pitchFamily="2" charset="-78"/>
+                <a:cs typeface="Amiri" pitchFamily="2" charset="-78"/>
               </a:rPr>
               <a:t>م</a:t>
             </a:r>
@@ -3184,8 +3146,7 @@
                   <a:srgbClr val="1B3B6F"/>
                 </a:solidFill>
                 <a:latin typeface="Cambria" pitchFamily="34" charset="0"/>
-                <a:ea typeface="Cambria" pitchFamily="34" charset="-122"/>
-                <a:cs typeface="Cambria" pitchFamily="34" charset="-120"/>
+                <a:cs typeface="Amiri" pitchFamily="2" charset="-78"/>
               </a:rPr>
               <a:t>Al Madina Online School</a:t>
             </a:r>
@@ -3223,8 +3184,7 @@
                   <a:srgbClr val="8A6D1E"/>
                 </a:solidFill>
                 <a:latin typeface="Calibri" pitchFamily="34" charset="0"/>
-                <a:ea typeface="Calibri" pitchFamily="34" charset="-122"/>
-                <a:cs typeface="Calibri" pitchFamily="34" charset="-120"/>
+                <a:cs typeface="Amiri" pitchFamily="2" charset="-78"/>
               </a:rPr>
               <a:t>ARABIC DEPARTMENT · MIFTAH ARABIC · IGCSE 0544</a:t>
             </a:r>
@@ -3289,8 +3249,7 @@
                   <a:srgbClr val="FFFFFF"/>
                 </a:solidFill>
                 <a:latin typeface="Calibri" pitchFamily="34" charset="0"/>
-                <a:ea typeface="Calibri" pitchFamily="34" charset="-122"/>
-                <a:cs typeface="Calibri" pitchFamily="34" charset="-120"/>
+                <a:cs typeface="Amiri" pitchFamily="2" charset="-78"/>
               </a:rPr>
               <a:t>P6-L10 · IGCSE Bridge</a:t>
             </a:r>
@@ -3355,8 +3314,7 @@
                   <a:srgbClr val="FFFFFF"/>
                 </a:solidFill>
                 <a:latin typeface="Calibri" pitchFamily="34" charset="0"/>
-                <a:ea typeface="Calibri" pitchFamily="34" charset="-122"/>
-                <a:cs typeface="Calibri" pitchFamily="34" charset="-120"/>
+                <a:cs typeface="Amiri" pitchFamily="2" charset="-78"/>
               </a:rPr>
               <a:t>YOU DO · 10 MIN</a:t>
             </a:r>
@@ -3394,8 +3352,7 @@
                   <a:srgbClr val="1E6B52"/>
                 </a:solidFill>
                 <a:latin typeface="Calibri" pitchFamily="34" charset="0"/>
-                <a:ea typeface="Calibri" pitchFamily="34" charset="-122"/>
-                <a:cs typeface="Calibri" pitchFamily="34" charset="-120"/>
+                <a:cs typeface="Amiri" pitchFamily="2" charset="-78"/>
               </a:rPr>
               <a:t>MOCK · PAPER 3 · PART 2 — TOPIC CONVERSATION (20 MARKS) · ABOUT 7 MINUTES</a:t>
             </a:r>
@@ -3433,8 +3390,7 @@
                   <a:srgbClr val="1B3B6F"/>
                 </a:solidFill>
                 <a:latin typeface="Cambria" pitchFamily="34" charset="0"/>
-                <a:ea typeface="Cambria" pitchFamily="34" charset="-122"/>
-                <a:cs typeface="Cambria" pitchFamily="34" charset="-120"/>
+                <a:cs typeface="Amiri" pitchFamily="2" charset="-78"/>
               </a:rPr>
               <a:t>Part 2 — Topic conversation</a:t>
             </a:r>
@@ -3471,9 +3427,8 @@
                 <a:solidFill>
                   <a:srgbClr val="8A6D1E"/>
                 </a:solidFill>
-                <a:latin typeface="Amiri" pitchFamily="34" charset="0"/>
-                <a:ea typeface="Amiri" pitchFamily="34" charset="-122"/>
-                <a:cs typeface="Amiri" pitchFamily="34" charset="-120"/>
+                <a:latin typeface="Amiri" pitchFamily="2" charset="-78"/>
+                <a:cs typeface="Amiri" pitchFamily="2" charset="-78"/>
               </a:rPr>
               <a:t>المُحَادَثَةُ المَوْضُوعِيَّةُ</a:t>
             </a:r>
@@ -3511,8 +3466,7 @@
                   <a:srgbClr val="8A93A0"/>
                 </a:solidFill>
                 <a:latin typeface="Calibri" pitchFamily="34" charset="0"/>
-                <a:ea typeface="Calibri" pitchFamily="34" charset="-122"/>
-                <a:cs typeface="Calibri" pitchFamily="34" charset="-120"/>
+                <a:cs typeface="Amiri" pitchFamily="2" charset="-78"/>
               </a:rPr>
               <a:t>Miftah Arabic · Progression P6 · IGCSE Bridge · P6-L10</a:t>
             </a:r>
@@ -3575,8 +3529,7 @@
                   <a:srgbClr val="FFFFFF"/>
                 </a:solidFill>
                 <a:latin typeface="Calibri" pitchFamily="34" charset="0"/>
-                <a:ea typeface="Calibri" pitchFamily="34" charset="-122"/>
-                <a:cs typeface="Calibri" pitchFamily="34" charset="-120"/>
+                <a:cs typeface="Amiri" pitchFamily="2" charset="-78"/>
               </a:rPr>
               <a:t>Time to answer</a:t>
             </a:r>
@@ -3614,8 +3567,7 @@
                   <a:srgbClr val="FFFFFF"/>
                 </a:solidFill>
                 <a:latin typeface="Calibri" pitchFamily="34" charset="0"/>
-                <a:ea typeface="Calibri" pitchFamily="34" charset="-122"/>
-                <a:cs typeface="Calibri" pitchFamily="34" charset="-120"/>
+                <a:cs typeface="Amiri" pitchFamily="2" charset="-78"/>
               </a:rPr>
               <a:t>Meaning</a:t>
             </a:r>
@@ -3653,8 +3605,7 @@
                   <a:srgbClr val="FFFFFF"/>
                 </a:solidFill>
                 <a:latin typeface="Calibri" pitchFamily="34" charset="0"/>
-                <a:ea typeface="Calibri" pitchFamily="34" charset="-122"/>
-                <a:cs typeface="Calibri" pitchFamily="34" charset="-120"/>
+                <a:cs typeface="Amiri" pitchFamily="2" charset="-78"/>
               </a:rPr>
               <a:t>Prompt (website)</a:t>
             </a:r>
@@ -3719,8 +3670,7 @@
                   <a:srgbClr val="5A6472"/>
                 </a:solidFill>
                 <a:latin typeface="Calibri" pitchFamily="34" charset="0"/>
-                <a:ea typeface="Calibri" pitchFamily="34" charset="-122"/>
-                <a:cs typeface="Calibri" pitchFamily="34" charset="-120"/>
+                <a:cs typeface="Amiri" pitchFamily="2" charset="-78"/>
               </a:rPr>
               <a:t>about 2 minutes</a:t>
             </a:r>
@@ -3758,8 +3708,7 @@
                   <a:srgbClr val="5A6472"/>
                 </a:solidFill>
                 <a:latin typeface="Calibri" pitchFamily="34" charset="0"/>
-                <a:ea typeface="Calibri" pitchFamily="34" charset="-122"/>
-                <a:cs typeface="Calibri" pitchFamily="34" charset="-120"/>
+                <a:cs typeface="Amiri" pitchFamily="2" charset="-78"/>
               </a:rPr>
               <a:t>What is the biggest social challenge facing young people today, and why? (opinion · reason · example)</a:t>
             </a:r>
@@ -3799,9 +3748,8 @@
                 <a:solidFill>
                   <a:srgbClr val="1B3B6F"/>
                 </a:solidFill>
-                <a:latin typeface="Amiri" pitchFamily="34" charset="0"/>
-                <a:ea typeface="Amiri" pitchFamily="34" charset="-122"/>
-                <a:cs typeface="Amiri" pitchFamily="34" charset="-120"/>
+                <a:latin typeface="Amiri" pitchFamily="2" charset="-78"/>
+                <a:cs typeface="Amiri" pitchFamily="2" charset="-78"/>
               </a:rPr>
               <a:t>مَا أَكْبَرُ تَحَدٍّ اجْتِمَاعِيٍّ يُوَاجِهُ الشَّبَابَ اليَوْمَ؟ وَلِمَاذَا؟</a:t>
             </a:r>
@@ -3866,8 +3814,7 @@
                   <a:srgbClr val="5A6472"/>
                 </a:solidFill>
                 <a:latin typeface="Calibri" pitchFamily="34" charset="0"/>
-                <a:ea typeface="Calibri" pitchFamily="34" charset="-122"/>
-                <a:cs typeface="Calibri" pitchFamily="34" charset="-120"/>
+                <a:cs typeface="Amiri" pitchFamily="2" charset="-78"/>
               </a:rPr>
               <a:t>about 2 minutes</a:t>
             </a:r>
@@ -3905,8 +3852,7 @@
                   <a:srgbClr val="5A6472"/>
                 </a:solidFill>
                 <a:latin typeface="Calibri" pitchFamily="34" charset="0"/>
-                <a:ea typeface="Calibri" pitchFamily="34" charset="-122"/>
-                <a:cs typeface="Calibri" pitchFamily="34" charset="-120"/>
+                <a:cs typeface="Amiri" pitchFamily="2" charset="-78"/>
               </a:rPr>
               <a:t>Does technology deepen isolation or reduce it? (concede, then refute)</a:t>
             </a:r>
@@ -3943,9 +3889,8 @@
                 <a:solidFill>
                   <a:srgbClr val="1B3B6F"/>
                 </a:solidFill>
-                <a:latin typeface="Amiri" pitchFamily="34" charset="0"/>
-                <a:ea typeface="Amiri" pitchFamily="34" charset="-122"/>
-                <a:cs typeface="Amiri" pitchFamily="34" charset="-120"/>
+                <a:latin typeface="Amiri" pitchFamily="2" charset="-78"/>
+                <a:cs typeface="Amiri" pitchFamily="2" charset="-78"/>
               </a:rPr>
               <a:t>هَلْ تُعَمِّقُ التِّقْنِيَّةُ العُزْلَةَ أَمْ تُقَلِّلُهَا؟</a:t>
             </a:r>
@@ -4010,8 +3955,7 @@
                   <a:srgbClr val="5A6472"/>
                 </a:solidFill>
                 <a:latin typeface="Calibri" pitchFamily="34" charset="0"/>
-                <a:ea typeface="Calibri" pitchFamily="34" charset="-122"/>
-                <a:cs typeface="Calibri" pitchFamily="34" charset="-120"/>
+                <a:cs typeface="Amiri" pitchFamily="2" charset="-78"/>
               </a:rPr>
               <a:t>about 2 minutes</a:t>
             </a:r>
@@ -4049,8 +3993,7 @@
                   <a:srgbClr val="5A6472"/>
                 </a:solidFill>
                 <a:latin typeface="Calibri" pitchFamily="34" charset="0"/>
-                <a:ea typeface="Calibri" pitchFamily="34" charset="-122"/>
-                <a:cs typeface="Calibri" pitchFamily="34" charset="-120"/>
+                <a:cs typeface="Amiri" pitchFamily="2" charset="-78"/>
               </a:rPr>
               <a:t>If you were in charge of education, what would you change? (lau …)</a:t>
             </a:r>
@@ -4087,9 +4030,8 @@
                 <a:solidFill>
                   <a:srgbClr val="1B3B6F"/>
                 </a:solidFill>
-                <a:latin typeface="Amiri" pitchFamily="34" charset="0"/>
-                <a:ea typeface="Amiri" pitchFamily="34" charset="-122"/>
-                <a:cs typeface="Amiri" pitchFamily="34" charset="-120"/>
+                <a:latin typeface="Amiri" pitchFamily="2" charset="-78"/>
+                <a:cs typeface="Amiri" pitchFamily="2" charset="-78"/>
               </a:rPr>
               <a:t>لَوْ كُنْتَ مَسْؤُولًا عَنِ التَّعْلِيمِ، مَاذَا كُنْتَ سَتُغَيِّرُ؟</a:t>
             </a:r>
@@ -4127,8 +4069,7 @@
                   <a:srgbClr val="1B3B6F"/>
                 </a:solidFill>
                 <a:latin typeface="Calibri" pitchFamily="34" charset="0"/>
-                <a:ea typeface="Calibri" pitchFamily="34" charset="-122"/>
-                <a:cs typeface="Calibri" pitchFamily="34" charset="-120"/>
+                <a:cs typeface="Amiri" pitchFamily="2" charset="-78"/>
               </a:rPr>
               <a:t>Marks (website): Communication 15 (5 per question) · Quality of Language 5. Develop every answer: four or five sentences.</a:t>
             </a:r>
@@ -4166,8 +4107,7 @@
                   <a:srgbClr val="8A93A0"/>
                 </a:solidFill>
                 <a:latin typeface="Calibri" pitchFamily="34" charset="0"/>
-                <a:ea typeface="Calibri" pitchFamily="34" charset="-122"/>
-                <a:cs typeface="Calibri" pitchFamily="34" charset="-120"/>
+                <a:cs typeface="Amiri" pitchFamily="2" charset="-78"/>
               </a:rPr>
               <a:t>10 / 17</a:t>
             </a:r>
@@ -4261,9 +4201,8 @@
                 <a:solidFill>
                   <a:srgbClr val="D4AF37"/>
                 </a:solidFill>
-                <a:latin typeface="Amiri" pitchFamily="34" charset="0"/>
-                <a:ea typeface="Amiri" pitchFamily="34" charset="-122"/>
-                <a:cs typeface="Amiri" pitchFamily="34" charset="-120"/>
+                <a:latin typeface="Amiri" pitchFamily="2" charset="-78"/>
+                <a:cs typeface="Amiri" pitchFamily="2" charset="-78"/>
               </a:rPr>
               <a:t>م</a:t>
             </a:r>
@@ -4301,8 +4240,7 @@
                   <a:srgbClr val="1B3B6F"/>
                 </a:solidFill>
                 <a:latin typeface="Cambria" pitchFamily="34" charset="0"/>
-                <a:ea typeface="Cambria" pitchFamily="34" charset="-122"/>
-                <a:cs typeface="Cambria" pitchFamily="34" charset="-120"/>
+                <a:cs typeface="Amiri" pitchFamily="2" charset="-78"/>
               </a:rPr>
               <a:t>Al Madina Online School</a:t>
             </a:r>
@@ -4340,8 +4278,7 @@
                   <a:srgbClr val="8A6D1E"/>
                 </a:solidFill>
                 <a:latin typeface="Calibri" pitchFamily="34" charset="0"/>
-                <a:ea typeface="Calibri" pitchFamily="34" charset="-122"/>
-                <a:cs typeface="Calibri" pitchFamily="34" charset="-120"/>
+                <a:cs typeface="Amiri" pitchFamily="2" charset="-78"/>
               </a:rPr>
               <a:t>ARABIC DEPARTMENT · MIFTAH ARABIC · IGCSE 0544</a:t>
             </a:r>
@@ -4406,8 +4343,7 @@
                   <a:srgbClr val="FFFFFF"/>
                 </a:solidFill>
                 <a:latin typeface="Calibri" pitchFamily="34" charset="0"/>
-                <a:ea typeface="Calibri" pitchFamily="34" charset="-122"/>
-                <a:cs typeface="Calibri" pitchFamily="34" charset="-120"/>
+                <a:cs typeface="Amiri" pitchFamily="2" charset="-78"/>
               </a:rPr>
               <a:t>P6-L10 · IGCSE Bridge</a:t>
             </a:r>
@@ -4472,8 +4408,7 @@
                   <a:srgbClr val="FFFFFF"/>
                 </a:solidFill>
                 <a:latin typeface="Calibri" pitchFamily="34" charset="0"/>
-                <a:ea typeface="Calibri" pitchFamily="34" charset="-122"/>
-                <a:cs typeface="Calibri" pitchFamily="34" charset="-120"/>
+                <a:cs typeface="Amiri" pitchFamily="2" charset="-78"/>
               </a:rPr>
               <a:t>FEEDBACK · 12 MIN</a:t>
             </a:r>
@@ -4511,8 +4446,7 @@
                   <a:srgbClr val="8A6D1E"/>
                 </a:solidFill>
                 <a:latin typeface="Calibri" pitchFamily="34" charset="0"/>
-                <a:ea typeface="Calibri" pitchFamily="34" charset="-122"/>
-                <a:cs typeface="Calibri" pitchFamily="34" charset="-120"/>
+                <a:cs typeface="Amiri" pitchFamily="2" charset="-78"/>
               </a:rPr>
               <a:t>FEEDBACK · LISTEN BACK AND SELF-MARK</a:t>
             </a:r>
@@ -4550,8 +4484,7 @@
                   <a:srgbClr val="1B3B6F"/>
                 </a:solidFill>
                 <a:latin typeface="Cambria" pitchFamily="34" charset="0"/>
-                <a:ea typeface="Cambria" pitchFamily="34" charset="-122"/>
-                <a:cs typeface="Cambria" pitchFamily="34" charset="-120"/>
+                <a:cs typeface="Amiri" pitchFamily="2" charset="-78"/>
               </a:rPr>
               <a:t>Listen to your recording and mark it</a:t>
             </a:r>
@@ -4588,9 +4521,8 @@
                 <a:solidFill>
                   <a:srgbClr val="8A6D1E"/>
                 </a:solidFill>
-                <a:latin typeface="Amiri" pitchFamily="34" charset="0"/>
-                <a:ea typeface="Amiri" pitchFamily="34" charset="-122"/>
-                <a:cs typeface="Amiri" pitchFamily="34" charset="-120"/>
+                <a:latin typeface="Amiri" pitchFamily="2" charset="-78"/>
+                <a:cs typeface="Amiri" pitchFamily="2" charset="-78"/>
               </a:rPr>
               <a:t>قَيِّمْ تَسْجِيلَكَ</a:t>
             </a:r>
@@ -4628,8 +4560,7 @@
                   <a:srgbClr val="8A93A0"/>
                 </a:solidFill>
                 <a:latin typeface="Calibri" pitchFamily="34" charset="0"/>
-                <a:ea typeface="Calibri" pitchFamily="34" charset="-122"/>
-                <a:cs typeface="Calibri" pitchFamily="34" charset="-120"/>
+                <a:cs typeface="Amiri" pitchFamily="2" charset="-78"/>
               </a:rPr>
               <a:t>Miftah Arabic · Progression P6 · IGCSE Bridge · P6-L10</a:t>
             </a:r>
@@ -4692,8 +4623,7 @@
                   <a:srgbClr val="FFFFFF"/>
                 </a:solidFill>
                 <a:latin typeface="Calibri" pitchFamily="34" charset="0"/>
-                <a:ea typeface="Calibri" pitchFamily="34" charset="-122"/>
-                <a:cs typeface="Calibri" pitchFamily="34" charset="-120"/>
+                <a:cs typeface="Amiri" pitchFamily="2" charset="-78"/>
               </a:rPr>
               <a:t>Evidence (a phrase I said)</a:t>
             </a:r>
@@ -4731,8 +4661,7 @@
                   <a:srgbClr val="FFFFFF"/>
                 </a:solidFill>
                 <a:latin typeface="Calibri" pitchFamily="34" charset="0"/>
-                <a:ea typeface="Calibri" pitchFamily="34" charset="-122"/>
-                <a:cs typeface="Calibri" pitchFamily="34" charset="-120"/>
+                <a:cs typeface="Amiri" pitchFamily="2" charset="-78"/>
               </a:rPr>
               <a:t>My mark</a:t>
             </a:r>
@@ -4770,8 +4699,7 @@
                   <a:srgbClr val="FFFFFF"/>
                 </a:solidFill>
                 <a:latin typeface="Calibri" pitchFamily="34" charset="0"/>
-                <a:ea typeface="Calibri" pitchFamily="34" charset="-122"/>
-                <a:cs typeface="Calibri" pitchFamily="34" charset="-120"/>
+                <a:cs typeface="Amiri" pitchFamily="2" charset="-78"/>
               </a:rPr>
               <a:t>Marks</a:t>
             </a:r>
@@ -4809,8 +4737,7 @@
                   <a:srgbClr val="FFFFFF"/>
                 </a:solidFill>
                 <a:latin typeface="Calibri" pitchFamily="34" charset="0"/>
-                <a:ea typeface="Calibri" pitchFamily="34" charset="-122"/>
-                <a:cs typeface="Calibri" pitchFamily="34" charset="-120"/>
+                <a:cs typeface="Amiri" pitchFamily="2" charset="-78"/>
               </a:rPr>
               <a:t>Listen for …</a:t>
             </a:r>
@@ -4931,8 +4858,7 @@
                   <a:srgbClr val="5A6472"/>
                 </a:solidFill>
                 <a:latin typeface="Calibri" pitchFamily="34" charset="0"/>
-                <a:ea typeface="Calibri" pitchFamily="34" charset="-122"/>
-                <a:cs typeface="Calibri" pitchFamily="34" charset="-120"/>
+                <a:cs typeface="Amiri" pitchFamily="2" charset="-78"/>
               </a:rPr>
               <a:t>/6</a:t>
             </a:r>
@@ -4970,8 +4896,7 @@
                   <a:srgbClr val="5A6472"/>
                 </a:solidFill>
                 <a:latin typeface="Calibri" pitchFamily="34" charset="0"/>
-                <a:ea typeface="Calibri" pitchFamily="34" charset="-122"/>
-                <a:cs typeface="Calibri" pitchFamily="34" charset="-120"/>
+                <a:cs typeface="Amiri" pitchFamily="2" charset="-78"/>
               </a:rPr>
               <a:t>Role play — each prompt answered with a full, relevant sentence</a:t>
             </a:r>
@@ -5036,8 +4961,7 @@
                   <a:srgbClr val="FFFFFF"/>
                 </a:solidFill>
                 <a:latin typeface="Calibri" pitchFamily="34" charset="0"/>
-                <a:ea typeface="Calibri" pitchFamily="34" charset="-122"/>
-                <a:cs typeface="Calibri" pitchFamily="34" charset="-120"/>
+                <a:cs typeface="Amiri" pitchFamily="2" charset="-78"/>
               </a:rPr>
               <a:t>CORE</a:t>
             </a:r>
@@ -5158,8 +5082,7 @@
                   <a:srgbClr val="5A6472"/>
                 </a:solidFill>
                 <a:latin typeface="Calibri" pitchFamily="34" charset="0"/>
-                <a:ea typeface="Calibri" pitchFamily="34" charset="-122"/>
-                <a:cs typeface="Calibri" pitchFamily="34" charset="-120"/>
+                <a:cs typeface="Amiri" pitchFamily="2" charset="-78"/>
               </a:rPr>
               <a:t>/4</a:t>
             </a:r>
@@ -5197,8 +5120,7 @@
                   <a:srgbClr val="5A6472"/>
                 </a:solidFill>
                 <a:latin typeface="Calibri" pitchFamily="34" charset="0"/>
-                <a:ea typeface="Calibri" pitchFamily="34" charset="-122"/>
-                <a:cs typeface="Calibri" pitchFamily="34" charset="-120"/>
+                <a:cs typeface="Amiri" pitchFamily="2" charset="-78"/>
               </a:rPr>
               <a:t>Role play — accuracy across the four answers (4 = consistently accurate)</a:t>
             </a:r>
@@ -5263,8 +5185,7 @@
                   <a:srgbClr val="FFFFFF"/>
                 </a:solidFill>
                 <a:latin typeface="Calibri" pitchFamily="34" charset="0"/>
-                <a:ea typeface="Calibri" pitchFamily="34" charset="-122"/>
-                <a:cs typeface="Calibri" pitchFamily="34" charset="-120"/>
+                <a:cs typeface="Amiri" pitchFamily="2" charset="-78"/>
               </a:rPr>
               <a:t>CORE</a:t>
             </a:r>
@@ -5385,8 +5306,7 @@
                   <a:srgbClr val="5A6472"/>
                 </a:solidFill>
                 <a:latin typeface="Calibri" pitchFamily="34" charset="0"/>
-                <a:ea typeface="Calibri" pitchFamily="34" charset="-122"/>
-                <a:cs typeface="Calibri" pitchFamily="34" charset="-120"/>
+                <a:cs typeface="Amiri" pitchFamily="2" charset="-78"/>
               </a:rPr>
               <a:t>/15</a:t>
             </a:r>
@@ -5424,8 +5344,7 @@
                   <a:srgbClr val="5A6472"/>
                 </a:solidFill>
                 <a:latin typeface="Calibri" pitchFamily="34" charset="0"/>
-                <a:ea typeface="Calibri" pitchFamily="34" charset="-122"/>
-                <a:cs typeface="Calibri" pitchFamily="34" charset="-120"/>
+                <a:cs typeface="Amiri" pitchFamily="2" charset="-78"/>
               </a:rPr>
               <a:t>Conversation — each answer developed: opinion, reason, example (5 per question)</a:t>
             </a:r>
@@ -5546,8 +5465,7 @@
                   <a:srgbClr val="5A6472"/>
                 </a:solidFill>
                 <a:latin typeface="Calibri" pitchFamily="34" charset="0"/>
-                <a:ea typeface="Calibri" pitchFamily="34" charset="-122"/>
-                <a:cs typeface="Calibri" pitchFamily="34" charset="-120"/>
+                <a:cs typeface="Amiri" pitchFamily="2" charset="-78"/>
               </a:rPr>
               <a:t>/5</a:t>
             </a:r>
@@ -5585,8 +5503,7 @@
                   <a:srgbClr val="5A6472"/>
                 </a:solidFill>
                 <a:latin typeface="Calibri" pitchFamily="34" charset="0"/>
-                <a:ea typeface="Calibri" pitchFamily="34" charset="-122"/>
-                <a:cs typeface="Calibri" pitchFamily="34" charset="-120"/>
+                <a:cs typeface="Amiri" pitchFamily="2" charset="-78"/>
               </a:rPr>
               <a:t>Conversation — complex structures: two tenses, a conditional, a subjunctive</a:t>
             </a:r>
@@ -5624,8 +5541,7 @@
                   <a:srgbClr val="1B3B6F"/>
                 </a:solidFill>
                 <a:latin typeface="Calibri" pitchFamily="34" charset="0"/>
-                <a:ea typeface="Calibri" pitchFamily="34" charset="-122"/>
-                <a:cs typeface="Calibri" pitchFamily="34" charset="-120"/>
+                <a:cs typeface="Amiri" pitchFamily="2" charset="-78"/>
               </a:rPr>
               <a:t>Give yourself credit for a correct trigger or conditional even if a vowel slipped — the website’s top-band standard is consistent use of complex structures.</a:t>
             </a:r>
@@ -5663,8 +5579,7 @@
                   <a:srgbClr val="8A93A0"/>
                 </a:solidFill>
                 <a:latin typeface="Calibri" pitchFamily="34" charset="0"/>
-                <a:ea typeface="Calibri" pitchFamily="34" charset="-122"/>
-                <a:cs typeface="Calibri" pitchFamily="34" charset="-120"/>
+                <a:cs typeface="Amiri" pitchFamily="2" charset="-78"/>
               </a:rPr>
               <a:t>11 / 17</a:t>
             </a:r>
@@ -5758,9 +5673,8 @@
                 <a:solidFill>
                   <a:srgbClr val="D4AF37"/>
                 </a:solidFill>
-                <a:latin typeface="Amiri" pitchFamily="34" charset="0"/>
-                <a:ea typeface="Amiri" pitchFamily="34" charset="-122"/>
-                <a:cs typeface="Amiri" pitchFamily="34" charset="-120"/>
+                <a:latin typeface="Amiri" pitchFamily="2" charset="-78"/>
+                <a:cs typeface="Amiri" pitchFamily="2" charset="-78"/>
               </a:rPr>
               <a:t>م</a:t>
             </a:r>
@@ -5798,8 +5712,7 @@
                   <a:srgbClr val="1B3B6F"/>
                 </a:solidFill>
                 <a:latin typeface="Cambria" pitchFamily="34" charset="0"/>
-                <a:ea typeface="Cambria" pitchFamily="34" charset="-122"/>
-                <a:cs typeface="Cambria" pitchFamily="34" charset="-120"/>
+                <a:cs typeface="Amiri" pitchFamily="2" charset="-78"/>
               </a:rPr>
               <a:t>Al Madina Online School</a:t>
             </a:r>
@@ -5837,8 +5750,7 @@
                   <a:srgbClr val="8A6D1E"/>
                 </a:solidFill>
                 <a:latin typeface="Calibri" pitchFamily="34" charset="0"/>
-                <a:ea typeface="Calibri" pitchFamily="34" charset="-122"/>
-                <a:cs typeface="Calibri" pitchFamily="34" charset="-120"/>
+                <a:cs typeface="Amiri" pitchFamily="2" charset="-78"/>
               </a:rPr>
               <a:t>ARABIC DEPARTMENT · MIFTAH ARABIC · IGCSE 0544</a:t>
             </a:r>
@@ -5903,8 +5815,7 @@
                   <a:srgbClr val="FFFFFF"/>
                 </a:solidFill>
                 <a:latin typeface="Calibri" pitchFamily="34" charset="0"/>
-                <a:ea typeface="Calibri" pitchFamily="34" charset="-122"/>
-                <a:cs typeface="Calibri" pitchFamily="34" charset="-120"/>
+                <a:cs typeface="Amiri" pitchFamily="2" charset="-78"/>
               </a:rPr>
               <a:t>P6-L10 · IGCSE Bridge</a:t>
             </a:r>
@@ -5969,8 +5880,7 @@
                   <a:srgbClr val="FFFFFF"/>
                 </a:solidFill>
                 <a:latin typeface="Calibri" pitchFamily="34" charset="0"/>
-                <a:ea typeface="Calibri" pitchFamily="34" charset="-122"/>
-                <a:cs typeface="Calibri" pitchFamily="34" charset="-120"/>
+                <a:cs typeface="Amiri" pitchFamily="2" charset="-78"/>
               </a:rPr>
               <a:t>FEEDBACK · 3 MIN</a:t>
             </a:r>
@@ -6008,8 +5918,7 @@
                   <a:srgbClr val="8A6D1E"/>
                 </a:solidFill>
                 <a:latin typeface="Calibri" pitchFamily="34" charset="0"/>
-                <a:ea typeface="Calibri" pitchFamily="34" charset="-122"/>
-                <a:cs typeface="Calibri" pitchFamily="34" charset="-120"/>
+                <a:cs typeface="Amiri" pitchFamily="2" charset="-78"/>
               </a:rPr>
               <a:t>FEEDBACK · THE WEBSITE MODELS</a:t>
             </a:r>
@@ -6047,8 +5956,7 @@
                   <a:srgbClr val="1B3B6F"/>
                 </a:solidFill>
                 <a:latin typeface="Cambria" pitchFamily="34" charset="0"/>
-                <a:ea typeface="Cambria" pitchFamily="34" charset="-122"/>
-                <a:cs typeface="Cambria" pitchFamily="34" charset="-120"/>
+                <a:cs typeface="Amiri" pitchFamily="2" charset="-78"/>
               </a:rPr>
               <a:t>What full marks sound like</a:t>
             </a:r>
@@ -6085,9 +5993,8 @@
                 <a:solidFill>
                   <a:srgbClr val="8A6D1E"/>
                 </a:solidFill>
-                <a:latin typeface="Amiri" pitchFamily="34" charset="0"/>
-                <a:ea typeface="Amiri" pitchFamily="34" charset="-122"/>
-                <a:cs typeface="Amiri" pitchFamily="34" charset="-120"/>
+                <a:latin typeface="Amiri" pitchFamily="2" charset="-78"/>
+                <a:cs typeface="Amiri" pitchFamily="2" charset="-78"/>
               </a:rPr>
               <a:t>نَمُوذَجُ الإِجَابَةِ</a:t>
             </a:r>
@@ -6125,8 +6032,7 @@
                   <a:srgbClr val="8A93A0"/>
                 </a:solidFill>
                 <a:latin typeface="Calibri" pitchFamily="34" charset="0"/>
-                <a:ea typeface="Calibri" pitchFamily="34" charset="-122"/>
-                <a:cs typeface="Calibri" pitchFamily="34" charset="-120"/>
+                <a:cs typeface="Amiri" pitchFamily="2" charset="-78"/>
               </a:rPr>
               <a:t>Miftah Arabic · Progression P6 · IGCSE Bridge · P6-L10</a:t>
             </a:r>
@@ -6200,9 +6106,8 @@
                 <a:solidFill>
                   <a:srgbClr val="1F2A37"/>
                 </a:solidFill>
-                <a:latin typeface="Amiri" pitchFamily="34" charset="0"/>
-                <a:ea typeface="Amiri" pitchFamily="34" charset="-122"/>
-                <a:cs typeface="Amiri" pitchFamily="34" charset="-120"/>
+                <a:latin typeface="Amiri" pitchFamily="2" charset="-78"/>
+                <a:cs typeface="Amiri" pitchFamily="2" charset="-78"/>
               </a:rPr>
               <a:t>اسْمِي سَامِي، وَأُحِبُّ القِرَاءَةَ وَكُرَةَ القَدَمِ، وَأَرْغَبُ فِي تَعَلُّمِ مَهَارَاتٍ جَدِيدَةٍ.</a:t>
             </a:r>
@@ -6229,9 +6134,8 @@
                 <a:solidFill>
                   <a:srgbClr val="1F2A37"/>
                 </a:solidFill>
-                <a:latin typeface="Amiri" pitchFamily="34" charset="0"/>
-                <a:ea typeface="Amiri" pitchFamily="34" charset="-122"/>
-                <a:cs typeface="Amiri" pitchFamily="34" charset="-120"/>
+                <a:latin typeface="Amiri" pitchFamily="2" charset="-78"/>
+                <a:cs typeface="Amiri" pitchFamily="2" charset="-78"/>
               </a:rPr>
               <a:t>صَحِيحٌ أَنَّ التِّقْنِيَّةَ تُقَرِّبُ البَعِيدَ، غَيْرَ أَنَّهَا قَدْ تُبْعِدُ القَرِيبَ. وَلَوِ اسْتَخْدَمْنَاهَا بِوَعْيٍ، لَحَقَّقْنَا التَّوَازُنَ.</a:t>
             </a:r>
@@ -6296,8 +6200,7 @@
                   <a:srgbClr val="5A6472"/>
                 </a:solidFill>
                 <a:latin typeface="Calibri" pitchFamily="34" charset="0"/>
-                <a:ea typeface="Calibri" pitchFamily="34" charset="-122"/>
-                <a:cs typeface="Calibri" pitchFamily="34" charset="-120"/>
+                <a:cs typeface="Amiri" pitchFamily="2" charset="-78"/>
               </a:rPr>
               <a:t>Role play, prompt 1: “My name is Sami; I love reading and football, and I would like to learn new skills.” — a full sentence. Conversation, question 2: “It is true that technology brings the distant near; however, it may push the near away. If we used it consciously, we would achieve balance.” — concession-refutation + a Type 2 conditional.</a:t>
             </a:r>
@@ -6335,8 +6238,7 @@
                   <a:srgbClr val="8A6D1E"/>
                 </a:solidFill>
                 <a:latin typeface="Calibri" pitchFamily="34" charset="0"/>
-                <a:ea typeface="Calibri" pitchFamily="34" charset="-122"/>
-                <a:cs typeface="Calibri" pitchFamily="34" charset="-120"/>
+                <a:cs typeface="Amiri" pitchFamily="2" charset="-78"/>
               </a:rPr>
               <a:t>FIND IN THE MODEL:</a:t>
             </a:r>
@@ -6401,8 +6303,7 @@
                   <a:srgbClr val="FFFFFF"/>
                 </a:solidFill>
                 <a:latin typeface="Calibri" pitchFamily="34" charset="0"/>
-                <a:ea typeface="Calibri" pitchFamily="34" charset="-122"/>
-                <a:cs typeface="Calibri" pitchFamily="34" charset="-120"/>
+                <a:cs typeface="Amiri" pitchFamily="2" charset="-78"/>
               </a:rPr>
               <a:t>وَأَرْغَبُ فِي</a:t>
             </a:r>
@@ -6467,8 +6368,7 @@
                   <a:srgbClr val="FFFFFF"/>
                 </a:solidFill>
                 <a:latin typeface="Calibri" pitchFamily="34" charset="0"/>
-                <a:ea typeface="Calibri" pitchFamily="34" charset="-122"/>
-                <a:cs typeface="Calibri" pitchFamily="34" charset="-120"/>
+                <a:cs typeface="Amiri" pitchFamily="2" charset="-78"/>
               </a:rPr>
               <a:t>صَحِيحٌ أَنَّ … غَيْرَ أَنَّ</a:t>
             </a:r>
@@ -6533,8 +6433,7 @@
                   <a:srgbClr val="FFFFFF"/>
                 </a:solidFill>
                 <a:latin typeface="Calibri" pitchFamily="34" charset="0"/>
-                <a:ea typeface="Calibri" pitchFamily="34" charset="-122"/>
-                <a:cs typeface="Calibri" pitchFamily="34" charset="-120"/>
+                <a:cs typeface="Amiri" pitchFamily="2" charset="-78"/>
               </a:rPr>
               <a:t>لَوِ اسْتَخْدَمْنَاهَا</a:t>
             </a:r>
@@ -6599,8 +6498,7 @@
                   <a:srgbClr val="FFFFFF"/>
                 </a:solidFill>
                 <a:latin typeface="Calibri" pitchFamily="34" charset="0"/>
-                <a:ea typeface="Calibri" pitchFamily="34" charset="-122"/>
-                <a:cs typeface="Calibri" pitchFamily="34" charset="-120"/>
+                <a:cs typeface="Amiri" pitchFamily="2" charset="-78"/>
               </a:rPr>
               <a:t>لَحَقَّقْنَا</a:t>
             </a:r>
@@ -6638,8 +6536,7 @@
                   <a:srgbClr val="8A93A0"/>
                 </a:solidFill>
                 <a:latin typeface="Calibri" pitchFamily="34" charset="0"/>
-                <a:ea typeface="Calibri" pitchFamily="34" charset="-122"/>
-                <a:cs typeface="Calibri" pitchFamily="34" charset="-120"/>
+                <a:cs typeface="Amiri" pitchFamily="2" charset="-78"/>
               </a:rPr>
               <a:t>12 / 17</a:t>
             </a:r>
@@ -6733,9 +6630,8 @@
                 <a:solidFill>
                   <a:srgbClr val="D4AF37"/>
                 </a:solidFill>
-                <a:latin typeface="Amiri" pitchFamily="34" charset="0"/>
-                <a:ea typeface="Amiri" pitchFamily="34" charset="-122"/>
-                <a:cs typeface="Amiri" pitchFamily="34" charset="-120"/>
+                <a:latin typeface="Amiri" pitchFamily="2" charset="-78"/>
+                <a:cs typeface="Amiri" pitchFamily="2" charset="-78"/>
               </a:rPr>
               <a:t>م</a:t>
             </a:r>
@@ -6773,8 +6669,7 @@
                   <a:srgbClr val="1B3B6F"/>
                 </a:solidFill>
                 <a:latin typeface="Cambria" pitchFamily="34" charset="0"/>
-                <a:ea typeface="Cambria" pitchFamily="34" charset="-122"/>
-                <a:cs typeface="Cambria" pitchFamily="34" charset="-120"/>
+                <a:cs typeface="Amiri" pitchFamily="2" charset="-78"/>
               </a:rPr>
               <a:t>Al Madina Online School</a:t>
             </a:r>
@@ -6812,8 +6707,7 @@
                   <a:srgbClr val="8A6D1E"/>
                 </a:solidFill>
                 <a:latin typeface="Calibri" pitchFamily="34" charset="0"/>
-                <a:ea typeface="Calibri" pitchFamily="34" charset="-122"/>
-                <a:cs typeface="Calibri" pitchFamily="34" charset="-120"/>
+                <a:cs typeface="Amiri" pitchFamily="2" charset="-78"/>
               </a:rPr>
               <a:t>ARABIC DEPARTMENT · MIFTAH ARABIC · IGCSE 0544</a:t>
             </a:r>
@@ -6878,8 +6772,7 @@
                   <a:srgbClr val="FFFFFF"/>
                 </a:solidFill>
                 <a:latin typeface="Calibri" pitchFamily="34" charset="0"/>
-                <a:ea typeface="Calibri" pitchFamily="34" charset="-122"/>
-                <a:cs typeface="Calibri" pitchFamily="34" charset="-120"/>
+                <a:cs typeface="Amiri" pitchFamily="2" charset="-78"/>
               </a:rPr>
               <a:t>P6-L10 · IGCSE Bridge</a:t>
             </a:r>
@@ -6944,8 +6837,7 @@
                   <a:srgbClr val="FFFFFF"/>
                 </a:solidFill>
                 <a:latin typeface="Calibri" pitchFamily="34" charset="0"/>
-                <a:ea typeface="Calibri" pitchFamily="34" charset="-122"/>
-                <a:cs typeface="Calibri" pitchFamily="34" charset="-120"/>
+                <a:cs typeface="Amiri" pitchFamily="2" charset="-78"/>
               </a:rPr>
               <a:t>FEEDBACK · 3 MIN</a:t>
             </a:r>
@@ -6983,8 +6875,7 @@
                   <a:srgbClr val="8A6D1E"/>
                 </a:solidFill>
                 <a:latin typeface="Calibri" pitchFamily="34" charset="0"/>
-                <a:ea typeface="Calibri" pitchFamily="34" charset="-122"/>
-                <a:cs typeface="Calibri" pitchFamily="34" charset="-120"/>
+                <a:cs typeface="Amiri" pitchFamily="2" charset="-78"/>
               </a:rPr>
               <a:t>FEEDBACK · SCORE · TARGET (WEBSITE)</a:t>
             </a:r>
@@ -7022,8 +6913,7 @@
                   <a:srgbClr val="1B3B6F"/>
                 </a:solidFill>
                 <a:latin typeface="Cambria" pitchFamily="34" charset="0"/>
-                <a:ea typeface="Cambria" pitchFamily="34" charset="-122"/>
-                <a:cs typeface="Cambria" pitchFamily="34" charset="-120"/>
+                <a:cs typeface="Amiri" pitchFamily="2" charset="-78"/>
               </a:rPr>
               <a:t>Record your Paper 3 mock score</a:t>
             </a:r>
@@ -7060,9 +6950,8 @@
                 <a:solidFill>
                   <a:srgbClr val="8A6D1E"/>
                 </a:solidFill>
-                <a:latin typeface="Amiri" pitchFamily="34" charset="0"/>
-                <a:ea typeface="Amiri" pitchFamily="34" charset="-122"/>
-                <a:cs typeface="Amiri" pitchFamily="34" charset="-120"/>
+                <a:latin typeface="Amiri" pitchFamily="2" charset="-78"/>
+                <a:cs typeface="Amiri" pitchFamily="2" charset="-78"/>
               </a:rPr>
               <a:t>سَجِّلْ نَتِيجَتَكَ</a:t>
             </a:r>
@@ -7100,8 +6989,7 @@
                   <a:srgbClr val="8A93A0"/>
                 </a:solidFill>
                 <a:latin typeface="Calibri" pitchFamily="34" charset="0"/>
-                <a:ea typeface="Calibri" pitchFamily="34" charset="-122"/>
-                <a:cs typeface="Calibri" pitchFamily="34" charset="-120"/>
+                <a:cs typeface="Amiri" pitchFamily="2" charset="-78"/>
               </a:rPr>
               <a:t>Miftah Arabic · Progression P6 · IGCSE Bridge · P6-L10</a:t>
             </a:r>
@@ -7164,8 +7052,7 @@
                   <a:srgbClr val="FFFFFF"/>
                 </a:solidFill>
                 <a:latin typeface="Calibri" pitchFamily="34" charset="0"/>
-                <a:ea typeface="Calibri" pitchFamily="34" charset="-122"/>
-                <a:cs typeface="Calibri" pitchFamily="34" charset="-120"/>
+                <a:cs typeface="Amiri" pitchFamily="2" charset="-78"/>
               </a:rPr>
               <a:t>Yours</a:t>
             </a:r>
@@ -7203,8 +7090,7 @@
                   <a:srgbClr val="FFFFFF"/>
                 </a:solidFill>
                 <a:latin typeface="Calibri" pitchFamily="34" charset="0"/>
-                <a:ea typeface="Calibri" pitchFamily="34" charset="-122"/>
-                <a:cs typeface="Calibri" pitchFamily="34" charset="-120"/>
+                <a:cs typeface="Amiri" pitchFamily="2" charset="-78"/>
               </a:rPr>
               <a:t>Example</a:t>
             </a:r>
@@ -7242,8 +7128,7 @@
                   <a:srgbClr val="FFFFFF"/>
                 </a:solidFill>
                 <a:latin typeface="Calibri" pitchFamily="34" charset="0"/>
-                <a:ea typeface="Calibri" pitchFamily="34" charset="-122"/>
-                <a:cs typeface="Calibri" pitchFamily="34" charset="-120"/>
+                <a:cs typeface="Amiri" pitchFamily="2" charset="-78"/>
               </a:rPr>
               <a:t>Record</a:t>
             </a:r>
@@ -7308,8 +7193,7 @@
                   <a:srgbClr val="5A6472"/>
                 </a:solidFill>
                 <a:latin typeface="Calibri" pitchFamily="34" charset="0"/>
-                <a:ea typeface="Calibri" pitchFamily="34" charset="-122"/>
-                <a:cs typeface="Calibri" pitchFamily="34" charset="-120"/>
+                <a:cs typeface="Amiri" pitchFamily="2" charset="-78"/>
               </a:rPr>
               <a:t>______________</a:t>
             </a:r>
@@ -7347,8 +7231,7 @@
                   <a:srgbClr val="5A6472"/>
                 </a:solidFill>
                 <a:latin typeface="Calibri" pitchFamily="34" charset="0"/>
-                <a:ea typeface="Calibri" pitchFamily="34" charset="-122"/>
-                <a:cs typeface="Calibri" pitchFamily="34" charset="-120"/>
+                <a:cs typeface="Amiri" pitchFamily="2" charset="-78"/>
               </a:rPr>
               <a:t>7/10</a:t>
             </a:r>
@@ -7386,8 +7269,7 @@
                   <a:srgbClr val="5A6472"/>
                 </a:solidFill>
                 <a:latin typeface="Calibri" pitchFamily="34" charset="0"/>
-                <a:ea typeface="Calibri" pitchFamily="34" charset="-122"/>
-                <a:cs typeface="Calibri" pitchFamily="34" charset="-120"/>
+                <a:cs typeface="Amiri" pitchFamily="2" charset="-78"/>
               </a:rPr>
               <a:t>Role play (out of 10)</a:t>
             </a:r>
@@ -7452,8 +7334,7 @@
                   <a:srgbClr val="FFFFFF"/>
                 </a:solidFill>
                 <a:latin typeface="Calibri" pitchFamily="34" charset="0"/>
-                <a:ea typeface="Calibri" pitchFamily="34" charset="-122"/>
-                <a:cs typeface="Calibri" pitchFamily="34" charset="-120"/>
+                <a:cs typeface="Amiri" pitchFamily="2" charset="-78"/>
               </a:rPr>
               <a:t>CORE</a:t>
             </a:r>
@@ -7518,8 +7399,7 @@
                   <a:srgbClr val="5A6472"/>
                 </a:solidFill>
                 <a:latin typeface="Calibri" pitchFamily="34" charset="0"/>
-                <a:ea typeface="Calibri" pitchFamily="34" charset="-122"/>
-                <a:cs typeface="Calibri" pitchFamily="34" charset="-120"/>
+                <a:cs typeface="Amiri" pitchFamily="2" charset="-78"/>
               </a:rPr>
               <a:t>______________</a:t>
             </a:r>
@@ -7557,8 +7437,7 @@
                   <a:srgbClr val="5A6472"/>
                 </a:solidFill>
                 <a:latin typeface="Calibri" pitchFamily="34" charset="0"/>
-                <a:ea typeface="Calibri" pitchFamily="34" charset="-122"/>
-                <a:cs typeface="Calibri" pitchFamily="34" charset="-120"/>
+                <a:cs typeface="Amiri" pitchFamily="2" charset="-78"/>
               </a:rPr>
               <a:t>14/20</a:t>
             </a:r>
@@ -7596,8 +7475,7 @@
                   <a:srgbClr val="5A6472"/>
                 </a:solidFill>
                 <a:latin typeface="Calibri" pitchFamily="34" charset="0"/>
-                <a:ea typeface="Calibri" pitchFamily="34" charset="-122"/>
-                <a:cs typeface="Calibri" pitchFamily="34" charset="-120"/>
+                <a:cs typeface="Amiri" pitchFamily="2" charset="-78"/>
               </a:rPr>
               <a:t>Topic conversation (out of 20)</a:t>
             </a:r>
@@ -7662,8 +7540,7 @@
                   <a:srgbClr val="FFFFFF"/>
                 </a:solidFill>
                 <a:latin typeface="Calibri" pitchFamily="34" charset="0"/>
-                <a:ea typeface="Calibri" pitchFamily="34" charset="-122"/>
-                <a:cs typeface="Calibri" pitchFamily="34" charset="-120"/>
+                <a:cs typeface="Amiri" pitchFamily="2" charset="-78"/>
               </a:rPr>
               <a:t>CORE</a:t>
             </a:r>
@@ -7728,8 +7605,7 @@
                   <a:srgbClr val="5A6472"/>
                 </a:solidFill>
                 <a:latin typeface="Calibri" pitchFamily="34" charset="0"/>
-                <a:ea typeface="Calibri" pitchFamily="34" charset="-122"/>
-                <a:cs typeface="Calibri" pitchFamily="34" charset="-120"/>
+                <a:cs typeface="Amiri" pitchFamily="2" charset="-78"/>
               </a:rPr>
               <a:t>______________</a:t>
             </a:r>
@@ -7767,8 +7643,7 @@
                   <a:srgbClr val="5A6472"/>
                 </a:solidFill>
                 <a:latin typeface="Calibri" pitchFamily="34" charset="0"/>
-                <a:ea typeface="Calibri" pitchFamily="34" charset="-122"/>
-                <a:cs typeface="Calibri" pitchFamily="34" charset="-120"/>
+                <a:cs typeface="Amiri" pitchFamily="2" charset="-78"/>
               </a:rPr>
               <a:t>a conditional (lau) and a subjunctive (yataṭallabu an)</a:t>
             </a:r>
@@ -7806,8 +7681,7 @@
                   <a:srgbClr val="5A6472"/>
                 </a:solidFill>
                 <a:latin typeface="Calibri" pitchFamily="34" charset="0"/>
-                <a:ea typeface="Calibri" pitchFamily="34" charset="-122"/>
-                <a:cs typeface="Calibri" pitchFamily="34" charset="-120"/>
+                <a:cs typeface="Amiri" pitchFamily="2" charset="-78"/>
               </a:rPr>
               <a:t>Structures I used spontaneously</a:t>
             </a:r>
@@ -7872,8 +7746,7 @@
                   <a:srgbClr val="5A6472"/>
                 </a:solidFill>
                 <a:latin typeface="Calibri" pitchFamily="34" charset="0"/>
-                <a:ea typeface="Calibri" pitchFamily="34" charset="-122"/>
-                <a:cs typeface="Calibri" pitchFamily="34" charset="-120"/>
+                <a:cs typeface="Amiri" pitchFamily="2" charset="-78"/>
               </a:rPr>
               <a:t>______________</a:t>
             </a:r>
@@ -7911,8 +7784,7 @@
                   <a:srgbClr val="5A6472"/>
                 </a:solidFill>
                 <a:latin typeface="Calibri" pitchFamily="34" charset="0"/>
-                <a:ea typeface="Calibri" pitchFamily="34" charset="-122"/>
-                <a:cs typeface="Calibri" pitchFamily="34" charset="-120"/>
+                <a:cs typeface="Amiri" pitchFamily="2" charset="-78"/>
               </a:rPr>
               <a:t>stopping after two sentences → ask myself “why?”</a:t>
             </a:r>
@@ -7950,8 +7822,7 @@
                   <a:srgbClr val="5A6472"/>
                 </a:solidFill>
                 <a:latin typeface="Calibri" pitchFamily="34" charset="0"/>
-                <a:ea typeface="Calibri" pitchFamily="34" charset="-122"/>
-                <a:cs typeface="Calibri" pitchFamily="34" charset="-120"/>
+                <a:cs typeface="Amiri" pitchFamily="2" charset="-78"/>
               </a:rPr>
               <a:t>My weakest point and my fix</a:t>
             </a:r>
@@ -7989,8 +7860,7 @@
                   <a:srgbClr val="1B3B6F"/>
                 </a:solidFill>
                 <a:latin typeface="Calibri" pitchFamily="34" charset="0"/>
-                <a:ea typeface="Calibri" pitchFamily="34" charset="-122"/>
-                <a:cs typeface="Calibri" pitchFamily="34" charset="-120"/>
+                <a:cs typeface="Amiri" pitchFamily="2" charset="-78"/>
               </a:rPr>
               <a:t>Paper 3 total: role play + conversation = …/30. The teacher confirms your mark from your recording. Bring all four mock scores to P6-L11.</a:t>
             </a:r>
@@ -8028,8 +7898,7 @@
                   <a:srgbClr val="8A93A0"/>
                 </a:solidFill>
                 <a:latin typeface="Calibri" pitchFamily="34" charset="0"/>
-                <a:ea typeface="Calibri" pitchFamily="34" charset="-122"/>
-                <a:cs typeface="Calibri" pitchFamily="34" charset="-120"/>
+                <a:cs typeface="Amiri" pitchFamily="2" charset="-78"/>
               </a:rPr>
               <a:t>13 / 17</a:t>
             </a:r>
@@ -8123,9 +7992,8 @@
                 <a:solidFill>
                   <a:srgbClr val="D4AF37"/>
                 </a:solidFill>
-                <a:latin typeface="Amiri" pitchFamily="34" charset="0"/>
-                <a:ea typeface="Amiri" pitchFamily="34" charset="-122"/>
-                <a:cs typeface="Amiri" pitchFamily="34" charset="-120"/>
+                <a:latin typeface="Amiri" pitchFamily="2" charset="-78"/>
+                <a:cs typeface="Amiri" pitchFamily="2" charset="-78"/>
               </a:rPr>
               <a:t>م</a:t>
             </a:r>
@@ -8163,8 +8031,7 @@
                   <a:srgbClr val="1B3B6F"/>
                 </a:solidFill>
                 <a:latin typeface="Cambria" pitchFamily="34" charset="0"/>
-                <a:ea typeface="Cambria" pitchFamily="34" charset="-122"/>
-                <a:cs typeface="Cambria" pitchFamily="34" charset="-120"/>
+                <a:cs typeface="Amiri" pitchFamily="2" charset="-78"/>
               </a:rPr>
               <a:t>Al Madina Online School</a:t>
             </a:r>
@@ -8202,8 +8069,7 @@
                   <a:srgbClr val="8A6D1E"/>
                 </a:solidFill>
                 <a:latin typeface="Calibri" pitchFamily="34" charset="0"/>
-                <a:ea typeface="Calibri" pitchFamily="34" charset="-122"/>
-                <a:cs typeface="Calibri" pitchFamily="34" charset="-120"/>
+                <a:cs typeface="Amiri" pitchFamily="2" charset="-78"/>
               </a:rPr>
               <a:t>ARABIC DEPARTMENT · MIFTAH ARABIC · IGCSE 0544</a:t>
             </a:r>
@@ -8268,8 +8134,7 @@
                   <a:srgbClr val="FFFFFF"/>
                 </a:solidFill>
                 <a:latin typeface="Calibri" pitchFamily="34" charset="0"/>
-                <a:ea typeface="Calibri" pitchFamily="34" charset="-122"/>
-                <a:cs typeface="Calibri" pitchFamily="34" charset="-120"/>
+                <a:cs typeface="Amiri" pitchFamily="2" charset="-78"/>
               </a:rPr>
               <a:t>P6-L10 · IGCSE Bridge</a:t>
             </a:r>
@@ -8334,8 +8199,7 @@
                   <a:srgbClr val="FFFFFF"/>
                 </a:solidFill>
                 <a:latin typeface="Calibri" pitchFamily="34" charset="0"/>
-                <a:ea typeface="Calibri" pitchFamily="34" charset="-122"/>
-                <a:cs typeface="Calibri" pitchFamily="34" charset="-120"/>
+                <a:cs typeface="Amiri" pitchFamily="2" charset="-78"/>
               </a:rPr>
               <a:t>FEEDBACK · 2 MIN</a:t>
             </a:r>
@@ -8373,8 +8237,7 @@
                   <a:srgbClr val="8A6D1E"/>
                 </a:solidFill>
                 <a:latin typeface="Calibri" pitchFamily="34" charset="0"/>
-                <a:ea typeface="Calibri" pitchFamily="34" charset="-122"/>
-                <a:cs typeface="Calibri" pitchFamily="34" charset="-120"/>
+                <a:cs typeface="Amiri" pitchFamily="2" charset="-78"/>
               </a:rPr>
               <a:t>FEEDBACK · ALL FOUR MOCKS COMPLETE (WEBSITE)</a:t>
             </a:r>
@@ -8412,8 +8275,7 @@
                   <a:srgbClr val="1B3B6F"/>
                 </a:solidFill>
                 <a:latin typeface="Cambria" pitchFamily="34" charset="0"/>
-                <a:ea typeface="Cambria" pitchFamily="34" charset="-122"/>
-                <a:cs typeface="Cambria" pitchFamily="34" charset="-120"/>
+                <a:cs typeface="Amiri" pitchFamily="2" charset="-78"/>
               </a:rPr>
               <a:t>Post-speaking reflection</a:t>
             </a:r>
@@ -8450,9 +8312,8 @@
                 <a:solidFill>
                   <a:srgbClr val="8A6D1E"/>
                 </a:solidFill>
-                <a:latin typeface="Amiri" pitchFamily="34" charset="0"/>
-                <a:ea typeface="Amiri" pitchFamily="34" charset="-122"/>
-                <a:cs typeface="Amiri" pitchFamily="34" charset="-120"/>
+                <a:latin typeface="Amiri" pitchFamily="2" charset="-78"/>
+                <a:cs typeface="Amiri" pitchFamily="2" charset="-78"/>
               </a:rPr>
               <a:t>التَّأَمُّلُ</a:t>
             </a:r>
@@ -8490,8 +8351,7 @@
                   <a:srgbClr val="8A93A0"/>
                 </a:solidFill>
                 <a:latin typeface="Calibri" pitchFamily="34" charset="0"/>
-                <a:ea typeface="Calibri" pitchFamily="34" charset="-122"/>
-                <a:cs typeface="Calibri" pitchFamily="34" charset="-120"/>
+                <a:cs typeface="Amiri" pitchFamily="2" charset="-78"/>
               </a:rPr>
               <a:t>Miftah Arabic · Progression P6 · IGCSE Bridge · P6-L10</a:t>
             </a:r>
@@ -8554,8 +8414,7 @@
                   <a:srgbClr val="FFFFFF"/>
                 </a:solidFill>
                 <a:latin typeface="Calibri" pitchFamily="34" charset="0"/>
-                <a:ea typeface="Calibri" pitchFamily="34" charset="-122"/>
-                <a:cs typeface="Calibri" pitchFamily="34" charset="-120"/>
+                <a:cs typeface="Amiri" pitchFamily="2" charset="-78"/>
               </a:rPr>
               <a:t>Model ending</a:t>
             </a:r>
@@ -8593,8 +8452,7 @@
                   <a:srgbClr val="FFFFFF"/>
                 </a:solidFill>
                 <a:latin typeface="Calibri" pitchFamily="34" charset="0"/>
-                <a:ea typeface="Calibri" pitchFamily="34" charset="-122"/>
-                <a:cs typeface="Calibri" pitchFamily="34" charset="-120"/>
+                <a:cs typeface="Amiri" pitchFamily="2" charset="-78"/>
               </a:rPr>
               <a:t>Meaning</a:t>
             </a:r>
@@ -8632,8 +8490,7 @@
                   <a:srgbClr val="FFFFFF"/>
                 </a:solidFill>
                 <a:latin typeface="Calibri" pitchFamily="34" charset="0"/>
-                <a:ea typeface="Calibri" pitchFamily="34" charset="-122"/>
-                <a:cs typeface="Calibri" pitchFamily="34" charset="-120"/>
+                <a:cs typeface="Amiri" pitchFamily="2" charset="-78"/>
               </a:rPr>
               <a:t>Reflection frame (website)</a:t>
             </a:r>
@@ -8698,8 +8555,7 @@
                   <a:srgbClr val="5A6472"/>
                 </a:solidFill>
                 <a:latin typeface="Calibri" pitchFamily="34" charset="0"/>
-                <a:ea typeface="Calibri" pitchFamily="34" charset="-122"/>
-                <a:cs typeface="Calibri" pitchFamily="34" charset="-120"/>
+                <a:cs typeface="Amiri" pitchFamily="2" charset="-78"/>
               </a:rPr>
               <a:t>the question on technology</a:t>
             </a:r>
@@ -8737,8 +8593,7 @@
                   <a:srgbClr val="5A6472"/>
                 </a:solidFill>
                 <a:latin typeface="Calibri" pitchFamily="34" charset="0"/>
-                <a:ea typeface="Calibri" pitchFamily="34" charset="-122"/>
-                <a:cs typeface="Calibri" pitchFamily="34" charset="-120"/>
+                <a:cs typeface="Amiri" pitchFamily="2" charset="-78"/>
               </a:rPr>
               <a:t>where I developed my answers best</a:t>
             </a:r>
@@ -8776,8 +8631,7 @@
                   <a:srgbClr val="5A6472"/>
                 </a:solidFill>
                 <a:latin typeface="Calibri" pitchFamily="34" charset="0"/>
-                <a:ea typeface="Calibri" pitchFamily="34" charset="-122"/>
-                <a:cs typeface="Calibri" pitchFamily="34" charset="-120"/>
+                <a:cs typeface="Amiri" pitchFamily="2" charset="-78"/>
               </a:rPr>
               <a:t>I developed my answers best on…</a:t>
             </a:r>
@@ -8842,8 +8696,7 @@
                   <a:srgbClr val="5A6472"/>
                 </a:solidFill>
                 <a:latin typeface="Calibri" pitchFamily="34" charset="0"/>
-                <a:ea typeface="Calibri" pitchFamily="34" charset="-122"/>
-                <a:cs typeface="Calibri" pitchFamily="34" charset="-120"/>
+                <a:cs typeface="Amiri" pitchFamily="2" charset="-78"/>
               </a:rPr>
               <a:t>the role play — negotiating</a:t>
             </a:r>
@@ -8881,8 +8734,7 @@
                   <a:srgbClr val="5A6472"/>
                 </a:solidFill>
                 <a:latin typeface="Calibri" pitchFamily="34" charset="0"/>
-                <a:ea typeface="Calibri" pitchFamily="34" charset="-122"/>
-                <a:cs typeface="Calibri" pitchFamily="34" charset="-120"/>
+                <a:cs typeface="Amiri" pitchFamily="2" charset="-78"/>
               </a:rPr>
               <a:t>what I will practise before the real exam</a:t>
             </a:r>
@@ -8920,8 +8772,7 @@
                   <a:srgbClr val="5A6472"/>
                 </a:solidFill>
                 <a:latin typeface="Calibri" pitchFamily="34" charset="0"/>
-                <a:ea typeface="Calibri" pitchFamily="34" charset="-122"/>
-                <a:cs typeface="Calibri" pitchFamily="34" charset="-120"/>
+                <a:cs typeface="Amiri" pitchFamily="2" charset="-78"/>
               </a:rPr>
               <a:t>Before the real exam I will practise…</a:t>
             </a:r>
@@ -8959,8 +8810,7 @@
                   <a:srgbClr val="1B3B6F"/>
                 </a:solidFill>
                 <a:latin typeface="Calibri" pitchFamily="34" charset="0"/>
-                <a:ea typeface="Calibri" pitchFamily="34" charset="-122"/>
-                <a:cs typeface="Calibri" pitchFamily="34" charset="-120"/>
+                <a:cs typeface="Amiri" pitchFamily="2" charset="-78"/>
               </a:rPr>
               <a:t>All four mocks complete — that is a real achievement. Well done.</a:t>
             </a:r>
@@ -8998,8 +8848,7 @@
                   <a:srgbClr val="8A93A0"/>
                 </a:solidFill>
                 <a:latin typeface="Calibri" pitchFamily="34" charset="0"/>
-                <a:ea typeface="Calibri" pitchFamily="34" charset="-122"/>
-                <a:cs typeface="Calibri" pitchFamily="34" charset="-120"/>
+                <a:cs typeface="Amiri" pitchFamily="2" charset="-78"/>
               </a:rPr>
               <a:t>14 / 17</a:t>
             </a:r>
@@ -9093,9 +8942,8 @@
                 <a:solidFill>
                   <a:srgbClr val="D4AF37"/>
                 </a:solidFill>
-                <a:latin typeface="Amiri" pitchFamily="34" charset="0"/>
-                <a:ea typeface="Amiri" pitchFamily="34" charset="-122"/>
-                <a:cs typeface="Amiri" pitchFamily="34" charset="-120"/>
+                <a:latin typeface="Amiri" pitchFamily="2" charset="-78"/>
+                <a:cs typeface="Amiri" pitchFamily="2" charset="-78"/>
               </a:rPr>
               <a:t>م</a:t>
             </a:r>
@@ -9133,8 +8981,7 @@
                   <a:srgbClr val="1B3B6F"/>
                 </a:solidFill>
                 <a:latin typeface="Cambria" pitchFamily="34" charset="0"/>
-                <a:ea typeface="Cambria" pitchFamily="34" charset="-122"/>
-                <a:cs typeface="Cambria" pitchFamily="34" charset="-120"/>
+                <a:cs typeface="Amiri" pitchFamily="2" charset="-78"/>
               </a:rPr>
               <a:t>Al Madina Online School</a:t>
             </a:r>
@@ -9172,8 +9019,7 @@
                   <a:srgbClr val="8A6D1E"/>
                 </a:solidFill>
                 <a:latin typeface="Calibri" pitchFamily="34" charset="0"/>
-                <a:ea typeface="Calibri" pitchFamily="34" charset="-122"/>
-                <a:cs typeface="Calibri" pitchFamily="34" charset="-120"/>
+                <a:cs typeface="Amiri" pitchFamily="2" charset="-78"/>
               </a:rPr>
               <a:t>ARABIC DEPARTMENT · MIFTAH ARABIC · IGCSE 0544</a:t>
             </a:r>
@@ -9238,8 +9084,7 @@
                   <a:srgbClr val="FFFFFF"/>
                 </a:solidFill>
                 <a:latin typeface="Calibri" pitchFamily="34" charset="0"/>
-                <a:ea typeface="Calibri" pitchFamily="34" charset="-122"/>
-                <a:cs typeface="Calibri" pitchFamily="34" charset="-120"/>
+                <a:cs typeface="Amiri" pitchFamily="2" charset="-78"/>
               </a:rPr>
               <a:t>P6-L10 · IGCSE Bridge</a:t>
             </a:r>
@@ -9304,8 +9149,7 @@
                   <a:srgbClr val="FFFFFF"/>
                 </a:solidFill>
                 <a:latin typeface="Calibri" pitchFamily="34" charset="0"/>
-                <a:ea typeface="Calibri" pitchFamily="34" charset="-122"/>
-                <a:cs typeface="Calibri" pitchFamily="34" charset="-120"/>
+                <a:cs typeface="Amiri" pitchFamily="2" charset="-78"/>
               </a:rPr>
               <a:t>FEEDBACK · 1 MIN</a:t>
             </a:r>
@@ -9343,8 +9187,7 @@
                   <a:srgbClr val="8A6D1E"/>
                 </a:solidFill>
                 <a:latin typeface="Calibri" pitchFamily="34" charset="0"/>
-                <a:ea typeface="Calibri" pitchFamily="34" charset="-122"/>
-                <a:cs typeface="Calibri" pitchFamily="34" charset="-120"/>
+                <a:cs typeface="Amiri" pitchFamily="2" charset="-78"/>
               </a:rPr>
               <a:t>FEEDBACK · SUCCESS CRITERIA</a:t>
             </a:r>
@@ -9382,8 +9225,7 @@
                   <a:srgbClr val="1B3B6F"/>
                 </a:solidFill>
                 <a:latin typeface="Cambria" pitchFamily="34" charset="0"/>
-                <a:ea typeface="Cambria" pitchFamily="34" charset="-122"/>
-                <a:cs typeface="Cambria" pitchFamily="34" charset="-120"/>
+                <a:cs typeface="Amiri" pitchFamily="2" charset="-78"/>
               </a:rPr>
               <a:t>Check your work</a:t>
             </a:r>
@@ -9420,9 +9262,8 @@
                 <a:solidFill>
                   <a:srgbClr val="8A6D1E"/>
                 </a:solidFill>
-                <a:latin typeface="Amiri" pitchFamily="34" charset="0"/>
-                <a:ea typeface="Amiri" pitchFamily="34" charset="-122"/>
-                <a:cs typeface="Amiri" pitchFamily="34" charset="-120"/>
+                <a:latin typeface="Amiri" pitchFamily="2" charset="-78"/>
+                <a:cs typeface="Amiri" pitchFamily="2" charset="-78"/>
               </a:rPr>
               <a:t>قَيِّمْ عَمَلَكَ</a:t>
             </a:r>
@@ -9460,8 +9301,7 @@
                   <a:srgbClr val="8A93A0"/>
                 </a:solidFill>
                 <a:latin typeface="Calibri" pitchFamily="34" charset="0"/>
-                <a:ea typeface="Calibri" pitchFamily="34" charset="-122"/>
-                <a:cs typeface="Calibri" pitchFamily="34" charset="-120"/>
+                <a:cs typeface="Amiri" pitchFamily="2" charset="-78"/>
               </a:rPr>
               <a:t>Miftah Arabic · Progression P6 · IGCSE Bridge · P6-L10</a:t>
             </a:r>
@@ -9558,8 +9398,7 @@
                   <a:srgbClr val="1F2A37"/>
                 </a:solidFill>
                 <a:latin typeface="Calibri" pitchFamily="34" charset="0"/>
-                <a:ea typeface="Calibri" pitchFamily="34" charset="-122"/>
-                <a:cs typeface="Calibri" pitchFamily="34" charset="-120"/>
+                <a:cs typeface="Amiri" pitchFamily="2" charset="-78"/>
               </a:rPr>
               <a:t>I addressed all the role-play prompts with full sentences.</a:t>
             </a:r>
@@ -9624,8 +9463,7 @@
                   <a:srgbClr val="FFFFFF"/>
                 </a:solidFill>
                 <a:latin typeface="Calibri" pitchFamily="34" charset="0"/>
-                <a:ea typeface="Calibri" pitchFamily="34" charset="-122"/>
-                <a:cs typeface="Calibri" pitchFamily="34" charset="-120"/>
+                <a:cs typeface="Amiri" pitchFamily="2" charset="-78"/>
               </a:rPr>
               <a:t>CORE</a:t>
             </a:r>
@@ -9722,8 +9560,7 @@
                   <a:srgbClr val="1F2A37"/>
                 </a:solidFill>
                 <a:latin typeface="Calibri" pitchFamily="34" charset="0"/>
-                <a:ea typeface="Calibri" pitchFamily="34" charset="-122"/>
-                <a:cs typeface="Calibri" pitchFamily="34" charset="-120"/>
+                <a:cs typeface="Amiri" pitchFamily="2" charset="-78"/>
               </a:rPr>
               <a:t>I developed each topic answer with opinion, reason and example.</a:t>
             </a:r>
@@ -9788,8 +9625,7 @@
                   <a:srgbClr val="FFFFFF"/>
                 </a:solidFill>
                 <a:latin typeface="Calibri" pitchFamily="34" charset="0"/>
-                <a:ea typeface="Calibri" pitchFamily="34" charset="-122"/>
-                <a:cs typeface="Calibri" pitchFamily="34" charset="-120"/>
+                <a:cs typeface="Amiri" pitchFamily="2" charset="-78"/>
               </a:rPr>
               <a:t>CORE</a:t>
             </a:r>
@@ -9886,8 +9722,7 @@
                   <a:srgbClr val="1F2A37"/>
                 </a:solidFill>
                 <a:latin typeface="Calibri" pitchFamily="34" charset="0"/>
-                <a:ea typeface="Calibri" pitchFamily="34" charset="-122"/>
-                <a:cs typeface="Calibri" pitchFamily="34" charset="-120"/>
+                <a:cs typeface="Amiri" pitchFamily="2" charset="-78"/>
               </a:rPr>
               <a:t>I used complex grammar spontaneously.</a:t>
             </a:r>
@@ -9952,8 +9787,7 @@
                   <a:srgbClr val="FFFFFF"/>
                 </a:solidFill>
                 <a:latin typeface="Calibri" pitchFamily="34" charset="0"/>
-                <a:ea typeface="Calibri" pitchFamily="34" charset="-122"/>
-                <a:cs typeface="Calibri" pitchFamily="34" charset="-120"/>
+                <a:cs typeface="Amiri" pitchFamily="2" charset="-78"/>
               </a:rPr>
               <a:t>STRETCH</a:t>
             </a:r>
@@ -10050,8 +9884,7 @@
                   <a:srgbClr val="1F2A37"/>
                 </a:solidFill>
                 <a:latin typeface="Calibri" pitchFamily="34" charset="0"/>
-                <a:ea typeface="Calibri" pitchFamily="34" charset="-122"/>
-                <a:cs typeface="Calibri" pitchFamily="34" charset="-120"/>
+                <a:cs typeface="Amiri" pitchFamily="2" charset="-78"/>
               </a:rPr>
               <a:t>I recovered from any hesitation and kept speaking.</a:t>
             </a:r>
@@ -10116,8 +9949,7 @@
                   <a:srgbClr val="FFFFFF"/>
                 </a:solidFill>
                 <a:latin typeface="Calibri" pitchFamily="34" charset="0"/>
-                <a:ea typeface="Calibri" pitchFamily="34" charset="-122"/>
-                <a:cs typeface="Calibri" pitchFamily="34" charset="-120"/>
+                <a:cs typeface="Amiri" pitchFamily="2" charset="-78"/>
               </a:rPr>
               <a:t>DEVELOP</a:t>
             </a:r>
@@ -10189,8 +10021,7 @@
                   <a:srgbClr val="2E8B57"/>
                 </a:solidFill>
                 <a:latin typeface="Calibri" pitchFamily="34" charset="0"/>
-                <a:ea typeface="Calibri" pitchFamily="34" charset="-122"/>
-                <a:cs typeface="Calibri" pitchFamily="34" charset="-120"/>
+                <a:cs typeface="Amiri" pitchFamily="2" charset="-78"/>
               </a:rPr>
               <a:t>WWW</a:t>
             </a:r>
@@ -10206,8 +10037,7 @@
                   <a:srgbClr val="1F2A37"/>
                 </a:solidFill>
                 <a:latin typeface="Calibri" pitchFamily="34" charset="0"/>
-                <a:ea typeface="Calibri" pitchFamily="34" charset="-122"/>
-                <a:cs typeface="Calibri" pitchFamily="34" charset="-120"/>
+                <a:cs typeface="Amiri" pitchFamily="2" charset="-78"/>
               </a:rPr>
               <a:t>What went well? One thing you did accurately.</a:t>
             </a:r>
@@ -10279,8 +10109,7 @@
                   <a:srgbClr val="C9780A"/>
                 </a:solidFill>
                 <a:latin typeface="Calibri" pitchFamily="34" charset="0"/>
-                <a:ea typeface="Calibri" pitchFamily="34" charset="-122"/>
-                <a:cs typeface="Calibri" pitchFamily="34" charset="-120"/>
+                <a:cs typeface="Amiri" pitchFamily="2" charset="-78"/>
               </a:rPr>
               <a:t>EBI</a:t>
             </a:r>
@@ -10296,8 +10125,7 @@
                   <a:srgbClr val="1F2A37"/>
                 </a:solidFill>
                 <a:latin typeface="Calibri" pitchFamily="34" charset="0"/>
-                <a:ea typeface="Calibri" pitchFamily="34" charset="-122"/>
-                <a:cs typeface="Calibri" pitchFamily="34" charset="-120"/>
+                <a:cs typeface="Amiri" pitchFamily="2" charset="-78"/>
               </a:rPr>
               <a:t>Even better if… One thing you will fix or add.</a:t>
             </a:r>
@@ -10335,8 +10163,7 @@
                   <a:srgbClr val="8A93A0"/>
                 </a:solidFill>
                 <a:latin typeface="Calibri" pitchFamily="34" charset="0"/>
-                <a:ea typeface="Calibri" pitchFamily="34" charset="-122"/>
-                <a:cs typeface="Calibri" pitchFamily="34" charset="-120"/>
+                <a:cs typeface="Amiri" pitchFamily="2" charset="-78"/>
               </a:rPr>
               <a:t>15 / 17</a:t>
             </a:r>
@@ -10430,9 +10257,8 @@
                 <a:solidFill>
                   <a:srgbClr val="D4AF37"/>
                 </a:solidFill>
-                <a:latin typeface="Amiri" pitchFamily="34" charset="0"/>
-                <a:ea typeface="Amiri" pitchFamily="34" charset="-122"/>
-                <a:cs typeface="Amiri" pitchFamily="34" charset="-120"/>
+                <a:latin typeface="Amiri" pitchFamily="2" charset="-78"/>
+                <a:cs typeface="Amiri" pitchFamily="2" charset="-78"/>
               </a:rPr>
               <a:t>م</a:t>
             </a:r>
@@ -10470,8 +10296,7 @@
                   <a:srgbClr val="1B3B6F"/>
                 </a:solidFill>
                 <a:latin typeface="Cambria" pitchFamily="34" charset="0"/>
-                <a:ea typeface="Cambria" pitchFamily="34" charset="-122"/>
-                <a:cs typeface="Cambria" pitchFamily="34" charset="-120"/>
+                <a:cs typeface="Amiri" pitchFamily="2" charset="-78"/>
               </a:rPr>
               <a:t>Al Madina Online School</a:t>
             </a:r>
@@ -10509,8 +10334,7 @@
                   <a:srgbClr val="8A6D1E"/>
                 </a:solidFill>
                 <a:latin typeface="Calibri" pitchFamily="34" charset="0"/>
-                <a:ea typeface="Calibri" pitchFamily="34" charset="-122"/>
-                <a:cs typeface="Calibri" pitchFamily="34" charset="-120"/>
+                <a:cs typeface="Amiri" pitchFamily="2" charset="-78"/>
               </a:rPr>
               <a:t>ARABIC DEPARTMENT · MIFTAH ARABIC · IGCSE 0544</a:t>
             </a:r>
@@ -10575,8 +10399,7 @@
                   <a:srgbClr val="FFFFFF"/>
                 </a:solidFill>
                 <a:latin typeface="Calibri" pitchFamily="34" charset="0"/>
-                <a:ea typeface="Calibri" pitchFamily="34" charset="-122"/>
-                <a:cs typeface="Calibri" pitchFamily="34" charset="-120"/>
+                <a:cs typeface="Amiri" pitchFamily="2" charset="-78"/>
               </a:rPr>
               <a:t>P6-L10 · IGCSE Bridge</a:t>
             </a:r>
@@ -10641,8 +10464,7 @@
                   <a:srgbClr val="FFFFFF"/>
                 </a:solidFill>
                 <a:latin typeface="Calibri" pitchFamily="34" charset="0"/>
-                <a:ea typeface="Calibri" pitchFamily="34" charset="-122"/>
-                <a:cs typeface="Calibri" pitchFamily="34" charset="-120"/>
+                <a:cs typeface="Amiri" pitchFamily="2" charset="-78"/>
               </a:rPr>
               <a:t>PREPARATION · 2 MIN</a:t>
             </a:r>
@@ -10680,8 +10502,7 @@
                   <a:srgbClr val="C45A3C"/>
                 </a:solidFill>
                 <a:latin typeface="Calibri" pitchFamily="34" charset="0"/>
-                <a:ea typeface="Calibri" pitchFamily="34" charset="-122"/>
-                <a:cs typeface="Calibri" pitchFamily="34" charset="-120"/>
+                <a:cs typeface="Amiri" pitchFamily="2" charset="-78"/>
               </a:rPr>
               <a:t>PREPARATION FOR NEXT LESSON · ABOUT 10 MINUTES</a:t>
             </a:r>
@@ -10719,8 +10540,7 @@
                   <a:srgbClr val="1B3B6F"/>
                 </a:solidFill>
                 <a:latin typeface="Cambria" pitchFamily="34" charset="0"/>
-                <a:ea typeface="Cambria" pitchFamily="34" charset="-122"/>
-                <a:cs typeface="Cambria" pitchFamily="34" charset="-120"/>
+                <a:cs typeface="Amiri" pitchFamily="2" charset="-78"/>
               </a:rPr>
               <a:t>Before P6-L11: get ready at home</a:t>
             </a:r>
@@ -10757,9 +10577,8 @@
                 <a:solidFill>
                   <a:srgbClr val="8A6D1E"/>
                 </a:solidFill>
-                <a:latin typeface="Amiri" pitchFamily="34" charset="0"/>
-                <a:ea typeface="Amiri" pitchFamily="34" charset="-122"/>
-                <a:cs typeface="Amiri" pitchFamily="34" charset="-120"/>
+                <a:latin typeface="Amiri" pitchFamily="2" charset="-78"/>
+                <a:cs typeface="Amiri" pitchFamily="2" charset="-78"/>
               </a:rPr>
               <a:t>التَّحْضِيرُ لِلدَّرْسِ القَادِمِ</a:t>
             </a:r>
@@ -10797,8 +10616,7 @@
                   <a:srgbClr val="8A93A0"/>
                 </a:solidFill>
                 <a:latin typeface="Calibri" pitchFamily="34" charset="0"/>
-                <a:ea typeface="Calibri" pitchFamily="34" charset="-122"/>
-                <a:cs typeface="Calibri" pitchFamily="34" charset="-120"/>
+                <a:cs typeface="Amiri" pitchFamily="2" charset="-78"/>
               </a:rPr>
               <a:t>Miftah Arabic · Progression P6 · IGCSE Bridge · P6-L10</a:t>
             </a:r>
@@ -10919,8 +10737,7 @@
                   <a:srgbClr val="C45A3C"/>
                 </a:solidFill>
                 <a:latin typeface="Calibri" pitchFamily="34" charset="0"/>
-                <a:ea typeface="Calibri" pitchFamily="34" charset="-122"/>
-                <a:cs typeface="Calibri" pitchFamily="34" charset="-120"/>
+                <a:cs typeface="Amiri" pitchFamily="2" charset="-78"/>
               </a:rPr>
               <a:t>LEARN THESE 5 WORDS</a:t>
             </a:r>
@@ -10936,8 +10753,7 @@
                   <a:srgbClr val="5A6472"/>
                 </a:solidFill>
                 <a:latin typeface="Calibri" pitchFamily="34" charset="0"/>
-                <a:ea typeface="Calibri" pitchFamily="34" charset="-122"/>
-                <a:cs typeface="Calibri" pitchFamily="34" charset="-120"/>
+                <a:cs typeface="Amiri" pitchFamily="2" charset="-78"/>
               </a:rPr>
               <a:t>for P6-L11 · Mock Results, Targeted Revision and Final IGCSE Preparation</a:t>
             </a:r>
@@ -10974,9 +10790,8 @@
                 <a:solidFill>
                   <a:srgbClr val="1B3B6F"/>
                 </a:solidFill>
-                <a:latin typeface="Amiri" pitchFamily="34" charset="0"/>
-                <a:ea typeface="Amiri" pitchFamily="34" charset="-122"/>
-                <a:cs typeface="Amiri" pitchFamily="34" charset="-120"/>
+                <a:latin typeface="Amiri" pitchFamily="2" charset="-78"/>
+                <a:cs typeface="Amiri" pitchFamily="2" charset="-78"/>
               </a:rPr>
               <a:t>المُرَاجَعَةُ</a:t>
             </a:r>
@@ -11014,8 +10829,7 @@
                   <a:srgbClr val="1F2A37"/>
                 </a:solidFill>
                 <a:latin typeface="Calibri" pitchFamily="34" charset="0"/>
-                <a:ea typeface="Calibri" pitchFamily="34" charset="-122"/>
-                <a:cs typeface="Calibri" pitchFamily="34" charset="-120"/>
+                <a:cs typeface="Amiri" pitchFamily="2" charset="-78"/>
               </a:rPr>
               <a:t>revision</a:t>
             </a:r>
@@ -11028,8 +10842,7 @@
                   <a:srgbClr val="5A6472"/>
                 </a:solidFill>
                 <a:latin typeface="Calibri" pitchFamily="34" charset="0"/>
-                <a:ea typeface="Calibri" pitchFamily="34" charset="-122"/>
-                <a:cs typeface="Calibri" pitchFamily="34" charset="-120"/>
+                <a:cs typeface="Amiri" pitchFamily="2" charset="-78"/>
               </a:rPr>
               <a:t>  v. رَاجَعَ</a:t>
             </a:r>
@@ -11066,9 +10879,8 @@
                 <a:solidFill>
                   <a:srgbClr val="1B3B6F"/>
                 </a:solidFill>
-                <a:latin typeface="Amiri" pitchFamily="34" charset="0"/>
-                <a:ea typeface="Amiri" pitchFamily="34" charset="-122"/>
-                <a:cs typeface="Amiri" pitchFamily="34" charset="-120"/>
+                <a:latin typeface="Amiri" pitchFamily="2" charset="-78"/>
+                <a:cs typeface="Amiri" pitchFamily="2" charset="-78"/>
               </a:rPr>
               <a:t>نِقَاطُ القُوَّةِ</a:t>
             </a:r>
@@ -11106,8 +10918,7 @@
                   <a:srgbClr val="1F2A37"/>
                 </a:solidFill>
                 <a:latin typeface="Calibri" pitchFamily="34" charset="0"/>
-                <a:ea typeface="Calibri" pitchFamily="34" charset="-122"/>
-                <a:cs typeface="Calibri" pitchFamily="34" charset="-120"/>
+                <a:cs typeface="Amiri" pitchFamily="2" charset="-78"/>
               </a:rPr>
               <a:t>strengths</a:t>
             </a:r>
@@ -11120,8 +10931,7 @@
                   <a:srgbClr val="5A6472"/>
                 </a:solidFill>
                 <a:latin typeface="Calibri" pitchFamily="34" charset="0"/>
-                <a:ea typeface="Calibri" pitchFamily="34" charset="-122"/>
-                <a:cs typeface="Calibri" pitchFamily="34" charset="-120"/>
+                <a:cs typeface="Amiri" pitchFamily="2" charset="-78"/>
               </a:rPr>
               <a:t>  sg. نُقْطَةُ قُوَّةٍ</a:t>
             </a:r>
@@ -11158,9 +10968,8 @@
                 <a:solidFill>
                   <a:srgbClr val="1B3B6F"/>
                 </a:solidFill>
-                <a:latin typeface="Amiri" pitchFamily="34" charset="0"/>
-                <a:ea typeface="Amiri" pitchFamily="34" charset="-122"/>
-                <a:cs typeface="Amiri" pitchFamily="34" charset="-120"/>
+                <a:latin typeface="Amiri" pitchFamily="2" charset="-78"/>
+                <a:cs typeface="Amiri" pitchFamily="2" charset="-78"/>
               </a:rPr>
               <a:t>نِقَاطُ الضَّعْفِ</a:t>
             </a:r>
@@ -11198,8 +11007,7 @@
                   <a:srgbClr val="1F2A37"/>
                 </a:solidFill>
                 <a:latin typeface="Calibri" pitchFamily="34" charset="0"/>
-                <a:ea typeface="Calibri" pitchFamily="34" charset="-122"/>
-                <a:cs typeface="Calibri" pitchFamily="34" charset="-120"/>
+                <a:cs typeface="Amiri" pitchFamily="2" charset="-78"/>
               </a:rPr>
               <a:t>weaknesses</a:t>
             </a:r>
@@ -11212,8 +11020,7 @@
                   <a:srgbClr val="5A6472"/>
                 </a:solidFill>
                 <a:latin typeface="Calibri" pitchFamily="34" charset="0"/>
-                <a:ea typeface="Calibri" pitchFamily="34" charset="-122"/>
-                <a:cs typeface="Calibri" pitchFamily="34" charset="-120"/>
+                <a:cs typeface="Amiri" pitchFamily="2" charset="-78"/>
               </a:rPr>
               <a:t>  sg. نُقْطَةُ ضَعْفٍ</a:t>
             </a:r>
@@ -11250,9 +11057,8 @@
                 <a:solidFill>
                   <a:srgbClr val="1B3B6F"/>
                 </a:solidFill>
-                <a:latin typeface="Amiri" pitchFamily="34" charset="0"/>
-                <a:ea typeface="Amiri" pitchFamily="34" charset="-122"/>
-                <a:cs typeface="Amiri" pitchFamily="34" charset="-120"/>
+                <a:latin typeface="Amiri" pitchFamily="2" charset="-78"/>
+                <a:cs typeface="Amiri" pitchFamily="2" charset="-78"/>
               </a:rPr>
               <a:t>الأَخْطَاءُ الشَّائِعَةُ</a:t>
             </a:r>
@@ -11290,8 +11096,7 @@
                   <a:srgbClr val="1F2A37"/>
                 </a:solidFill>
                 <a:latin typeface="Calibri" pitchFamily="34" charset="0"/>
-                <a:ea typeface="Calibri" pitchFamily="34" charset="-122"/>
-                <a:cs typeface="Calibri" pitchFamily="34" charset="-120"/>
+                <a:cs typeface="Amiri" pitchFamily="2" charset="-78"/>
               </a:rPr>
               <a:t>common errors</a:t>
             </a:r>
@@ -11304,8 +11109,7 @@
                   <a:srgbClr val="5A6472"/>
                 </a:solidFill>
                 <a:latin typeface="Calibri" pitchFamily="34" charset="0"/>
-                <a:ea typeface="Calibri" pitchFamily="34" charset="-122"/>
-                <a:cs typeface="Calibri" pitchFamily="34" charset="-120"/>
+                <a:cs typeface="Amiri" pitchFamily="2" charset="-78"/>
               </a:rPr>
               <a:t>  sg. خَطَأٌ شَائِعٌ</a:t>
             </a:r>
@@ -11342,9 +11146,8 @@
                 <a:solidFill>
                   <a:srgbClr val="1B3B6F"/>
                 </a:solidFill>
-                <a:latin typeface="Amiri" pitchFamily="34" charset="0"/>
-                <a:ea typeface="Amiri" pitchFamily="34" charset="-122"/>
-                <a:cs typeface="Amiri" pitchFamily="34" charset="-120"/>
+                <a:latin typeface="Amiri" pitchFamily="2" charset="-78"/>
+                <a:cs typeface="Amiri" pitchFamily="2" charset="-78"/>
               </a:rPr>
               <a:t>خُطَّةُ المُرَاجَعَةِ</a:t>
             </a:r>
@@ -11382,8 +11185,7 @@
                   <a:srgbClr val="1F2A37"/>
                 </a:solidFill>
                 <a:latin typeface="Calibri" pitchFamily="34" charset="0"/>
-                <a:ea typeface="Calibri" pitchFamily="34" charset="-122"/>
-                <a:cs typeface="Calibri" pitchFamily="34" charset="-120"/>
+                <a:cs typeface="Amiri" pitchFamily="2" charset="-78"/>
               </a:rPr>
               <a:t>revision plan</a:t>
             </a:r>
@@ -11396,8 +11198,7 @@
                   <a:srgbClr val="5A6472"/>
                 </a:solidFill>
                 <a:latin typeface="Calibri" pitchFamily="34" charset="0"/>
-                <a:ea typeface="Calibri" pitchFamily="34" charset="-122"/>
-                <a:cs typeface="Calibri" pitchFamily="34" charset="-120"/>
+                <a:cs typeface="Amiri" pitchFamily="2" charset="-78"/>
               </a:rPr>
               <a:t>  pl. خُطَطٌ</a:t>
             </a:r>
@@ -11435,8 +11236,7 @@
                   <a:srgbClr val="C45A3C"/>
                 </a:solidFill>
                 <a:latin typeface="Calibri" pitchFamily="34" charset="0"/>
-                <a:ea typeface="Calibri" pitchFamily="34" charset="-122"/>
-                <a:cs typeface="Calibri" pitchFamily="34" charset="-120"/>
+                <a:cs typeface="Amiri" pitchFamily="2" charset="-78"/>
               </a:rPr>
               <a:t>AND ANSWER ONE QUESTION</a:t>
             </a:r>
@@ -11474,8 +11274,7 @@
                   <a:srgbClr val="1F2A37"/>
                 </a:solidFill>
                 <a:latin typeface="Calibri" pitchFamily="34" charset="0"/>
-                <a:ea typeface="Calibri" pitchFamily="34" charset="-122"/>
-                <a:cs typeface="Calibri" pitchFamily="34" charset="-120"/>
+                <a:cs typeface="Amiri" pitchFamily="2" charset="-78"/>
               </a:rPr>
               <a:t>Which of the four papers is your strongest, and which needs the most work?</a:t>
             </a:r>
@@ -11515,9 +11314,8 @@
                 <a:solidFill>
                   <a:srgbClr val="1B3B6F"/>
                 </a:solidFill>
-                <a:latin typeface="Amiri" pitchFamily="34" charset="0"/>
-                <a:ea typeface="Amiri" pitchFamily="34" charset="-122"/>
-                <a:cs typeface="Amiri" pitchFamily="34" charset="-120"/>
+                <a:latin typeface="Amiri" pitchFamily="2" charset="-78"/>
+                <a:cs typeface="Amiri" pitchFamily="2" charset="-78"/>
               </a:rPr>
               <a:t>أَقْوَى وَرَقَةٍ عِنْدِي هِيَ ______ ، وَأَحْتَاجُ إِلَى مُرَاجَعَةِ ______ .</a:t>
             </a:r>
@@ -11555,8 +11353,7 @@
                   <a:srgbClr val="1B3B6F"/>
                 </a:solidFill>
                 <a:latin typeface="Calibri" pitchFamily="34" charset="0"/>
-                <a:ea typeface="Calibri" pitchFamily="34" charset="-122"/>
-                <a:cs typeface="Calibri" pitchFamily="34" charset="-120"/>
+                <a:cs typeface="Amiri" pitchFamily="2" charset="-78"/>
               </a:rPr>
               <a:t>HOMEWORK — CHOOSE YOUR ROUTE</a:t>
             </a:r>
@@ -11655,8 +11452,7 @@
                   <a:srgbClr val="FFFFFF"/>
                 </a:solidFill>
                 <a:latin typeface="Calibri" pitchFamily="34" charset="0"/>
-                <a:ea typeface="Calibri" pitchFamily="34" charset="-122"/>
-                <a:cs typeface="Calibri" pitchFamily="34" charset="-120"/>
+                <a:cs typeface="Amiri" pitchFamily="2" charset="-78"/>
               </a:rPr>
               <a:t>CORE</a:t>
             </a:r>
@@ -11694,8 +11490,7 @@
                   <a:srgbClr val="1F2A37"/>
                 </a:solidFill>
                 <a:latin typeface="Calibri" pitchFamily="34" charset="0"/>
-                <a:ea typeface="Calibri" pitchFamily="34" charset="-122"/>
-                <a:cs typeface="Calibri" pitchFamily="34" charset="-120"/>
+                <a:cs typeface="Amiri" pitchFamily="2" charset="-78"/>
               </a:rPr>
               <a:t>Collect your four mock scores in one place; learn the five words.</a:t>
             </a:r>
@@ -11794,8 +11589,7 @@
                   <a:srgbClr val="FFFFFF"/>
                 </a:solidFill>
                 <a:latin typeface="Calibri" pitchFamily="34" charset="0"/>
-                <a:ea typeface="Calibri" pitchFamily="34" charset="-122"/>
-                <a:cs typeface="Calibri" pitchFamily="34" charset="-120"/>
+                <a:cs typeface="Amiri" pitchFamily="2" charset="-78"/>
               </a:rPr>
               <a:t>DEVELOP</a:t>
             </a:r>
@@ -11833,8 +11627,7 @@
                   <a:srgbClr val="1F2A37"/>
                 </a:solidFill>
                 <a:latin typeface="Calibri" pitchFamily="34" charset="0"/>
-                <a:ea typeface="Calibri" pitchFamily="34" charset="-122"/>
-                <a:cs typeface="Calibri" pitchFamily="34" charset="-120"/>
+                <a:cs typeface="Amiri" pitchFamily="2" charset="-78"/>
               </a:rPr>
               <a:t>Collect your scores and list your three most common errors; learn the five words.</a:t>
             </a:r>
@@ -11933,8 +11726,7 @@
                   <a:srgbClr val="FFFFFF"/>
                 </a:solidFill>
                 <a:latin typeface="Calibri" pitchFamily="34" charset="0"/>
-                <a:ea typeface="Calibri" pitchFamily="34" charset="-122"/>
-                <a:cs typeface="Calibri" pitchFamily="34" charset="-120"/>
+                <a:cs typeface="Amiri" pitchFamily="2" charset="-78"/>
               </a:rPr>
               <a:t>STRETCH</a:t>
             </a:r>
@@ -11972,8 +11764,7 @@
                   <a:srgbClr val="1F2A37"/>
                 </a:solidFill>
                 <a:latin typeface="Calibri" pitchFamily="34" charset="0"/>
-                <a:ea typeface="Calibri" pitchFamily="34" charset="-122"/>
-                <a:cs typeface="Calibri" pitchFamily="34" charset="-120"/>
+                <a:cs typeface="Amiri" pitchFamily="2" charset="-78"/>
               </a:rPr>
               <a:t>Collect your scores, list your errors, and draft a two-week revision plan; learn the five words.</a:t>
             </a:r>
@@ -12011,8 +11802,7 @@
                   <a:srgbClr val="8A93A0"/>
                 </a:solidFill>
                 <a:latin typeface="Calibri" pitchFamily="34" charset="0"/>
-                <a:ea typeface="Calibri" pitchFamily="34" charset="-122"/>
-                <a:cs typeface="Calibri" pitchFamily="34" charset="-120"/>
+                <a:cs typeface="Amiri" pitchFamily="2" charset="-78"/>
               </a:rPr>
               <a:t>16 / 17</a:t>
             </a:r>
@@ -12156,8 +11946,7 @@
                   <a:srgbClr val="D4AF37"/>
                 </a:solidFill>
                 <a:latin typeface="Calibri" pitchFamily="34" charset="0"/>
-                <a:ea typeface="Calibri" pitchFamily="34" charset="-122"/>
-                <a:cs typeface="Calibri" pitchFamily="34" charset="-120"/>
+                <a:cs typeface="Amiri" pitchFamily="2" charset="-78"/>
               </a:rPr>
               <a:t>P6-L10 COMPLETE</a:t>
             </a:r>
@@ -12194,9 +11983,8 @@
                 <a:solidFill>
                   <a:srgbClr val="FFFFFF"/>
                 </a:solidFill>
-                <a:latin typeface="Amiri" pitchFamily="34" charset="0"/>
-                <a:ea typeface="Amiri" pitchFamily="34" charset="-122"/>
-                <a:cs typeface="Amiri" pitchFamily="34" charset="-120"/>
+                <a:latin typeface="Amiri" pitchFamily="2" charset="-78"/>
+                <a:cs typeface="Amiri" pitchFamily="2" charset="-78"/>
               </a:rPr>
               <a:t>أَحْسَنْتُمْ! إِلَى اللِّقَاءِ</a:t>
             </a:r>
@@ -12234,8 +12022,7 @@
                   <a:srgbClr val="C6D2E6"/>
                 </a:solidFill>
                 <a:latin typeface="Calibri" pitchFamily="34" charset="0"/>
-                <a:ea typeface="Calibri" pitchFamily="34" charset="-122"/>
-                <a:cs typeface="Calibri" pitchFamily="34" charset="-120"/>
+                <a:cs typeface="Amiri" pitchFamily="2" charset="-78"/>
               </a:rPr>
               <a:t>Well done — see you next lesson.</a:t>
             </a:r>
@@ -12273,8 +12060,7 @@
                   <a:srgbClr val="D4AF37"/>
                 </a:solidFill>
                 <a:latin typeface="Calibri" pitchFamily="34" charset="0"/>
-                <a:ea typeface="Calibri" pitchFamily="34" charset="-122"/>
-                <a:cs typeface="Calibri" pitchFamily="34" charset="-120"/>
+                <a:cs typeface="Amiri" pitchFamily="2" charset="-78"/>
               </a:rPr>
               <a:t>NEXT LESSON</a:t>
             </a:r>
@@ -12312,8 +12098,7 @@
                   <a:srgbClr val="FFFFFF"/>
                 </a:solidFill>
                 <a:latin typeface="Cambria" pitchFamily="34" charset="0"/>
-                <a:ea typeface="Cambria" pitchFamily="34" charset="-122"/>
-                <a:cs typeface="Cambria" pitchFamily="34" charset="-120"/>
+                <a:cs typeface="Amiri" pitchFamily="2" charset="-78"/>
               </a:rPr>
               <a:t>P6-L11 · Mock Results, Targeted Revision and Final IGCSE Preparation</a:t>
             </a:r>
@@ -12350,9 +12135,8 @@
                 <a:solidFill>
                   <a:srgbClr val="D4AF37"/>
                 </a:solidFill>
-                <a:latin typeface="Amiri" pitchFamily="34" charset="0"/>
-                <a:ea typeface="Amiri" pitchFamily="34" charset="-122"/>
-                <a:cs typeface="Amiri" pitchFamily="34" charset="-120"/>
+                <a:latin typeface="Amiri" pitchFamily="2" charset="-78"/>
+                <a:cs typeface="Amiri" pitchFamily="2" charset="-78"/>
               </a:rPr>
               <a:t>نَتَائِجُ المُحَاكَاةِ وَالمُرَاجَعَةُ المُوَجَّهَةُ</a:t>
             </a:r>
@@ -12390,8 +12174,7 @@
                   <a:srgbClr val="FFFFFF"/>
                 </a:solidFill>
                 <a:latin typeface="Calibri" pitchFamily="34" charset="0"/>
-                <a:ea typeface="Calibri" pitchFamily="34" charset="-122"/>
-                <a:cs typeface="Calibri" pitchFamily="34" charset="-120"/>
+                <a:cs typeface="Amiri" pitchFamily="2" charset="-78"/>
               </a:rPr>
               <a:t>Remember: role play — precise, not long; topic conversation — develop every answer. All four mocks are done: bring your scores to P6-L11.</a:t>
             </a:r>
@@ -12485,9 +12268,8 @@
                 <a:solidFill>
                   <a:srgbClr val="D4AF37"/>
                 </a:solidFill>
-                <a:latin typeface="Amiri" pitchFamily="34" charset="0"/>
-                <a:ea typeface="Amiri" pitchFamily="34" charset="-122"/>
-                <a:cs typeface="Amiri" pitchFamily="34" charset="-120"/>
+                <a:latin typeface="Amiri" pitchFamily="2" charset="-78"/>
+                <a:cs typeface="Amiri" pitchFamily="2" charset="-78"/>
               </a:rPr>
               <a:t>م</a:t>
             </a:r>
@@ -12525,8 +12307,7 @@
                   <a:srgbClr val="1B3B6F"/>
                 </a:solidFill>
                 <a:latin typeface="Cambria" pitchFamily="34" charset="0"/>
-                <a:ea typeface="Cambria" pitchFamily="34" charset="-122"/>
-                <a:cs typeface="Cambria" pitchFamily="34" charset="-120"/>
+                <a:cs typeface="Amiri" pitchFamily="2" charset="-78"/>
               </a:rPr>
               <a:t>Al Madina Online School</a:t>
             </a:r>
@@ -12564,8 +12345,7 @@
                   <a:srgbClr val="8A6D1E"/>
                 </a:solidFill>
                 <a:latin typeface="Calibri" pitchFamily="34" charset="0"/>
-                <a:ea typeface="Calibri" pitchFamily="34" charset="-122"/>
-                <a:cs typeface="Calibri" pitchFamily="34" charset="-120"/>
+                <a:cs typeface="Amiri" pitchFamily="2" charset="-78"/>
               </a:rPr>
               <a:t>ARABIC DEPARTMENT · MIFTAH ARABIC · IGCSE 0544</a:t>
             </a:r>
@@ -12630,8 +12410,7 @@
                   <a:srgbClr val="FFFFFF"/>
                 </a:solidFill>
                 <a:latin typeface="Calibri" pitchFamily="34" charset="0"/>
-                <a:ea typeface="Calibri" pitchFamily="34" charset="-122"/>
-                <a:cs typeface="Calibri" pitchFamily="34" charset="-120"/>
+                <a:cs typeface="Amiri" pitchFamily="2" charset="-78"/>
               </a:rPr>
               <a:t>P6-L10 · IGCSE Bridge</a:t>
             </a:r>
@@ -12696,8 +12475,7 @@
                   <a:srgbClr val="FFFFFF"/>
                 </a:solidFill>
                 <a:latin typeface="Calibri" pitchFamily="34" charset="0"/>
-                <a:ea typeface="Calibri" pitchFamily="34" charset="-122"/>
-                <a:cs typeface="Calibri" pitchFamily="34" charset="-120"/>
+                <a:cs typeface="Amiri" pitchFamily="2" charset="-78"/>
               </a:rPr>
               <a:t>WELCOME · 1 MIN</a:t>
             </a:r>
@@ -12735,8 +12513,7 @@
                   <a:srgbClr val="5A6472"/>
                 </a:solidFill>
                 <a:latin typeface="Calibri" pitchFamily="34" charset="0"/>
-                <a:ea typeface="Calibri" pitchFamily="34" charset="-122"/>
-                <a:cs typeface="Calibri" pitchFamily="34" charset="-120"/>
+                <a:cs typeface="Amiri" pitchFamily="2" charset="-78"/>
               </a:rPr>
               <a:t>BEFORE WE BEGIN</a:t>
             </a:r>
@@ -12774,8 +12551,7 @@
                   <a:srgbClr val="1B3B6F"/>
                 </a:solidFill>
                 <a:latin typeface="Cambria" pitchFamily="34" charset="0"/>
-                <a:ea typeface="Cambria" pitchFamily="34" charset="-122"/>
-                <a:cs typeface="Cambria" pitchFamily="34" charset="-120"/>
+                <a:cs typeface="Amiri" pitchFamily="2" charset="-78"/>
               </a:rPr>
               <a:t>Our online classroom</a:t>
             </a:r>
@@ -12812,9 +12588,8 @@
                 <a:solidFill>
                   <a:srgbClr val="8A6D1E"/>
                 </a:solidFill>
-                <a:latin typeface="Amiri" pitchFamily="34" charset="0"/>
-                <a:ea typeface="Amiri" pitchFamily="34" charset="-122"/>
-                <a:cs typeface="Amiri" pitchFamily="34" charset="-120"/>
+                <a:latin typeface="Amiri" pitchFamily="2" charset="-78"/>
+                <a:cs typeface="Amiri" pitchFamily="2" charset="-78"/>
               </a:rPr>
               <a:t>آدَابُ الصَّفِّ</a:t>
             </a:r>
@@ -12852,8 +12627,7 @@
                   <a:srgbClr val="8A93A0"/>
                 </a:solidFill>
                 <a:latin typeface="Calibri" pitchFamily="34" charset="0"/>
-                <a:ea typeface="Calibri" pitchFamily="34" charset="-122"/>
-                <a:cs typeface="Calibri" pitchFamily="34" charset="-120"/>
+                <a:cs typeface="Amiri" pitchFamily="2" charset="-78"/>
               </a:rPr>
               <a:t>Miftah Arabic · Progression P6 · IGCSE Bridge · P6-L10</a:t>
             </a:r>
@@ -12974,8 +12748,7 @@
                   <a:srgbClr val="1B3B6F"/>
                 </a:solidFill>
                 <a:latin typeface="Calibri" pitchFamily="34" charset="0"/>
-                <a:ea typeface="Calibri" pitchFamily="34" charset="-122"/>
-                <a:cs typeface="Calibri" pitchFamily="34" charset="-120"/>
+                <a:cs typeface="Amiri" pitchFamily="2" charset="-78"/>
               </a:rPr>
               <a:t>Camera on</a:t>
             </a:r>
@@ -12991,8 +12764,7 @@
                   <a:srgbClr val="5A6472"/>
                 </a:solidFill>
                 <a:latin typeface="Calibri" pitchFamily="34" charset="0"/>
-                <a:ea typeface="Calibri" pitchFamily="34" charset="-122"/>
-                <a:cs typeface="Calibri" pitchFamily="34" charset="-120"/>
+                <a:cs typeface="Amiri" pitchFamily="2" charset="-78"/>
               </a:rPr>
               <a:t>So I can see you learning and help you quickly.</a:t>
             </a:r>
@@ -13113,8 +12885,7 @@
                   <a:srgbClr val="1B3B6F"/>
                 </a:solidFill>
                 <a:latin typeface="Calibri" pitchFamily="34" charset="0"/>
-                <a:ea typeface="Calibri" pitchFamily="34" charset="-122"/>
-                <a:cs typeface="Calibri" pitchFamily="34" charset="-120"/>
+                <a:cs typeface="Amiri" pitchFamily="2" charset="-78"/>
               </a:rPr>
               <a:t>Mic muted</a:t>
             </a:r>
@@ -13130,8 +12901,7 @@
                   <a:srgbClr val="5A6472"/>
                 </a:solidFill>
                 <a:latin typeface="Calibri" pitchFamily="34" charset="0"/>
-                <a:ea typeface="Calibri" pitchFamily="34" charset="-122"/>
-                <a:cs typeface="Calibri" pitchFamily="34" charset="-120"/>
+                <a:cs typeface="Amiri" pitchFamily="2" charset="-78"/>
               </a:rPr>
               <a:t>Unmute only when invited to speak.</a:t>
             </a:r>
@@ -13252,8 +13022,7 @@
                   <a:srgbClr val="1B3B6F"/>
                 </a:solidFill>
                 <a:latin typeface="Calibri" pitchFamily="34" charset="0"/>
-                <a:ea typeface="Calibri" pitchFamily="34" charset="-122"/>
-                <a:cs typeface="Calibri" pitchFamily="34" charset="-120"/>
+                <a:cs typeface="Amiri" pitchFamily="2" charset="-78"/>
               </a:rPr>
               <a:t>Chat for learning</a:t>
             </a:r>
@@ -13269,8 +13038,7 @@
                   <a:srgbClr val="5A6472"/>
                 </a:solidFill>
                 <a:latin typeface="Calibri" pitchFamily="34" charset="0"/>
-                <a:ea typeface="Calibri" pitchFamily="34" charset="-122"/>
-                <a:cs typeface="Calibri" pitchFamily="34" charset="-120"/>
+                <a:cs typeface="Amiri" pitchFamily="2" charset="-78"/>
               </a:rPr>
               <a:t>Answers, questions and Arabic only.</a:t>
             </a:r>
@@ -13391,8 +13159,7 @@
                   <a:srgbClr val="1B3B6F"/>
                 </a:solidFill>
                 <a:latin typeface="Calibri" pitchFamily="34" charset="0"/>
-                <a:ea typeface="Calibri" pitchFamily="34" charset="-122"/>
-                <a:cs typeface="Calibri" pitchFamily="34" charset="-120"/>
+                <a:cs typeface="Amiri" pitchFamily="2" charset="-78"/>
               </a:rPr>
               <a:t>Raise your hand</a:t>
             </a:r>
@@ -13408,8 +13175,7 @@
                   <a:srgbClr val="5A6472"/>
                 </a:solidFill>
                 <a:latin typeface="Calibri" pitchFamily="34" charset="0"/>
-                <a:ea typeface="Calibri" pitchFamily="34" charset="-122"/>
-                <a:cs typeface="Calibri" pitchFamily="34" charset="-120"/>
+                <a:cs typeface="Amiri" pitchFamily="2" charset="-78"/>
               </a:rPr>
               <a:t>Use the hand button to ask for help.</a:t>
             </a:r>
@@ -13481,8 +13247,7 @@
                   <a:srgbClr val="1B3B6F"/>
                 </a:solidFill>
                 <a:latin typeface="Calibri" pitchFamily="34" charset="0"/>
-                <a:ea typeface="Calibri" pitchFamily="34" charset="-122"/>
-                <a:cs typeface="Calibri" pitchFamily="34" charset="-120"/>
+                <a:cs typeface="Amiri" pitchFamily="2" charset="-78"/>
               </a:rPr>
               <a:t>HOW WE TALK — THE ORACY CODE</a:t>
             </a:r>
@@ -13545,8 +13310,7 @@
                   <a:srgbClr val="D4AF37"/>
                 </a:solidFill>
                 <a:latin typeface="Arial" pitchFamily="34" charset="0"/>
-                <a:ea typeface="Arial" pitchFamily="34" charset="-122"/>
-                <a:cs typeface="Arial" pitchFamily="34" charset="-120"/>
+                <a:cs typeface="Amiri" pitchFamily="2" charset="-78"/>
               </a:rPr>
               <a:t>●</a:t>
             </a:r>
@@ -13584,8 +13348,7 @@
                   <a:srgbClr val="1B3B6F"/>
                 </a:solidFill>
                 <a:latin typeface="Calibri" pitchFamily="34" charset="0"/>
-                <a:ea typeface="Calibri" pitchFamily="34" charset="-122"/>
-                <a:cs typeface="Calibri" pitchFamily="34" charset="-120"/>
+                <a:cs typeface="Amiri" pitchFamily="2" charset="-78"/>
               </a:rPr>
               <a:t>Think</a:t>
             </a:r>
@@ -13601,8 +13364,7 @@
                   <a:srgbClr val="5A6472"/>
                 </a:solidFill>
                 <a:latin typeface="Calibri" pitchFamily="34" charset="0"/>
-                <a:ea typeface="Calibri" pitchFamily="34" charset="-122"/>
-                <a:cs typeface="Calibri" pitchFamily="34" charset="-120"/>
+                <a:cs typeface="Amiri" pitchFamily="2" charset="-78"/>
               </a:rPr>
               <a:t>silent preparation</a:t>
             </a:r>
@@ -13665,8 +13427,7 @@
                   <a:srgbClr val="D4AF37"/>
                 </a:solidFill>
                 <a:latin typeface="Arial" pitchFamily="34" charset="0"/>
-                <a:ea typeface="Arial" pitchFamily="34" charset="-122"/>
-                <a:cs typeface="Arial" pitchFamily="34" charset="-120"/>
+                <a:cs typeface="Amiri" pitchFamily="2" charset="-78"/>
               </a:rPr>
               <a:t>↔</a:t>
             </a:r>
@@ -13704,8 +13465,7 @@
                   <a:srgbClr val="1B3B6F"/>
                 </a:solidFill>
                 <a:latin typeface="Calibri" pitchFamily="34" charset="0"/>
-                <a:ea typeface="Calibri" pitchFamily="34" charset="-122"/>
-                <a:cs typeface="Calibri" pitchFamily="34" charset="-120"/>
+                <a:cs typeface="Amiri" pitchFamily="2" charset="-78"/>
               </a:rPr>
               <a:t>Rehearse</a:t>
             </a:r>
@@ -13721,8 +13481,7 @@
                   <a:srgbClr val="5A6472"/>
                 </a:solidFill>
                 <a:latin typeface="Calibri" pitchFamily="34" charset="0"/>
-                <a:ea typeface="Calibri" pitchFamily="34" charset="-122"/>
-                <a:cs typeface="Calibri" pitchFamily="34" charset="-120"/>
+                <a:cs typeface="Amiri" pitchFamily="2" charset="-78"/>
               </a:rPr>
               <a:t>both partners speak</a:t>
             </a:r>
@@ -13785,8 +13544,7 @@
                   <a:srgbClr val="D4AF37"/>
                 </a:solidFill>
                 <a:latin typeface="Arial" pitchFamily="34" charset="0"/>
-                <a:ea typeface="Arial" pitchFamily="34" charset="-122"/>
-                <a:cs typeface="Arial" pitchFamily="34" charset="-120"/>
+                <a:cs typeface="Amiri" pitchFamily="2" charset="-78"/>
               </a:rPr>
               <a:t>+</a:t>
             </a:r>
@@ -13824,8 +13582,7 @@
                   <a:srgbClr val="1B3B6F"/>
                 </a:solidFill>
                 <a:latin typeface="Calibri" pitchFamily="34" charset="0"/>
-                <a:ea typeface="Calibri" pitchFamily="34" charset="-122"/>
-                <a:cs typeface="Calibri" pitchFamily="34" charset="-120"/>
+                <a:cs typeface="Amiri" pitchFamily="2" charset="-78"/>
               </a:rPr>
               <a:t>Build</a:t>
             </a:r>
@@ -13841,8 +13598,7 @@
                   <a:srgbClr val="5A6472"/>
                 </a:solidFill>
                 <a:latin typeface="Calibri" pitchFamily="34" charset="0"/>
-                <a:ea typeface="Calibri" pitchFamily="34" charset="-122"/>
-                <a:cs typeface="Calibri" pitchFamily="34" charset="-120"/>
+                <a:cs typeface="Amiri" pitchFamily="2" charset="-78"/>
               </a:rPr>
               <a:t>add a reason or detail</a:t>
             </a:r>
@@ -13905,8 +13661,7 @@
                   <a:srgbClr val="D4AF37"/>
                 </a:solidFill>
                 <a:latin typeface="Arial" pitchFamily="34" charset="0"/>
-                <a:ea typeface="Arial" pitchFamily="34" charset="-122"/>
-                <a:cs typeface="Arial" pitchFamily="34" charset="-120"/>
+                <a:cs typeface="Amiri" pitchFamily="2" charset="-78"/>
               </a:rPr>
               <a:t>?</a:t>
             </a:r>
@@ -13944,8 +13699,7 @@
                   <a:srgbClr val="1B3B6F"/>
                 </a:solidFill>
                 <a:latin typeface="Calibri" pitchFamily="34" charset="0"/>
-                <a:ea typeface="Calibri" pitchFamily="34" charset="-122"/>
-                <a:cs typeface="Calibri" pitchFamily="34" charset="-120"/>
+                <a:cs typeface="Amiri" pitchFamily="2" charset="-78"/>
               </a:rPr>
               <a:t>Challenge</a:t>
             </a:r>
@@ -13961,8 +13715,7 @@
                   <a:srgbClr val="5A6472"/>
                 </a:solidFill>
                 <a:latin typeface="Calibri" pitchFamily="34" charset="0"/>
-                <a:ea typeface="Calibri" pitchFamily="34" charset="-122"/>
-                <a:cs typeface="Calibri" pitchFamily="34" charset="-120"/>
+                <a:cs typeface="Amiri" pitchFamily="2" charset="-78"/>
               </a:rPr>
               <a:t>question respectfully</a:t>
             </a:r>
@@ -14025,8 +13778,7 @@
                   <a:srgbClr val="D4AF37"/>
                 </a:solidFill>
                 <a:latin typeface="Arial" pitchFamily="34" charset="0"/>
-                <a:ea typeface="Arial" pitchFamily="34" charset="-122"/>
-                <a:cs typeface="Arial" pitchFamily="34" charset="-120"/>
+                <a:cs typeface="Amiri" pitchFamily="2" charset="-78"/>
               </a:rPr>
               <a:t>◎</a:t>
             </a:r>
@@ -14064,8 +13816,7 @@
                   <a:srgbClr val="1B3B6F"/>
                 </a:solidFill>
                 <a:latin typeface="Calibri" pitchFamily="34" charset="0"/>
-                <a:ea typeface="Calibri" pitchFamily="34" charset="-122"/>
-                <a:cs typeface="Calibri" pitchFamily="34" charset="-120"/>
+                <a:cs typeface="Amiri" pitchFamily="2" charset="-78"/>
               </a:rPr>
               <a:t>Share</a:t>
             </a:r>
@@ -14081,8 +13832,7 @@
                   <a:srgbClr val="5A6472"/>
                 </a:solidFill>
                 <a:latin typeface="Calibri" pitchFamily="34" charset="0"/>
-                <a:ea typeface="Calibri" pitchFamily="34" charset="-122"/>
-                <a:cs typeface="Calibri" pitchFamily="34" charset="-120"/>
+                <a:cs typeface="Amiri" pitchFamily="2" charset="-78"/>
               </a:rPr>
               <a:t>anyone may be invited</a:t>
             </a:r>
@@ -14145,8 +13895,7 @@
                   <a:srgbClr val="D4AF37"/>
                 </a:solidFill>
                 <a:latin typeface="Arial" pitchFamily="34" charset="0"/>
-                <a:ea typeface="Arial" pitchFamily="34" charset="-122"/>
-                <a:cs typeface="Arial" pitchFamily="34" charset="-120"/>
+                <a:cs typeface="Amiri" pitchFamily="2" charset="-78"/>
               </a:rPr>
               <a:t>↺</a:t>
             </a:r>
@@ -14184,8 +13933,7 @@
                   <a:srgbClr val="1B3B6F"/>
                 </a:solidFill>
                 <a:latin typeface="Calibri" pitchFamily="34" charset="0"/>
-                <a:ea typeface="Calibri" pitchFamily="34" charset="-122"/>
-                <a:cs typeface="Calibri" pitchFamily="34" charset="-120"/>
+                <a:cs typeface="Amiri" pitchFamily="2" charset="-78"/>
               </a:rPr>
               <a:t>Summarise</a:t>
             </a:r>
@@ -14201,8 +13949,7 @@
                   <a:srgbClr val="5A6472"/>
                 </a:solidFill>
                 <a:latin typeface="Calibri" pitchFamily="34" charset="0"/>
-                <a:ea typeface="Calibri" pitchFamily="34" charset="-122"/>
-                <a:cs typeface="Calibri" pitchFamily="34" charset="-120"/>
+                <a:cs typeface="Amiri" pitchFamily="2" charset="-78"/>
               </a:rPr>
               <a:t>say it more precisely</a:t>
             </a:r>
@@ -14240,8 +13987,7 @@
                   <a:srgbClr val="8A6D1E"/>
                 </a:solidFill>
                 <a:latin typeface="Calibri" pitchFamily="34" charset="0"/>
-                <a:ea typeface="Calibri" pitchFamily="34" charset="-122"/>
-                <a:cs typeface="Calibri" pitchFamily="34" charset="-120"/>
+                <a:cs typeface="Amiri" pitchFamily="2" charset="-78"/>
               </a:rPr>
               <a:t>I will always give you thinking and practice time before I ask anyone. Reading aloud is by invitation — you can always say “pass, please come back to me”.</a:t>
             </a:r>
@@ -14279,8 +14025,7 @@
                   <a:srgbClr val="8A93A0"/>
                 </a:solidFill>
                 <a:latin typeface="Calibri" pitchFamily="34" charset="0"/>
-                <a:ea typeface="Calibri" pitchFamily="34" charset="-122"/>
-                <a:cs typeface="Calibri" pitchFamily="34" charset="-120"/>
+                <a:cs typeface="Amiri" pitchFamily="2" charset="-78"/>
               </a:rPr>
               <a:t>2 / 17</a:t>
             </a:r>
@@ -14374,9 +14119,8 @@
                 <a:solidFill>
                   <a:srgbClr val="D4AF37"/>
                 </a:solidFill>
-                <a:latin typeface="Amiri" pitchFamily="34" charset="0"/>
-                <a:ea typeface="Amiri" pitchFamily="34" charset="-122"/>
-                <a:cs typeface="Amiri" pitchFamily="34" charset="-120"/>
+                <a:latin typeface="Amiri" pitchFamily="2" charset="-78"/>
+                <a:cs typeface="Amiri" pitchFamily="2" charset="-78"/>
               </a:rPr>
               <a:t>م</a:t>
             </a:r>
@@ -14414,8 +14158,7 @@
                   <a:srgbClr val="1B3B6F"/>
                 </a:solidFill>
                 <a:latin typeface="Cambria" pitchFamily="34" charset="0"/>
-                <a:ea typeface="Cambria" pitchFamily="34" charset="-122"/>
-                <a:cs typeface="Cambria" pitchFamily="34" charset="-120"/>
+                <a:cs typeface="Amiri" pitchFamily="2" charset="-78"/>
               </a:rPr>
               <a:t>Al Madina Online School</a:t>
             </a:r>
@@ -14453,8 +14196,7 @@
                   <a:srgbClr val="8A6D1E"/>
                 </a:solidFill>
                 <a:latin typeface="Calibri" pitchFamily="34" charset="0"/>
-                <a:ea typeface="Calibri" pitchFamily="34" charset="-122"/>
-                <a:cs typeface="Calibri" pitchFamily="34" charset="-120"/>
+                <a:cs typeface="Amiri" pitchFamily="2" charset="-78"/>
               </a:rPr>
               <a:t>ARABIC DEPARTMENT · MIFTAH ARABIC · IGCSE 0544</a:t>
             </a:r>
@@ -14519,8 +14261,7 @@
                   <a:srgbClr val="FFFFFF"/>
                 </a:solidFill>
                 <a:latin typeface="Calibri" pitchFamily="34" charset="0"/>
-                <a:ea typeface="Calibri" pitchFamily="34" charset="-122"/>
-                <a:cs typeface="Calibri" pitchFamily="34" charset="-120"/>
+                <a:cs typeface="Amiri" pitchFamily="2" charset="-78"/>
               </a:rPr>
               <a:t>P6-L10 · IGCSE Bridge</a:t>
             </a:r>
@@ -14585,8 +14326,7 @@
                   <a:srgbClr val="FFFFFF"/>
                 </a:solidFill>
                 <a:latin typeface="Calibri" pitchFamily="34" charset="0"/>
-                <a:ea typeface="Calibri" pitchFamily="34" charset="-122"/>
-                <a:cs typeface="Calibri" pitchFamily="34" charset="-120"/>
+                <a:cs typeface="Amiri" pitchFamily="2" charset="-78"/>
               </a:rPr>
               <a:t>WELCOME</a:t>
             </a:r>
@@ -14624,8 +14364,7 @@
                   <a:srgbClr val="5A6472"/>
                 </a:solidFill>
                 <a:latin typeface="Calibri" pitchFamily="34" charset="0"/>
-                <a:ea typeface="Calibri" pitchFamily="34" charset="-122"/>
-                <a:cs typeface="Calibri" pitchFamily="34" charset="-120"/>
+                <a:cs typeface="Amiri" pitchFamily="2" charset="-78"/>
               </a:rPr>
               <a:t>TODAY’S LESSON MAP</a:t>
             </a:r>
@@ -14663,8 +14402,7 @@
                   <a:srgbClr val="1B3B6F"/>
                 </a:solidFill>
                 <a:latin typeface="Cambria" pitchFamily="34" charset="0"/>
-                <a:ea typeface="Cambria" pitchFamily="34" charset="-122"/>
-                <a:cs typeface="Cambria" pitchFamily="34" charset="-120"/>
+                <a:cs typeface="Amiri" pitchFamily="2" charset="-78"/>
               </a:rPr>
               <a:t>Our lesson today, step by step</a:t>
             </a:r>
@@ -14701,9 +14439,8 @@
                 <a:solidFill>
                   <a:srgbClr val="8A6D1E"/>
                 </a:solidFill>
-                <a:latin typeface="Amiri" pitchFamily="34" charset="0"/>
-                <a:ea typeface="Amiri" pitchFamily="34" charset="-122"/>
-                <a:cs typeface="Amiri" pitchFamily="34" charset="-120"/>
+                <a:latin typeface="Amiri" pitchFamily="2" charset="-78"/>
+                <a:cs typeface="Amiri" pitchFamily="2" charset="-78"/>
               </a:rPr>
               <a:t>خَرِيطَةُ الدَّرْسِ</a:t>
             </a:r>
@@ -14741,8 +14478,7 @@
                   <a:srgbClr val="8A93A0"/>
                 </a:solidFill>
                 <a:latin typeface="Calibri" pitchFamily="34" charset="0"/>
-                <a:ea typeface="Calibri" pitchFamily="34" charset="-122"/>
-                <a:cs typeface="Calibri" pitchFamily="34" charset="-120"/>
+                <a:cs typeface="Amiri" pitchFamily="2" charset="-78"/>
               </a:rPr>
               <a:t>Miftah Arabic · Progression P6 · IGCSE Bridge · P6-L10</a:t>
             </a:r>
@@ -14841,8 +14577,7 @@
                   <a:srgbClr val="FFFFFF"/>
                 </a:solidFill>
                 <a:latin typeface="Calibri" pitchFamily="34" charset="0"/>
-                <a:ea typeface="Calibri" pitchFamily="34" charset="-122"/>
-                <a:cs typeface="Calibri" pitchFamily="34" charset="-120"/>
+                <a:cs typeface="Amiri" pitchFamily="2" charset="-78"/>
               </a:rPr>
               <a:t>DO NOW</a:t>
             </a:r>
@@ -14880,8 +14615,7 @@
                   <a:srgbClr val="E8EDF5"/>
                 </a:solidFill>
                 <a:latin typeface="Calibri" pitchFamily="34" charset="0"/>
-                <a:ea typeface="Calibri" pitchFamily="34" charset="-122"/>
-                <a:cs typeface="Calibri" pitchFamily="34" charset="-120"/>
+                <a:cs typeface="Amiri" pitchFamily="2" charset="-78"/>
               </a:rPr>
               <a:t>5 min</a:t>
             </a:r>
@@ -14944,8 +14678,7 @@
                   <a:srgbClr val="1B3B6F"/>
                 </a:solidFill>
                 <a:latin typeface="Calibri" pitchFamily="34" charset="0"/>
-                <a:ea typeface="Calibri" pitchFamily="34" charset="-122"/>
-                <a:cs typeface="Calibri" pitchFamily="34" charset="-120"/>
+                <a:cs typeface="Amiri" pitchFamily="2" charset="-78"/>
               </a:rPr>
               <a:t>1</a:t>
             </a:r>
@@ -14983,8 +14716,7 @@
                   <a:srgbClr val="1F2A37"/>
                 </a:solidFill>
                 <a:latin typeface="Calibri" pitchFamily="34" charset="0"/>
-                <a:ea typeface="Calibri" pitchFamily="34" charset="-122"/>
-                <a:cs typeface="Calibri" pitchFamily="34" charset="-120"/>
+                <a:cs typeface="Amiri" pitchFamily="2" charset="-78"/>
               </a:rPr>
               <a:t>Retrieval: speaking words and Band 5 structures.</a:t>
             </a:r>
@@ -15021,9 +14753,8 @@
                 <a:solidFill>
                   <a:srgbClr val="0E7C86"/>
                 </a:solidFill>
-                <a:latin typeface="Amiri" pitchFamily="34" charset="0"/>
-                <a:ea typeface="Amiri" pitchFamily="34" charset="-122"/>
-                <a:cs typeface="Amiri" pitchFamily="34" charset="-120"/>
+                <a:latin typeface="Amiri" pitchFamily="2" charset="-78"/>
+                <a:cs typeface="Amiri" pitchFamily="2" charset="-78"/>
               </a:rPr>
               <a:t>اِبْدَأِ الآنَ</a:t>
             </a:r>
@@ -15122,8 +14853,7 @@
                   <a:srgbClr val="FFFFFF"/>
                 </a:solidFill>
                 <a:latin typeface="Calibri" pitchFamily="34" charset="0"/>
-                <a:ea typeface="Calibri" pitchFamily="34" charset="-122"/>
-                <a:cs typeface="Calibri" pitchFamily="34" charset="-120"/>
+                <a:cs typeface="Amiri" pitchFamily="2" charset="-78"/>
               </a:rPr>
               <a:t>TEACHER INSTRUCTION</a:t>
             </a:r>
@@ -15161,8 +14891,7 @@
                   <a:srgbClr val="E8EDF5"/>
                 </a:solidFill>
                 <a:latin typeface="Calibri" pitchFamily="34" charset="0"/>
-                <a:ea typeface="Calibri" pitchFamily="34" charset="-122"/>
-                <a:cs typeface="Calibri" pitchFamily="34" charset="-120"/>
+                <a:cs typeface="Amiri" pitchFamily="2" charset="-78"/>
               </a:rPr>
               <a:t>5 min</a:t>
             </a:r>
@@ -15225,8 +14954,7 @@
                   <a:srgbClr val="1B3B6F"/>
                 </a:solidFill>
                 <a:latin typeface="Calibri" pitchFamily="34" charset="0"/>
-                <a:ea typeface="Calibri" pitchFamily="34" charset="-122"/>
-                <a:cs typeface="Calibri" pitchFamily="34" charset="-120"/>
+                <a:cs typeface="Amiri" pitchFamily="2" charset="-78"/>
               </a:rPr>
               <a:t>2</a:t>
             </a:r>
@@ -15264,8 +14992,7 @@
                   <a:srgbClr val="1F2A37"/>
                 </a:solidFill>
                 <a:latin typeface="Calibri" pitchFamily="34" charset="0"/>
-                <a:ea typeface="Calibri" pitchFamily="34" charset="-122"/>
-                <a:cs typeface="Calibri" pitchFamily="34" charset="-120"/>
+                <a:cs typeface="Amiri" pitchFamily="2" charset="-78"/>
               </a:rPr>
               <a:t>Settle, the routine and the mark scheme.</a:t>
             </a:r>
@@ -15302,9 +15029,8 @@
                 <a:solidFill>
                   <a:srgbClr val="1B3B6F"/>
                 </a:solidFill>
-                <a:latin typeface="Amiri" pitchFamily="34" charset="0"/>
-                <a:ea typeface="Amiri" pitchFamily="34" charset="-122"/>
-                <a:cs typeface="Amiri" pitchFamily="34" charset="-120"/>
+                <a:latin typeface="Amiri" pitchFamily="2" charset="-78"/>
+                <a:cs typeface="Amiri" pitchFamily="2" charset="-78"/>
               </a:rPr>
               <a:t>التَّهَيُّؤُ</a:t>
             </a:r>
@@ -15403,8 +15129,7 @@
                   <a:srgbClr val="FFFFFF"/>
                 </a:solidFill>
                 <a:latin typeface="Calibri" pitchFamily="34" charset="0"/>
-                <a:ea typeface="Calibri" pitchFamily="34" charset="-122"/>
-                <a:cs typeface="Calibri" pitchFamily="34" charset="-120"/>
+                <a:cs typeface="Amiri" pitchFamily="2" charset="-78"/>
               </a:rPr>
               <a:t>YOU DO</a:t>
             </a:r>
@@ -15442,8 +15167,7 @@
                   <a:srgbClr val="E8EDF5"/>
                 </a:solidFill>
                 <a:latin typeface="Calibri" pitchFamily="34" charset="0"/>
-                <a:ea typeface="Calibri" pitchFamily="34" charset="-122"/>
-                <a:cs typeface="Calibri" pitchFamily="34" charset="-120"/>
+                <a:cs typeface="Amiri" pitchFamily="2" charset="-78"/>
               </a:rPr>
               <a:t>17 min</a:t>
             </a:r>
@@ -15506,8 +15230,7 @@
                   <a:srgbClr val="1B3B6F"/>
                 </a:solidFill>
                 <a:latin typeface="Calibri" pitchFamily="34" charset="0"/>
-                <a:ea typeface="Calibri" pitchFamily="34" charset="-122"/>
-                <a:cs typeface="Calibri" pitchFamily="34" charset="-120"/>
+                <a:cs typeface="Amiri" pitchFamily="2" charset="-78"/>
               </a:rPr>
               <a:t>3</a:t>
             </a:r>
@@ -15545,8 +15268,7 @@
                   <a:srgbClr val="1F2A37"/>
                 </a:solidFill>
                 <a:latin typeface="Calibri" pitchFamily="34" charset="0"/>
-                <a:ea typeface="Calibri" pitchFamily="34" charset="-122"/>
-                <a:cs typeface="Calibri" pitchFamily="34" charset="-120"/>
+                <a:cs typeface="Amiri" pitchFamily="2" charset="-78"/>
               </a:rPr>
               <a:t>The mock: role play + topic conversation (recorded).</a:t>
             </a:r>
@@ -15583,9 +15305,8 @@
                 <a:solidFill>
                   <a:srgbClr val="1E6B52"/>
                 </a:solidFill>
-                <a:latin typeface="Amiri" pitchFamily="34" charset="0"/>
-                <a:ea typeface="Amiri" pitchFamily="34" charset="-122"/>
-                <a:cs typeface="Amiri" pitchFamily="34" charset="-120"/>
+                <a:latin typeface="Amiri" pitchFamily="2" charset="-78"/>
+                <a:cs typeface="Amiri" pitchFamily="2" charset="-78"/>
               </a:rPr>
               <a:t>الامْتِحَانُ</a:t>
             </a:r>
@@ -15684,8 +15405,7 @@
                   <a:srgbClr val="FFFFFF"/>
                 </a:solidFill>
                 <a:latin typeface="Calibri" pitchFamily="34" charset="0"/>
-                <a:ea typeface="Calibri" pitchFamily="34" charset="-122"/>
-                <a:cs typeface="Calibri" pitchFamily="34" charset="-120"/>
+                <a:cs typeface="Amiri" pitchFamily="2" charset="-78"/>
               </a:rPr>
               <a:t>FEEDBACK</a:t>
             </a:r>
@@ -15723,8 +15443,7 @@
                   <a:srgbClr val="E8EDF5"/>
                 </a:solidFill>
                 <a:latin typeface="Calibri" pitchFamily="34" charset="0"/>
-                <a:ea typeface="Calibri" pitchFamily="34" charset="-122"/>
-                <a:cs typeface="Calibri" pitchFamily="34" charset="-120"/>
+                <a:cs typeface="Amiri" pitchFamily="2" charset="-78"/>
               </a:rPr>
               <a:t>18 min</a:t>
             </a:r>
@@ -15787,8 +15506,7 @@
                   <a:srgbClr val="1B3B6F"/>
                 </a:solidFill>
                 <a:latin typeface="Calibri" pitchFamily="34" charset="0"/>
-                <a:ea typeface="Calibri" pitchFamily="34" charset="-122"/>
-                <a:cs typeface="Calibri" pitchFamily="34" charset="-120"/>
+                <a:cs typeface="Amiri" pitchFamily="2" charset="-78"/>
               </a:rPr>
               <a:t>4</a:t>
             </a:r>
@@ -15826,8 +15544,7 @@
                   <a:srgbClr val="1F2A37"/>
                 </a:solidFill>
                 <a:latin typeface="Calibri" pitchFamily="34" charset="0"/>
-                <a:ea typeface="Calibri" pitchFamily="34" charset="-122"/>
-                <a:cs typeface="Calibri" pitchFamily="34" charset="-120"/>
+                <a:cs typeface="Amiri" pitchFamily="2" charset="-78"/>
               </a:rPr>
               <a:t>Listen back, self-mark, the two models.</a:t>
             </a:r>
@@ -15864,9 +15581,8 @@
                 <a:solidFill>
                   <a:srgbClr val="8A6D1E"/>
                 </a:solidFill>
-                <a:latin typeface="Amiri" pitchFamily="34" charset="0"/>
-                <a:ea typeface="Amiri" pitchFamily="34" charset="-122"/>
-                <a:cs typeface="Amiri" pitchFamily="34" charset="-120"/>
+                <a:latin typeface="Amiri" pitchFamily="2" charset="-78"/>
+                <a:cs typeface="Amiri" pitchFamily="2" charset="-78"/>
               </a:rPr>
               <a:t>صَحِّحْ</a:t>
             </a:r>
@@ -15965,8 +15681,7 @@
                   <a:srgbClr val="FFFFFF"/>
                 </a:solidFill>
                 <a:latin typeface="Calibri" pitchFamily="34" charset="0"/>
-                <a:ea typeface="Calibri" pitchFamily="34" charset="-122"/>
-                <a:cs typeface="Calibri" pitchFamily="34" charset="-120"/>
+                <a:cs typeface="Amiri" pitchFamily="2" charset="-78"/>
               </a:rPr>
               <a:t>FEEDBACK</a:t>
             </a:r>
@@ -16004,8 +15719,7 @@
                   <a:srgbClr val="E8EDF5"/>
                 </a:solidFill>
                 <a:latin typeface="Calibri" pitchFamily="34" charset="0"/>
-                <a:ea typeface="Calibri" pitchFamily="34" charset="-122"/>
-                <a:cs typeface="Calibri" pitchFamily="34" charset="-120"/>
+                <a:cs typeface="Amiri" pitchFamily="2" charset="-78"/>
               </a:rPr>
               <a:t>6 min</a:t>
             </a:r>
@@ -16068,8 +15782,7 @@
                   <a:srgbClr val="1B3B6F"/>
                 </a:solidFill>
                 <a:latin typeface="Calibri" pitchFamily="34" charset="0"/>
-                <a:ea typeface="Calibri" pitchFamily="34" charset="-122"/>
-                <a:cs typeface="Calibri" pitchFamily="34" charset="-120"/>
+                <a:cs typeface="Amiri" pitchFamily="2" charset="-78"/>
               </a:rPr>
               <a:t>5</a:t>
             </a:r>
@@ -16107,8 +15820,7 @@
                   <a:srgbClr val="1F2A37"/>
                 </a:solidFill>
                 <a:latin typeface="Calibri" pitchFamily="34" charset="0"/>
-                <a:ea typeface="Calibri" pitchFamily="34" charset="-122"/>
-                <a:cs typeface="Calibri" pitchFamily="34" charset="-120"/>
+                <a:cs typeface="Amiri" pitchFamily="2" charset="-78"/>
               </a:rPr>
               <a:t>Scores, reflection, self-check.</a:t>
             </a:r>
@@ -16145,9 +15857,8 @@
                 <a:solidFill>
                   <a:srgbClr val="8A6D1E"/>
                 </a:solidFill>
-                <a:latin typeface="Amiri" pitchFamily="34" charset="0"/>
-                <a:ea typeface="Amiri" pitchFamily="34" charset="-122"/>
-                <a:cs typeface="Amiri" pitchFamily="34" charset="-120"/>
+                <a:latin typeface="Amiri" pitchFamily="2" charset="-78"/>
+                <a:cs typeface="Amiri" pitchFamily="2" charset="-78"/>
               </a:rPr>
               <a:t>قَيِّمْ</a:t>
             </a:r>
@@ -16246,8 +15957,7 @@
                   <a:srgbClr val="FFFFFF"/>
                 </a:solidFill>
                 <a:latin typeface="Calibri" pitchFamily="34" charset="0"/>
-                <a:ea typeface="Calibri" pitchFamily="34" charset="-122"/>
-                <a:cs typeface="Calibri" pitchFamily="34" charset="-120"/>
+                <a:cs typeface="Amiri" pitchFamily="2" charset="-78"/>
               </a:rPr>
               <a:t>PREPARATION</a:t>
             </a:r>
@@ -16285,8 +15995,7 @@
                   <a:srgbClr val="E8EDF5"/>
                 </a:solidFill>
                 <a:latin typeface="Calibri" pitchFamily="34" charset="0"/>
-                <a:ea typeface="Calibri" pitchFamily="34" charset="-122"/>
-                <a:cs typeface="Calibri" pitchFamily="34" charset="-120"/>
+                <a:cs typeface="Amiri" pitchFamily="2" charset="-78"/>
               </a:rPr>
               <a:t>2 min</a:t>
             </a:r>
@@ -16349,8 +16058,7 @@
                   <a:srgbClr val="1B3B6F"/>
                 </a:solidFill>
                 <a:latin typeface="Calibri" pitchFamily="34" charset="0"/>
-                <a:ea typeface="Calibri" pitchFamily="34" charset="-122"/>
-                <a:cs typeface="Calibri" pitchFamily="34" charset="-120"/>
+                <a:cs typeface="Amiri" pitchFamily="2" charset="-78"/>
               </a:rPr>
               <a:t>6</a:t>
             </a:r>
@@ -16388,8 +16096,7 @@
                   <a:srgbClr val="1F2A37"/>
                 </a:solidFill>
                 <a:latin typeface="Calibri" pitchFamily="34" charset="0"/>
-                <a:ea typeface="Calibri" pitchFamily="34" charset="-122"/>
-                <a:cs typeface="Calibri" pitchFamily="34" charset="-120"/>
+                <a:cs typeface="Amiri" pitchFamily="2" charset="-78"/>
               </a:rPr>
               <a:t>Bring all four mock scores.</a:t>
             </a:r>
@@ -16426,9 +16133,8 @@
                 <a:solidFill>
                   <a:srgbClr val="C45A3C"/>
                 </a:solidFill>
-                <a:latin typeface="Amiri" pitchFamily="34" charset="0"/>
-                <a:ea typeface="Amiri" pitchFamily="34" charset="-122"/>
-                <a:cs typeface="Amiri" pitchFamily="34" charset="-120"/>
+                <a:latin typeface="Amiri" pitchFamily="2" charset="-78"/>
+                <a:cs typeface="Amiri" pitchFamily="2" charset="-78"/>
               </a:rPr>
               <a:t>اِسْتَعِدَّ</a:t>
             </a:r>
@@ -16500,8 +16206,7 @@
                   <a:srgbClr val="1E6B52"/>
                 </a:solidFill>
                 <a:latin typeface="Calibri" pitchFamily="34" charset="0"/>
-                <a:ea typeface="Calibri" pitchFamily="34" charset="-122"/>
-                <a:cs typeface="Calibri" pitchFamily="34" charset="-120"/>
+                <a:cs typeface="Amiri" pitchFamily="2" charset="-78"/>
               </a:rPr>
               <a:t>IF ARABIC FEELS HARD TODAY</a:t>
             </a:r>
@@ -16539,8 +16244,7 @@
                   <a:srgbClr val="1F2A37"/>
                 </a:solidFill>
                 <a:latin typeface="Calibri" pitchFamily="34" charset="0"/>
-                <a:ea typeface="Calibri" pitchFamily="34" charset="-122"/>
-                <a:cs typeface="Calibri" pitchFamily="34" charset="-120"/>
+                <a:cs typeface="Amiri" pitchFamily="2" charset="-78"/>
               </a:rPr>
               <a:t>This is an exam-preparation lesson. Every task uses the real IGCSE format — Core students use the green boxes, frames and English support; nobody is expected to get everything right first time.</a:t>
             </a:r>
@@ -16578,8 +16282,7 @@
                   <a:srgbClr val="8A93A0"/>
                 </a:solidFill>
                 <a:latin typeface="Calibri" pitchFamily="34" charset="0"/>
-                <a:ea typeface="Calibri" pitchFamily="34" charset="-122"/>
-                <a:cs typeface="Calibri" pitchFamily="34" charset="-120"/>
+                <a:cs typeface="Amiri" pitchFamily="2" charset="-78"/>
               </a:rPr>
               <a:t>3 / 17</a:t>
             </a:r>
@@ -16673,9 +16376,8 @@
                 <a:solidFill>
                   <a:srgbClr val="D4AF37"/>
                 </a:solidFill>
-                <a:latin typeface="Amiri" pitchFamily="34" charset="0"/>
-                <a:ea typeface="Amiri" pitchFamily="34" charset="-122"/>
-                <a:cs typeface="Amiri" pitchFamily="34" charset="-120"/>
+                <a:latin typeface="Amiri" pitchFamily="2" charset="-78"/>
+                <a:cs typeface="Amiri" pitchFamily="2" charset="-78"/>
               </a:rPr>
               <a:t>م</a:t>
             </a:r>
@@ -16713,8 +16415,7 @@
                   <a:srgbClr val="1B3B6F"/>
                 </a:solidFill>
                 <a:latin typeface="Cambria" pitchFamily="34" charset="0"/>
-                <a:ea typeface="Cambria" pitchFamily="34" charset="-122"/>
-                <a:cs typeface="Cambria" pitchFamily="34" charset="-120"/>
+                <a:cs typeface="Amiri" pitchFamily="2" charset="-78"/>
               </a:rPr>
               <a:t>Al Madina Online School</a:t>
             </a:r>
@@ -16752,8 +16453,7 @@
                   <a:srgbClr val="8A6D1E"/>
                 </a:solidFill>
                 <a:latin typeface="Calibri" pitchFamily="34" charset="0"/>
-                <a:ea typeface="Calibri" pitchFamily="34" charset="-122"/>
-                <a:cs typeface="Calibri" pitchFamily="34" charset="-120"/>
+                <a:cs typeface="Amiri" pitchFamily="2" charset="-78"/>
               </a:rPr>
               <a:t>ARABIC DEPARTMENT · MIFTAH ARABIC · IGCSE 0544</a:t>
             </a:r>
@@ -16818,8 +16518,7 @@
                   <a:srgbClr val="FFFFFF"/>
                 </a:solidFill>
                 <a:latin typeface="Calibri" pitchFamily="34" charset="0"/>
-                <a:ea typeface="Calibri" pitchFamily="34" charset="-122"/>
-                <a:cs typeface="Calibri" pitchFamily="34" charset="-120"/>
+                <a:cs typeface="Amiri" pitchFamily="2" charset="-78"/>
               </a:rPr>
               <a:t>P6-L10 · IGCSE Bridge</a:t>
             </a:r>
@@ -16884,8 +16583,7 @@
                   <a:srgbClr val="FFFFFF"/>
                 </a:solidFill>
                 <a:latin typeface="Calibri" pitchFamily="34" charset="0"/>
-                <a:ea typeface="Calibri" pitchFamily="34" charset="-122"/>
-                <a:cs typeface="Calibri" pitchFamily="34" charset="-120"/>
+                <a:cs typeface="Amiri" pitchFamily="2" charset="-78"/>
               </a:rPr>
               <a:t>DO NOW · 5 MIN</a:t>
             </a:r>
@@ -16923,8 +16621,7 @@
                   <a:srgbClr val="0E7C86"/>
                 </a:solidFill>
                 <a:latin typeface="Calibri" pitchFamily="34" charset="0"/>
-                <a:ea typeface="Calibri" pitchFamily="34" charset="-122"/>
-                <a:cs typeface="Calibri" pitchFamily="34" charset="-120"/>
+                <a:cs typeface="Amiri" pitchFamily="2" charset="-78"/>
               </a:rPr>
               <a:t>DO NOW · ON YOUR OWN · 5 MINUTES</a:t>
             </a:r>
@@ -16962,8 +16659,7 @@
                   <a:srgbClr val="1B3B6F"/>
                 </a:solidFill>
                 <a:latin typeface="Cambria" pitchFamily="34" charset="0"/>
-                <a:ea typeface="Cambria" pitchFamily="34" charset="-122"/>
-                <a:cs typeface="Cambria" pitchFamily="34" charset="-120"/>
+                <a:cs typeface="Amiri" pitchFamily="2" charset="-78"/>
               </a:rPr>
               <a:t>Retrieval: what do you remember?</a:t>
             </a:r>
@@ -17000,9 +16696,8 @@
                 <a:solidFill>
                   <a:srgbClr val="8A6D1E"/>
                 </a:solidFill>
-                <a:latin typeface="Amiri" pitchFamily="34" charset="0"/>
-                <a:ea typeface="Amiri" pitchFamily="34" charset="-122"/>
-                <a:cs typeface="Amiri" pitchFamily="34" charset="-120"/>
+                <a:latin typeface="Amiri" pitchFamily="2" charset="-78"/>
+                <a:cs typeface="Amiri" pitchFamily="2" charset="-78"/>
               </a:rPr>
               <a:t>اِبْدَأِ الآنَ</a:t>
             </a:r>
@@ -17040,8 +16735,7 @@
                   <a:srgbClr val="8A93A0"/>
                 </a:solidFill>
                 <a:latin typeface="Calibri" pitchFamily="34" charset="0"/>
-                <a:ea typeface="Calibri" pitchFamily="34" charset="-122"/>
-                <a:cs typeface="Calibri" pitchFamily="34" charset="-120"/>
+                <a:cs typeface="Amiri" pitchFamily="2" charset="-78"/>
               </a:rPr>
               <a:t>Miftah Arabic · Progression P6 · IGCSE Bridge · P6-L10</a:t>
             </a:r>
@@ -17138,8 +16832,7 @@
                   <a:srgbClr val="FFFFFF"/>
                 </a:solidFill>
                 <a:latin typeface="Calibri" pitchFamily="34" charset="0"/>
-                <a:ea typeface="Calibri" pitchFamily="34" charset="-122"/>
-                <a:cs typeface="Calibri" pitchFamily="34" charset="-120"/>
+                <a:cs typeface="Amiri" pitchFamily="2" charset="-78"/>
               </a:rPr>
               <a:t>1</a:t>
             </a:r>
@@ -17177,8 +16870,7 @@
                   <a:srgbClr val="1B3B6F"/>
                 </a:solidFill>
                 <a:latin typeface="Calibri" pitchFamily="34" charset="0"/>
-                <a:ea typeface="Calibri" pitchFamily="34" charset="-122"/>
-                <a:cs typeface="Calibri" pitchFamily="34" charset="-120"/>
+                <a:cs typeface="Amiri" pitchFamily="2" charset="-78"/>
               </a:rPr>
               <a:t>What does </a:t>
             </a:r>
@@ -17190,9 +16882,8 @@
                 <a:solidFill>
                   <a:srgbClr val="1B3B6F"/>
                 </a:solidFill>
-                <a:latin typeface="Amiri" pitchFamily="34" charset="0"/>
-                <a:ea typeface="Amiri" pitchFamily="34" charset="-122"/>
-                <a:cs typeface="Amiri" pitchFamily="34" charset="-120"/>
+                <a:latin typeface="Amiri" pitchFamily="2" charset="-78"/>
+                <a:cs typeface="Amiri" pitchFamily="2" charset="-78"/>
               </a:rPr>
               <a:t>التَّوْسِيعُ فِي الإِجَابَةِ</a:t>
             </a:r>
@@ -17205,8 +16896,7 @@
                   <a:srgbClr val="1B3B6F"/>
                 </a:solidFill>
                 <a:latin typeface="Calibri" pitchFamily="34" charset="0"/>
-                <a:ea typeface="Calibri" pitchFamily="34" charset="-122"/>
-                <a:cs typeface="Calibri" pitchFamily="34" charset="-120"/>
+                <a:cs typeface="Amiri" pitchFamily="2" charset="-78"/>
               </a:rPr>
               <a:t> mean?</a:t>
             </a:r>
@@ -17269,8 +16959,7 @@
                   <a:srgbClr val="1B3B6F"/>
                 </a:solidFill>
                 <a:latin typeface="Calibri" pitchFamily="34" charset="0"/>
-                <a:ea typeface="Calibri" pitchFamily="34" charset="-122"/>
-                <a:cs typeface="Calibri" pitchFamily="34" charset="-120"/>
+                <a:cs typeface="Amiri" pitchFamily="2" charset="-78"/>
               </a:rPr>
               <a:t>A</a:t>
             </a:r>
@@ -17308,8 +16997,7 @@
                   <a:srgbClr val="1F2A37"/>
                 </a:solidFill>
                 <a:latin typeface="Calibri" pitchFamily="34" charset="0"/>
-                <a:ea typeface="Calibri" pitchFamily="34" charset="-122"/>
-                <a:cs typeface="Calibri" pitchFamily="34" charset="-120"/>
+                <a:cs typeface="Amiri" pitchFamily="2" charset="-78"/>
               </a:rPr>
               <a:t>a short answer</a:t>
             </a:r>
@@ -17372,8 +17060,7 @@
                   <a:srgbClr val="1B3B6F"/>
                 </a:solidFill>
                 <a:latin typeface="Calibri" pitchFamily="34" charset="0"/>
-                <a:ea typeface="Calibri" pitchFamily="34" charset="-122"/>
-                <a:cs typeface="Calibri" pitchFamily="34" charset="-120"/>
+                <a:cs typeface="Amiri" pitchFamily="2" charset="-78"/>
               </a:rPr>
               <a:t>B</a:t>
             </a:r>
@@ -17411,8 +17098,7 @@
                   <a:srgbClr val="1F2A37"/>
                 </a:solidFill>
                 <a:latin typeface="Calibri" pitchFamily="34" charset="0"/>
-                <a:ea typeface="Calibri" pitchFamily="34" charset="-122"/>
-                <a:cs typeface="Calibri" pitchFamily="34" charset="-120"/>
+                <a:cs typeface="Amiri" pitchFamily="2" charset="-78"/>
               </a:rPr>
               <a:t>extending the answer</a:t>
             </a:r>
@@ -17475,8 +17161,7 @@
                   <a:srgbClr val="1B3B6F"/>
                 </a:solidFill>
                 <a:latin typeface="Calibri" pitchFamily="34" charset="0"/>
-                <a:ea typeface="Calibri" pitchFamily="34" charset="-122"/>
-                <a:cs typeface="Calibri" pitchFamily="34" charset="-120"/>
+                <a:cs typeface="Amiri" pitchFamily="2" charset="-78"/>
               </a:rPr>
               <a:t>C</a:t>
             </a:r>
@@ -17514,8 +17199,7 @@
                   <a:srgbClr val="1F2A37"/>
                 </a:solidFill>
                 <a:latin typeface="Calibri" pitchFamily="34" charset="0"/>
-                <a:ea typeface="Calibri" pitchFamily="34" charset="-122"/>
-                <a:cs typeface="Calibri" pitchFamily="34" charset="-120"/>
+                <a:cs typeface="Amiri" pitchFamily="2" charset="-78"/>
               </a:rPr>
               <a:t>repeating the question</a:t>
             </a:r>
@@ -17612,8 +17296,7 @@
                   <a:srgbClr val="FFFFFF"/>
                 </a:solidFill>
                 <a:latin typeface="Calibri" pitchFamily="34" charset="0"/>
-                <a:ea typeface="Calibri" pitchFamily="34" charset="-122"/>
-                <a:cs typeface="Calibri" pitchFamily="34" charset="-120"/>
+                <a:cs typeface="Amiri" pitchFamily="2" charset="-78"/>
               </a:rPr>
               <a:t>2</a:t>
             </a:r>
@@ -17651,8 +17334,7 @@
                   <a:srgbClr val="1B3B6F"/>
                 </a:solidFill>
                 <a:latin typeface="Calibri" pitchFamily="34" charset="0"/>
-                <a:ea typeface="Calibri" pitchFamily="34" charset="-122"/>
-                <a:cs typeface="Calibri" pitchFamily="34" charset="-120"/>
+                <a:cs typeface="Amiri" pitchFamily="2" charset="-78"/>
               </a:rPr>
               <a:t>What does </a:t>
             </a:r>
@@ -17664,9 +17346,8 @@
                 <a:solidFill>
                   <a:srgbClr val="1B3B6F"/>
                 </a:solidFill>
-                <a:latin typeface="Amiri" pitchFamily="34" charset="0"/>
-                <a:ea typeface="Amiri" pitchFamily="34" charset="-122"/>
-                <a:cs typeface="Amiri" pitchFamily="34" charset="-120"/>
+                <a:latin typeface="Amiri" pitchFamily="2" charset="-78"/>
+                <a:cs typeface="Amiri" pitchFamily="2" charset="-78"/>
               </a:rPr>
               <a:t>لُغَةُ التَّوَقُّفِ وَالتَّفْكِيرِ</a:t>
             </a:r>
@@ -17679,8 +17360,7 @@
                   <a:srgbClr val="1B3B6F"/>
                 </a:solidFill>
                 <a:latin typeface="Calibri" pitchFamily="34" charset="0"/>
-                <a:ea typeface="Calibri" pitchFamily="34" charset="-122"/>
-                <a:cs typeface="Calibri" pitchFamily="34" charset="-120"/>
+                <a:cs typeface="Amiri" pitchFamily="2" charset="-78"/>
               </a:rPr>
               <a:t> mean?</a:t>
             </a:r>
@@ -17743,8 +17423,7 @@
                   <a:srgbClr val="1B3B6F"/>
                 </a:solidFill>
                 <a:latin typeface="Calibri" pitchFamily="34" charset="0"/>
-                <a:ea typeface="Calibri" pitchFamily="34" charset="-122"/>
-                <a:cs typeface="Calibri" pitchFamily="34" charset="-120"/>
+                <a:cs typeface="Amiri" pitchFamily="2" charset="-78"/>
               </a:rPr>
               <a:t>A</a:t>
             </a:r>
@@ -17782,8 +17461,7 @@
                   <a:srgbClr val="1F2A37"/>
                 </a:solidFill>
                 <a:latin typeface="Calibri" pitchFamily="34" charset="0"/>
-                <a:ea typeface="Calibri" pitchFamily="34" charset="-122"/>
-                <a:cs typeface="Calibri" pitchFamily="34" charset="-120"/>
+                <a:cs typeface="Amiri" pitchFamily="2" charset="-78"/>
               </a:rPr>
               <a:t>pause-and-think language</a:t>
             </a:r>
@@ -17846,8 +17524,7 @@
                   <a:srgbClr val="1B3B6F"/>
                 </a:solidFill>
                 <a:latin typeface="Calibri" pitchFamily="34" charset="0"/>
-                <a:ea typeface="Calibri" pitchFamily="34" charset="-122"/>
-                <a:cs typeface="Calibri" pitchFamily="34" charset="-120"/>
+                <a:cs typeface="Amiri" pitchFamily="2" charset="-78"/>
               </a:rPr>
               <a:t>B</a:t>
             </a:r>
@@ -17885,8 +17562,7 @@
                   <a:srgbClr val="1F2A37"/>
                 </a:solidFill>
                 <a:latin typeface="Calibri" pitchFamily="34" charset="0"/>
-                <a:ea typeface="Calibri" pitchFamily="34" charset="-122"/>
-                <a:cs typeface="Calibri" pitchFamily="34" charset="-120"/>
+                <a:cs typeface="Amiri" pitchFamily="2" charset="-78"/>
               </a:rPr>
               <a:t>silent reading</a:t>
             </a:r>
@@ -17949,8 +17625,7 @@
                   <a:srgbClr val="1B3B6F"/>
                 </a:solidFill>
                 <a:latin typeface="Calibri" pitchFamily="34" charset="0"/>
-                <a:ea typeface="Calibri" pitchFamily="34" charset="-122"/>
-                <a:cs typeface="Calibri" pitchFamily="34" charset="-120"/>
+                <a:cs typeface="Amiri" pitchFamily="2" charset="-78"/>
               </a:rPr>
               <a:t>C</a:t>
             </a:r>
@@ -17988,8 +17663,7 @@
                   <a:srgbClr val="1F2A37"/>
                 </a:solidFill>
                 <a:latin typeface="Calibri" pitchFamily="34" charset="0"/>
-                <a:ea typeface="Calibri" pitchFamily="34" charset="-122"/>
-                <a:cs typeface="Calibri" pitchFamily="34" charset="-120"/>
+                <a:cs typeface="Amiri" pitchFamily="2" charset="-78"/>
               </a:rPr>
               <a:t>stopping the exam</a:t>
             </a:r>
@@ -18086,8 +17760,7 @@
                   <a:srgbClr val="FFFFFF"/>
                 </a:solidFill>
                 <a:latin typeface="Calibri" pitchFamily="34" charset="0"/>
-                <a:ea typeface="Calibri" pitchFamily="34" charset="-122"/>
-                <a:cs typeface="Calibri" pitchFamily="34" charset="-120"/>
+                <a:cs typeface="Amiri" pitchFamily="2" charset="-78"/>
               </a:rPr>
               <a:t>3</a:t>
             </a:r>
@@ -18125,8 +17798,7 @@
                   <a:srgbClr val="1B3B6F"/>
                 </a:solidFill>
                 <a:latin typeface="Calibri" pitchFamily="34" charset="0"/>
-                <a:ea typeface="Calibri" pitchFamily="34" charset="-122"/>
-                <a:cs typeface="Calibri" pitchFamily="34" charset="-120"/>
+                <a:cs typeface="Amiri" pitchFamily="2" charset="-78"/>
               </a:rPr>
               <a:t>What does </a:t>
             </a:r>
@@ -18138,9 +17810,8 @@
                 <a:solidFill>
                   <a:srgbClr val="1B3B6F"/>
                 </a:solidFill>
-                <a:latin typeface="Amiri" pitchFamily="34" charset="0"/>
-                <a:ea typeface="Amiri" pitchFamily="34" charset="-122"/>
-                <a:cs typeface="Amiri" pitchFamily="34" charset="-120"/>
+                <a:latin typeface="Amiri" pitchFamily="2" charset="-78"/>
+                <a:cs typeface="Amiri" pitchFamily="2" charset="-78"/>
               </a:rPr>
               <a:t>التَّحَدُّثُ بِثِقَةٍ</a:t>
             </a:r>
@@ -18153,8 +17824,7 @@
                   <a:srgbClr val="1B3B6F"/>
                 </a:solidFill>
                 <a:latin typeface="Calibri" pitchFamily="34" charset="0"/>
-                <a:ea typeface="Calibri" pitchFamily="34" charset="-122"/>
-                <a:cs typeface="Calibri" pitchFamily="34" charset="-120"/>
+                <a:cs typeface="Amiri" pitchFamily="2" charset="-78"/>
               </a:rPr>
               <a:t> mean?</a:t>
             </a:r>
@@ -18217,8 +17887,7 @@
                   <a:srgbClr val="1B3B6F"/>
                 </a:solidFill>
                 <a:latin typeface="Calibri" pitchFamily="34" charset="0"/>
-                <a:ea typeface="Calibri" pitchFamily="34" charset="-122"/>
-                <a:cs typeface="Calibri" pitchFamily="34" charset="-120"/>
+                <a:cs typeface="Amiri" pitchFamily="2" charset="-78"/>
               </a:rPr>
               <a:t>A</a:t>
             </a:r>
@@ -18256,8 +17925,7 @@
                   <a:srgbClr val="1F2A37"/>
                 </a:solidFill>
                 <a:latin typeface="Calibri" pitchFamily="34" charset="0"/>
-                <a:ea typeface="Calibri" pitchFamily="34" charset="-122"/>
-                <a:cs typeface="Calibri" pitchFamily="34" charset="-120"/>
+                <a:cs typeface="Amiri" pitchFamily="2" charset="-78"/>
               </a:rPr>
               <a:t>speaking quickly</a:t>
             </a:r>
@@ -18320,8 +17988,7 @@
                   <a:srgbClr val="1B3B6F"/>
                 </a:solidFill>
                 <a:latin typeface="Calibri" pitchFamily="34" charset="0"/>
-                <a:ea typeface="Calibri" pitchFamily="34" charset="-122"/>
-                <a:cs typeface="Calibri" pitchFamily="34" charset="-120"/>
+                <a:cs typeface="Amiri" pitchFamily="2" charset="-78"/>
               </a:rPr>
               <a:t>B</a:t>
             </a:r>
@@ -18359,8 +18026,7 @@
                   <a:srgbClr val="1F2A37"/>
                 </a:solidFill>
                 <a:latin typeface="Calibri" pitchFamily="34" charset="0"/>
-                <a:ea typeface="Calibri" pitchFamily="34" charset="-122"/>
-                <a:cs typeface="Calibri" pitchFamily="34" charset="-120"/>
+                <a:cs typeface="Amiri" pitchFamily="2" charset="-78"/>
               </a:rPr>
               <a:t>speaking quietly</a:t>
             </a:r>
@@ -18423,8 +18089,7 @@
                   <a:srgbClr val="1B3B6F"/>
                 </a:solidFill>
                 <a:latin typeface="Calibri" pitchFamily="34" charset="0"/>
-                <a:ea typeface="Calibri" pitchFamily="34" charset="-122"/>
-                <a:cs typeface="Calibri" pitchFamily="34" charset="-120"/>
+                <a:cs typeface="Amiri" pitchFamily="2" charset="-78"/>
               </a:rPr>
               <a:t>C</a:t>
             </a:r>
@@ -18462,8 +18127,7 @@
                   <a:srgbClr val="1F2A37"/>
                 </a:solidFill>
                 <a:latin typeface="Calibri" pitchFamily="34" charset="0"/>
-                <a:ea typeface="Calibri" pitchFamily="34" charset="-122"/>
-                <a:cs typeface="Calibri" pitchFamily="34" charset="-120"/>
+                <a:cs typeface="Amiri" pitchFamily="2" charset="-78"/>
               </a:rPr>
               <a:t>speaking with confidence</a:t>
             </a:r>
@@ -18560,8 +18224,7 @@
                   <a:srgbClr val="FFFFFF"/>
                 </a:solidFill>
                 <a:latin typeface="Calibri" pitchFamily="34" charset="0"/>
-                <a:ea typeface="Calibri" pitchFamily="34" charset="-122"/>
-                <a:cs typeface="Calibri" pitchFamily="34" charset="-120"/>
+                <a:cs typeface="Amiri" pitchFamily="2" charset="-78"/>
               </a:rPr>
               <a:t>4</a:t>
             </a:r>
@@ -18599,8 +18262,7 @@
                   <a:srgbClr val="1B3B6F"/>
                 </a:solidFill>
                 <a:latin typeface="Calibri" pitchFamily="34" charset="0"/>
-                <a:ea typeface="Calibri" pitchFamily="34" charset="-122"/>
-                <a:cs typeface="Calibri" pitchFamily="34" charset="-120"/>
+                <a:cs typeface="Amiri" pitchFamily="2" charset="-78"/>
               </a:rPr>
               <a:t>In the role play, one prompt is worth …</a:t>
             </a:r>
@@ -18663,8 +18325,7 @@
                   <a:srgbClr val="1B3B6F"/>
                 </a:solidFill>
                 <a:latin typeface="Calibri" pitchFamily="34" charset="0"/>
-                <a:ea typeface="Calibri" pitchFamily="34" charset="-122"/>
-                <a:cs typeface="Calibri" pitchFamily="34" charset="-120"/>
+                <a:cs typeface="Amiri" pitchFamily="2" charset="-78"/>
               </a:rPr>
               <a:t>A</a:t>
             </a:r>
@@ -18702,8 +18363,7 @@
                   <a:srgbClr val="1F2A37"/>
                 </a:solidFill>
                 <a:latin typeface="Calibri" pitchFamily="34" charset="0"/>
-                <a:ea typeface="Calibri" pitchFamily="34" charset="-122"/>
-                <a:cs typeface="Calibri" pitchFamily="34" charset="-120"/>
+                <a:cs typeface="Amiri" pitchFamily="2" charset="-78"/>
               </a:rPr>
               <a:t>five marks</a:t>
             </a:r>
@@ -18766,8 +18426,7 @@
                   <a:srgbClr val="1B3B6F"/>
                 </a:solidFill>
                 <a:latin typeface="Calibri" pitchFamily="34" charset="0"/>
-                <a:ea typeface="Calibri" pitchFamily="34" charset="-122"/>
-                <a:cs typeface="Calibri" pitchFamily="34" charset="-120"/>
+                <a:cs typeface="Amiri" pitchFamily="2" charset="-78"/>
               </a:rPr>
               <a:t>B</a:t>
             </a:r>
@@ -18805,8 +18464,7 @@
                   <a:srgbClr val="1F2A37"/>
                 </a:solidFill>
                 <a:latin typeface="Calibri" pitchFamily="34" charset="0"/>
-                <a:ea typeface="Calibri" pitchFamily="34" charset="-122"/>
-                <a:cs typeface="Calibri" pitchFamily="34" charset="-120"/>
+                <a:cs typeface="Amiri" pitchFamily="2" charset="-78"/>
               </a:rPr>
               <a:t>nothing unless it is perfect</a:t>
             </a:r>
@@ -18869,8 +18527,7 @@
                   <a:srgbClr val="1B3B6F"/>
                 </a:solidFill>
                 <a:latin typeface="Calibri" pitchFamily="34" charset="0"/>
-                <a:ea typeface="Calibri" pitchFamily="34" charset="-122"/>
-                <a:cs typeface="Calibri" pitchFamily="34" charset="-120"/>
+                <a:cs typeface="Amiri" pitchFamily="2" charset="-78"/>
               </a:rPr>
               <a:t>C</a:t>
             </a:r>
@@ -18908,8 +18565,7 @@
                   <a:srgbClr val="1F2A37"/>
                 </a:solidFill>
                 <a:latin typeface="Calibri" pitchFamily="34" charset="0"/>
-                <a:ea typeface="Calibri" pitchFamily="34" charset="-122"/>
-                <a:cs typeface="Calibri" pitchFamily="34" charset="-120"/>
+                <a:cs typeface="Amiri" pitchFamily="2" charset="-78"/>
               </a:rPr>
               <a:t>one Communication mark</a:t>
             </a:r>
@@ -19006,8 +18662,7 @@
                   <a:srgbClr val="FFFFFF"/>
                 </a:solidFill>
                 <a:latin typeface="Calibri" pitchFamily="34" charset="0"/>
-                <a:ea typeface="Calibri" pitchFamily="34" charset="-122"/>
-                <a:cs typeface="Calibri" pitchFamily="34" charset="-120"/>
+                <a:cs typeface="Amiri" pitchFamily="2" charset="-78"/>
               </a:rPr>
               <a:t>5</a:t>
             </a:r>
@@ -19045,8 +18700,7 @@
                   <a:srgbClr val="1B3B6F"/>
                 </a:solidFill>
                 <a:latin typeface="Calibri" pitchFamily="34" charset="0"/>
-                <a:ea typeface="Calibri" pitchFamily="34" charset="-122"/>
-                <a:cs typeface="Calibri" pitchFamily="34" charset="-120"/>
+                <a:cs typeface="Amiri" pitchFamily="2" charset="-78"/>
               </a:rPr>
               <a:t>Which answer reaches Band 5 in the conversation?</a:t>
             </a:r>
@@ -19109,8 +18763,7 @@
                   <a:srgbClr val="1B3B6F"/>
                 </a:solidFill>
                 <a:latin typeface="Calibri" pitchFamily="34" charset="0"/>
-                <a:ea typeface="Calibri" pitchFamily="34" charset="-122"/>
-                <a:cs typeface="Calibri" pitchFamily="34" charset="-120"/>
+                <a:cs typeface="Amiri" pitchFamily="2" charset="-78"/>
               </a:rPr>
               <a:t>A</a:t>
             </a:r>
@@ -19148,8 +18801,7 @@
                   <a:srgbClr val="1F2A37"/>
                 </a:solidFill>
                 <a:latin typeface="Calibri" pitchFamily="34" charset="0"/>
-                <a:ea typeface="Calibri" pitchFamily="34" charset="-122"/>
-                <a:cs typeface="Calibri" pitchFamily="34" charset="-120"/>
+                <a:cs typeface="Amiri" pitchFamily="2" charset="-78"/>
               </a:rPr>
               <a:t>opinion + reason + example + a conditional</a:t>
             </a:r>
@@ -19212,8 +18864,7 @@
                   <a:srgbClr val="1B3B6F"/>
                 </a:solidFill>
                 <a:latin typeface="Calibri" pitchFamily="34" charset="0"/>
-                <a:ea typeface="Calibri" pitchFamily="34" charset="-122"/>
-                <a:cs typeface="Calibri" pitchFamily="34" charset="-120"/>
+                <a:cs typeface="Amiri" pitchFamily="2" charset="-78"/>
               </a:rPr>
               <a:t>B</a:t>
             </a:r>
@@ -19251,8 +18902,7 @@
                   <a:srgbClr val="1F2A37"/>
                 </a:solidFill>
                 <a:latin typeface="Calibri" pitchFamily="34" charset="0"/>
-                <a:ea typeface="Calibri" pitchFamily="34" charset="-122"/>
-                <a:cs typeface="Calibri" pitchFamily="34" charset="-120"/>
+                <a:cs typeface="Amiri" pitchFamily="2" charset="-78"/>
               </a:rPr>
               <a:t>one correct sentence</a:t>
             </a:r>
@@ -19315,8 +18965,7 @@
                   <a:srgbClr val="1B3B6F"/>
                 </a:solidFill>
                 <a:latin typeface="Calibri" pitchFamily="34" charset="0"/>
-                <a:ea typeface="Calibri" pitchFamily="34" charset="-122"/>
-                <a:cs typeface="Calibri" pitchFamily="34" charset="-120"/>
+                <a:cs typeface="Amiri" pitchFamily="2" charset="-78"/>
               </a:rPr>
               <a:t>C</a:t>
             </a:r>
@@ -19354,8 +19003,7 @@
                   <a:srgbClr val="1F2A37"/>
                 </a:solidFill>
                 <a:latin typeface="Calibri" pitchFamily="34" charset="0"/>
-                <a:ea typeface="Calibri" pitchFamily="34" charset="-122"/>
-                <a:cs typeface="Calibri" pitchFamily="34" charset="-120"/>
+                <a:cs typeface="Amiri" pitchFamily="2" charset="-78"/>
               </a:rPr>
               <a:t>a list of words</a:t>
             </a:r>
@@ -19427,8 +19075,7 @@
                   <a:srgbClr val="0E7C86"/>
                 </a:solidFill>
                 <a:latin typeface="Calibri" pitchFamily="34" charset="0"/>
-                <a:ea typeface="Calibri" pitchFamily="34" charset="-122"/>
-                <a:cs typeface="Calibri" pitchFamily="34" charset="-120"/>
+                <a:cs typeface="Amiri" pitchFamily="2" charset="-78"/>
               </a:rPr>
               <a:t>HOW TO ANSWER</a:t>
             </a:r>
@@ -19466,8 +19113,7 @@
                   <a:srgbClr val="1F2A37"/>
                 </a:solidFill>
                 <a:latin typeface="Calibri" pitchFamily="34" charset="0"/>
-                <a:ea typeface="Calibri" pitchFamily="34" charset="-122"/>
-                <a:cs typeface="Calibri" pitchFamily="34" charset="-120"/>
+                <a:cs typeface="Amiri" pitchFamily="2" charset="-78"/>
               </a:rPr>
               <a:t>Work on your own in silence.</a:t>
             </a:r>
@@ -19483,8 +19129,7 @@
                   <a:srgbClr val="1F2A37"/>
                 </a:solidFill>
                 <a:latin typeface="Calibri" pitchFamily="34" charset="0"/>
-                <a:ea typeface="Calibri" pitchFamily="34" charset="-122"/>
-                <a:cs typeface="Calibri" pitchFamily="34" charset="-120"/>
+                <a:cs typeface="Amiri" pitchFamily="2" charset="-78"/>
               </a:rPr>
               <a:t>When the timer ends, type in the chat:</a:t>
             </a:r>
@@ -19522,8 +19167,7 @@
                   <a:srgbClr val="1B3B6F"/>
                 </a:solidFill>
                 <a:latin typeface="Consolas" pitchFamily="34" charset="0"/>
-                <a:ea typeface="Consolas" pitchFamily="34" charset="-122"/>
-                <a:cs typeface="Consolas" pitchFamily="34" charset="-120"/>
+                <a:cs typeface="Amiri" pitchFamily="2" charset="-78"/>
               </a:rPr>
               <a:t>1_  2_  3_  4_  5_</a:t>
             </a:r>
@@ -19561,8 +19205,7 @@
                   <a:srgbClr val="0E7C86"/>
                 </a:solidFill>
                 <a:latin typeface="Calibri" pitchFamily="34" charset="0"/>
-                <a:ea typeface="Calibri" pitchFamily="34" charset="-122"/>
-                <a:cs typeface="Calibri" pitchFamily="34" charset="-120"/>
+                <a:cs typeface="Amiri" pitchFamily="2" charset="-78"/>
               </a:rPr>
               <a:t>⏱  5 : 00</a:t>
             </a:r>
@@ -19600,8 +19243,7 @@
                   <a:srgbClr val="8A93A0"/>
                 </a:solidFill>
                 <a:latin typeface="Calibri" pitchFamily="34" charset="0"/>
-                <a:ea typeface="Calibri" pitchFamily="34" charset="-122"/>
-                <a:cs typeface="Calibri" pitchFamily="34" charset="-120"/>
+                <a:cs typeface="Amiri" pitchFamily="2" charset="-78"/>
               </a:rPr>
               <a:t>4 / 17</a:t>
             </a:r>
@@ -19695,9 +19337,8 @@
                 <a:solidFill>
                   <a:srgbClr val="D4AF37"/>
                 </a:solidFill>
-                <a:latin typeface="Amiri" pitchFamily="34" charset="0"/>
-                <a:ea typeface="Amiri" pitchFamily="34" charset="-122"/>
-                <a:cs typeface="Amiri" pitchFamily="34" charset="-120"/>
+                <a:latin typeface="Amiri" pitchFamily="2" charset="-78"/>
+                <a:cs typeface="Amiri" pitchFamily="2" charset="-78"/>
               </a:rPr>
               <a:t>م</a:t>
             </a:r>
@@ -19735,8 +19376,7 @@
                   <a:srgbClr val="1B3B6F"/>
                 </a:solidFill>
                 <a:latin typeface="Cambria" pitchFamily="34" charset="0"/>
-                <a:ea typeface="Cambria" pitchFamily="34" charset="-122"/>
-                <a:cs typeface="Cambria" pitchFamily="34" charset="-120"/>
+                <a:cs typeface="Amiri" pitchFamily="2" charset="-78"/>
               </a:rPr>
               <a:t>Al Madina Online School</a:t>
             </a:r>
@@ -19774,8 +19414,7 @@
                   <a:srgbClr val="8A6D1E"/>
                 </a:solidFill>
                 <a:latin typeface="Calibri" pitchFamily="34" charset="0"/>
-                <a:ea typeface="Calibri" pitchFamily="34" charset="-122"/>
-                <a:cs typeface="Calibri" pitchFamily="34" charset="-120"/>
+                <a:cs typeface="Amiri" pitchFamily="2" charset="-78"/>
               </a:rPr>
               <a:t>ARABIC DEPARTMENT · MIFTAH ARABIC · IGCSE 0544</a:t>
             </a:r>
@@ -19840,8 +19479,7 @@
                   <a:srgbClr val="FFFFFF"/>
                 </a:solidFill>
                 <a:latin typeface="Calibri" pitchFamily="34" charset="0"/>
-                <a:ea typeface="Calibri" pitchFamily="34" charset="-122"/>
-                <a:cs typeface="Calibri" pitchFamily="34" charset="-120"/>
+                <a:cs typeface="Amiri" pitchFamily="2" charset="-78"/>
               </a:rPr>
               <a:t>P6-L10 · IGCSE Bridge</a:t>
             </a:r>
@@ -19906,8 +19544,7 @@
                   <a:srgbClr val="FFFFFF"/>
                 </a:solidFill>
                 <a:latin typeface="Calibri" pitchFamily="34" charset="0"/>
-                <a:ea typeface="Calibri" pitchFamily="34" charset="-122"/>
-                <a:cs typeface="Calibri" pitchFamily="34" charset="-120"/>
+                <a:cs typeface="Amiri" pitchFamily="2" charset="-78"/>
               </a:rPr>
               <a:t>DO NOW · 2 MIN</a:t>
             </a:r>
@@ -19945,8 +19582,7 @@
                   <a:srgbClr val="0E7C86"/>
                 </a:solidFill>
                 <a:latin typeface="Calibri" pitchFamily="34" charset="0"/>
-                <a:ea typeface="Calibri" pitchFamily="34" charset="-122"/>
-                <a:cs typeface="Calibri" pitchFamily="34" charset="-120"/>
+                <a:cs typeface="Amiri" pitchFamily="2" charset="-78"/>
               </a:rPr>
               <a:t>DO NOW · ANSWERS AND REASONS</a:t>
             </a:r>
@@ -19984,8 +19620,7 @@
                   <a:srgbClr val="1B3B6F"/>
                 </a:solidFill>
                 <a:latin typeface="Cambria" pitchFamily="34" charset="0"/>
-                <a:ea typeface="Cambria" pitchFamily="34" charset="-122"/>
-                <a:cs typeface="Cambria" pitchFamily="34" charset="-120"/>
+                <a:cs typeface="Amiri" pitchFamily="2" charset="-78"/>
               </a:rPr>
               <a:t>Let’s check — and explain why</a:t>
             </a:r>
@@ -20022,9 +19657,8 @@
                 <a:solidFill>
                   <a:srgbClr val="8A6D1E"/>
                 </a:solidFill>
-                <a:latin typeface="Amiri" pitchFamily="34" charset="0"/>
-                <a:ea typeface="Amiri" pitchFamily="34" charset="-122"/>
-                <a:cs typeface="Amiri" pitchFamily="34" charset="-120"/>
+                <a:latin typeface="Amiri" pitchFamily="2" charset="-78"/>
+                <a:cs typeface="Amiri" pitchFamily="2" charset="-78"/>
               </a:rPr>
               <a:t>الإِجَابَاتُ وَالتَّعْلِيلُ</a:t>
             </a:r>
@@ -20062,8 +19696,7 @@
                   <a:srgbClr val="8A93A0"/>
                 </a:solidFill>
                 <a:latin typeface="Calibri" pitchFamily="34" charset="0"/>
-                <a:ea typeface="Calibri" pitchFamily="34" charset="-122"/>
-                <a:cs typeface="Calibri" pitchFamily="34" charset="-120"/>
+                <a:cs typeface="Amiri" pitchFamily="2" charset="-78"/>
               </a:rPr>
               <a:t>Miftah Arabic · Progression P6 · IGCSE Bridge · P6-L10</a:t>
             </a:r>
@@ -20160,8 +19793,7 @@
                   <a:srgbClr val="FFFFFF"/>
                 </a:solidFill>
                 <a:latin typeface="Calibri" pitchFamily="34" charset="0"/>
-                <a:ea typeface="Calibri" pitchFamily="34" charset="-122"/>
-                <a:cs typeface="Calibri" pitchFamily="34" charset="-120"/>
+                <a:cs typeface="Amiri" pitchFamily="2" charset="-78"/>
               </a:rPr>
               <a:t>1</a:t>
             </a:r>
@@ -20199,8 +19831,7 @@
                   <a:srgbClr val="1B3B6F"/>
                 </a:solidFill>
                 <a:latin typeface="Calibri" pitchFamily="34" charset="0"/>
-                <a:ea typeface="Calibri" pitchFamily="34" charset="-122"/>
-                <a:cs typeface="Calibri" pitchFamily="34" charset="-120"/>
+                <a:cs typeface="Amiri" pitchFamily="2" charset="-78"/>
               </a:rPr>
               <a:t>What does </a:t>
             </a:r>
@@ -20212,9 +19843,8 @@
                 <a:solidFill>
                   <a:srgbClr val="1B3B6F"/>
                 </a:solidFill>
-                <a:latin typeface="Amiri" pitchFamily="34" charset="0"/>
-                <a:ea typeface="Amiri" pitchFamily="34" charset="-122"/>
-                <a:cs typeface="Amiri" pitchFamily="34" charset="-120"/>
+                <a:latin typeface="Amiri" pitchFamily="2" charset="-78"/>
+                <a:cs typeface="Amiri" pitchFamily="2" charset="-78"/>
               </a:rPr>
               <a:t>التَّوْسِيعُ فِي الإِجَابَةِ</a:t>
             </a:r>
@@ -20227,8 +19857,7 @@
                   <a:srgbClr val="1B3B6F"/>
                 </a:solidFill>
                 <a:latin typeface="Calibri" pitchFamily="34" charset="0"/>
-                <a:ea typeface="Calibri" pitchFamily="34" charset="-122"/>
-                <a:cs typeface="Calibri" pitchFamily="34" charset="-120"/>
+                <a:cs typeface="Amiri" pitchFamily="2" charset="-78"/>
               </a:rPr>
               <a:t> mean?</a:t>
             </a:r>
@@ -20291,8 +19920,7 @@
                   <a:srgbClr val="1B3B6F"/>
                 </a:solidFill>
                 <a:latin typeface="Calibri" pitchFamily="34" charset="0"/>
-                <a:ea typeface="Calibri" pitchFamily="34" charset="-122"/>
-                <a:cs typeface="Calibri" pitchFamily="34" charset="-120"/>
+                <a:cs typeface="Amiri" pitchFamily="2" charset="-78"/>
               </a:rPr>
               <a:t>A</a:t>
             </a:r>
@@ -20330,8 +19958,7 @@
                   <a:srgbClr val="9AA1AB"/>
                 </a:solidFill>
                 <a:latin typeface="Calibri" pitchFamily="34" charset="0"/>
-                <a:ea typeface="Calibri" pitchFamily="34" charset="-122"/>
-                <a:cs typeface="Calibri" pitchFamily="34" charset="-120"/>
+                <a:cs typeface="Amiri" pitchFamily="2" charset="-78"/>
               </a:rPr>
               <a:t>a short answer</a:t>
             </a:r>
@@ -20421,8 +20048,7 @@
                   <a:srgbClr val="FFFFFF"/>
                 </a:solidFill>
                 <a:latin typeface="Calibri" pitchFamily="34" charset="0"/>
-                <a:ea typeface="Calibri" pitchFamily="34" charset="-122"/>
-                <a:cs typeface="Calibri" pitchFamily="34" charset="-120"/>
+                <a:cs typeface="Amiri" pitchFamily="2" charset="-78"/>
               </a:rPr>
               <a:t>B</a:t>
             </a:r>
@@ -20460,8 +20086,7 @@
                   <a:srgbClr val="1F2A37"/>
                 </a:solidFill>
                 <a:latin typeface="Calibri" pitchFamily="34" charset="0"/>
-                <a:ea typeface="Calibri" pitchFamily="34" charset="-122"/>
-                <a:cs typeface="Calibri" pitchFamily="34" charset="-120"/>
+                <a:cs typeface="Amiri" pitchFamily="2" charset="-78"/>
               </a:rPr>
               <a:t>extending the answer</a:t>
             </a:r>
@@ -20524,8 +20149,7 @@
                   <a:srgbClr val="1B3B6F"/>
                 </a:solidFill>
                 <a:latin typeface="Calibri" pitchFamily="34" charset="0"/>
-                <a:ea typeface="Calibri" pitchFamily="34" charset="-122"/>
-                <a:cs typeface="Calibri" pitchFamily="34" charset="-120"/>
+                <a:cs typeface="Amiri" pitchFamily="2" charset="-78"/>
               </a:rPr>
               <a:t>C</a:t>
             </a:r>
@@ -20563,8 +20187,7 @@
                   <a:srgbClr val="9AA1AB"/>
                 </a:solidFill>
                 <a:latin typeface="Calibri" pitchFamily="34" charset="0"/>
-                <a:ea typeface="Calibri" pitchFamily="34" charset="-122"/>
-                <a:cs typeface="Calibri" pitchFamily="34" charset="-120"/>
+                <a:cs typeface="Amiri" pitchFamily="2" charset="-78"/>
               </a:rPr>
               <a:t>repeating the question</a:t>
             </a:r>
@@ -20602,8 +20225,7 @@
                   <a:srgbClr val="8A6D1E"/>
                 </a:solidFill>
                 <a:latin typeface="Calibri" pitchFamily="34" charset="0"/>
-                <a:ea typeface="Calibri" pitchFamily="34" charset="-122"/>
-                <a:cs typeface="Calibri" pitchFamily="34" charset="-120"/>
+                <a:cs typeface="Amiri" pitchFamily="2" charset="-78"/>
               </a:rPr>
               <a:t>Prepared at home (P6-L09, from P6-L07).</a:t>
             </a:r>
@@ -20700,8 +20322,7 @@
                   <a:srgbClr val="FFFFFF"/>
                 </a:solidFill>
                 <a:latin typeface="Calibri" pitchFamily="34" charset="0"/>
-                <a:ea typeface="Calibri" pitchFamily="34" charset="-122"/>
-                <a:cs typeface="Calibri" pitchFamily="34" charset="-120"/>
+                <a:cs typeface="Amiri" pitchFamily="2" charset="-78"/>
               </a:rPr>
               <a:t>2</a:t>
             </a:r>
@@ -20739,8 +20360,7 @@
                   <a:srgbClr val="1B3B6F"/>
                 </a:solidFill>
                 <a:latin typeface="Calibri" pitchFamily="34" charset="0"/>
-                <a:ea typeface="Calibri" pitchFamily="34" charset="-122"/>
-                <a:cs typeface="Calibri" pitchFamily="34" charset="-120"/>
+                <a:cs typeface="Amiri" pitchFamily="2" charset="-78"/>
               </a:rPr>
               <a:t>What does </a:t>
             </a:r>
@@ -20752,9 +20372,8 @@
                 <a:solidFill>
                   <a:srgbClr val="1B3B6F"/>
                 </a:solidFill>
-                <a:latin typeface="Amiri" pitchFamily="34" charset="0"/>
-                <a:ea typeface="Amiri" pitchFamily="34" charset="-122"/>
-                <a:cs typeface="Amiri" pitchFamily="34" charset="-120"/>
+                <a:latin typeface="Amiri" pitchFamily="2" charset="-78"/>
+                <a:cs typeface="Amiri" pitchFamily="2" charset="-78"/>
               </a:rPr>
               <a:t>لُغَةُ التَّوَقُّفِ وَالتَّفْكِيرِ</a:t>
             </a:r>
@@ -20767,8 +20386,7 @@
                   <a:srgbClr val="1B3B6F"/>
                 </a:solidFill>
                 <a:latin typeface="Calibri" pitchFamily="34" charset="0"/>
-                <a:ea typeface="Calibri" pitchFamily="34" charset="-122"/>
-                <a:cs typeface="Calibri" pitchFamily="34" charset="-120"/>
+                <a:cs typeface="Amiri" pitchFamily="2" charset="-78"/>
               </a:rPr>
               <a:t> mean?</a:t>
             </a:r>
@@ -20858,8 +20476,7 @@
                   <a:srgbClr val="FFFFFF"/>
                 </a:solidFill>
                 <a:latin typeface="Calibri" pitchFamily="34" charset="0"/>
-                <a:ea typeface="Calibri" pitchFamily="34" charset="-122"/>
-                <a:cs typeface="Calibri" pitchFamily="34" charset="-120"/>
+                <a:cs typeface="Amiri" pitchFamily="2" charset="-78"/>
               </a:rPr>
               <a:t>A</a:t>
             </a:r>
@@ -20897,8 +20514,7 @@
                   <a:srgbClr val="1F2A37"/>
                 </a:solidFill>
                 <a:latin typeface="Calibri" pitchFamily="34" charset="0"/>
-                <a:ea typeface="Calibri" pitchFamily="34" charset="-122"/>
-                <a:cs typeface="Calibri" pitchFamily="34" charset="-120"/>
+                <a:cs typeface="Amiri" pitchFamily="2" charset="-78"/>
               </a:rPr>
               <a:t>pause-and-think language</a:t>
             </a:r>
@@ -20961,8 +20577,7 @@
                   <a:srgbClr val="1B3B6F"/>
                 </a:solidFill>
                 <a:latin typeface="Calibri" pitchFamily="34" charset="0"/>
-                <a:ea typeface="Calibri" pitchFamily="34" charset="-122"/>
-                <a:cs typeface="Calibri" pitchFamily="34" charset="-120"/>
+                <a:cs typeface="Amiri" pitchFamily="2" charset="-78"/>
               </a:rPr>
               <a:t>B</a:t>
             </a:r>
@@ -21000,8 +20615,7 @@
                   <a:srgbClr val="9AA1AB"/>
                 </a:solidFill>
                 <a:latin typeface="Calibri" pitchFamily="34" charset="0"/>
-                <a:ea typeface="Calibri" pitchFamily="34" charset="-122"/>
-                <a:cs typeface="Calibri" pitchFamily="34" charset="-120"/>
+                <a:cs typeface="Amiri" pitchFamily="2" charset="-78"/>
               </a:rPr>
               <a:t>silent reading</a:t>
             </a:r>
@@ -21064,8 +20678,7 @@
                   <a:srgbClr val="1B3B6F"/>
                 </a:solidFill>
                 <a:latin typeface="Calibri" pitchFamily="34" charset="0"/>
-                <a:ea typeface="Calibri" pitchFamily="34" charset="-122"/>
-                <a:cs typeface="Calibri" pitchFamily="34" charset="-120"/>
+                <a:cs typeface="Amiri" pitchFamily="2" charset="-78"/>
               </a:rPr>
               <a:t>C</a:t>
             </a:r>
@@ -21103,8 +20716,7 @@
                   <a:srgbClr val="9AA1AB"/>
                 </a:solidFill>
                 <a:latin typeface="Calibri" pitchFamily="34" charset="0"/>
-                <a:ea typeface="Calibri" pitchFamily="34" charset="-122"/>
-                <a:cs typeface="Calibri" pitchFamily="34" charset="-120"/>
+                <a:cs typeface="Amiri" pitchFamily="2" charset="-78"/>
               </a:rPr>
               <a:t>stopping the exam</a:t>
             </a:r>
@@ -21142,8 +20754,7 @@
                   <a:srgbClr val="8A6D1E"/>
                 </a:solidFill>
                 <a:latin typeface="Calibri" pitchFamily="34" charset="0"/>
-                <a:ea typeface="Calibri" pitchFamily="34" charset="-122"/>
-                <a:cs typeface="Calibri" pitchFamily="34" charset="-120"/>
+                <a:cs typeface="Amiri" pitchFamily="2" charset="-78"/>
               </a:rPr>
               <a:t>Prepared at home (P6-L09, from P6-L07).</a:t>
             </a:r>
@@ -21240,8 +20851,7 @@
                   <a:srgbClr val="FFFFFF"/>
                 </a:solidFill>
                 <a:latin typeface="Calibri" pitchFamily="34" charset="0"/>
-                <a:ea typeface="Calibri" pitchFamily="34" charset="-122"/>
-                <a:cs typeface="Calibri" pitchFamily="34" charset="-120"/>
+                <a:cs typeface="Amiri" pitchFamily="2" charset="-78"/>
               </a:rPr>
               <a:t>3</a:t>
             </a:r>
@@ -21279,8 +20889,7 @@
                   <a:srgbClr val="1B3B6F"/>
                 </a:solidFill>
                 <a:latin typeface="Calibri" pitchFamily="34" charset="0"/>
-                <a:ea typeface="Calibri" pitchFamily="34" charset="-122"/>
-                <a:cs typeface="Calibri" pitchFamily="34" charset="-120"/>
+                <a:cs typeface="Amiri" pitchFamily="2" charset="-78"/>
               </a:rPr>
               <a:t>What does </a:t>
             </a:r>
@@ -21292,9 +20901,8 @@
                 <a:solidFill>
                   <a:srgbClr val="1B3B6F"/>
                 </a:solidFill>
-                <a:latin typeface="Amiri" pitchFamily="34" charset="0"/>
-                <a:ea typeface="Amiri" pitchFamily="34" charset="-122"/>
-                <a:cs typeface="Amiri" pitchFamily="34" charset="-120"/>
+                <a:latin typeface="Amiri" pitchFamily="2" charset="-78"/>
+                <a:cs typeface="Amiri" pitchFamily="2" charset="-78"/>
               </a:rPr>
               <a:t>التَّحَدُّثُ بِثِقَةٍ</a:t>
             </a:r>
@@ -21307,8 +20915,7 @@
                   <a:srgbClr val="1B3B6F"/>
                 </a:solidFill>
                 <a:latin typeface="Calibri" pitchFamily="34" charset="0"/>
-                <a:ea typeface="Calibri" pitchFamily="34" charset="-122"/>
-                <a:cs typeface="Calibri" pitchFamily="34" charset="-120"/>
+                <a:cs typeface="Amiri" pitchFamily="2" charset="-78"/>
               </a:rPr>
               <a:t> mean?</a:t>
             </a:r>
@@ -21371,8 +20978,7 @@
                   <a:srgbClr val="1B3B6F"/>
                 </a:solidFill>
                 <a:latin typeface="Calibri" pitchFamily="34" charset="0"/>
-                <a:ea typeface="Calibri" pitchFamily="34" charset="-122"/>
-                <a:cs typeface="Calibri" pitchFamily="34" charset="-120"/>
+                <a:cs typeface="Amiri" pitchFamily="2" charset="-78"/>
               </a:rPr>
               <a:t>A</a:t>
             </a:r>
@@ -21410,8 +21016,7 @@
                   <a:srgbClr val="9AA1AB"/>
                 </a:solidFill>
                 <a:latin typeface="Calibri" pitchFamily="34" charset="0"/>
-                <a:ea typeface="Calibri" pitchFamily="34" charset="-122"/>
-                <a:cs typeface="Calibri" pitchFamily="34" charset="-120"/>
+                <a:cs typeface="Amiri" pitchFamily="2" charset="-78"/>
               </a:rPr>
               <a:t>speaking quickly</a:t>
             </a:r>
@@ -21474,8 +21079,7 @@
                   <a:srgbClr val="1B3B6F"/>
                 </a:solidFill>
                 <a:latin typeface="Calibri" pitchFamily="34" charset="0"/>
-                <a:ea typeface="Calibri" pitchFamily="34" charset="-122"/>
-                <a:cs typeface="Calibri" pitchFamily="34" charset="-120"/>
+                <a:cs typeface="Amiri" pitchFamily="2" charset="-78"/>
               </a:rPr>
               <a:t>B</a:t>
             </a:r>
@@ -21513,8 +21117,7 @@
                   <a:srgbClr val="9AA1AB"/>
                 </a:solidFill>
                 <a:latin typeface="Calibri" pitchFamily="34" charset="0"/>
-                <a:ea typeface="Calibri" pitchFamily="34" charset="-122"/>
-                <a:cs typeface="Calibri" pitchFamily="34" charset="-120"/>
+                <a:cs typeface="Amiri" pitchFamily="2" charset="-78"/>
               </a:rPr>
               <a:t>speaking quietly</a:t>
             </a:r>
@@ -21604,8 +21207,7 @@
                   <a:srgbClr val="FFFFFF"/>
                 </a:solidFill>
                 <a:latin typeface="Calibri" pitchFamily="34" charset="0"/>
-                <a:ea typeface="Calibri" pitchFamily="34" charset="-122"/>
-                <a:cs typeface="Calibri" pitchFamily="34" charset="-120"/>
+                <a:cs typeface="Amiri" pitchFamily="2" charset="-78"/>
               </a:rPr>
               <a:t>C</a:t>
             </a:r>
@@ -21643,8 +21245,7 @@
                   <a:srgbClr val="1F2A37"/>
                 </a:solidFill>
                 <a:latin typeface="Calibri" pitchFamily="34" charset="0"/>
-                <a:ea typeface="Calibri" pitchFamily="34" charset="-122"/>
-                <a:cs typeface="Calibri" pitchFamily="34" charset="-120"/>
+                <a:cs typeface="Amiri" pitchFamily="2" charset="-78"/>
               </a:rPr>
               <a:t>speaking with confidence</a:t>
             </a:r>
@@ -21682,8 +21283,7 @@
                   <a:srgbClr val="8A6D1E"/>
                 </a:solidFill>
                 <a:latin typeface="Calibri" pitchFamily="34" charset="0"/>
-                <a:ea typeface="Calibri" pitchFamily="34" charset="-122"/>
-                <a:cs typeface="Calibri" pitchFamily="34" charset="-120"/>
+                <a:cs typeface="Amiri" pitchFamily="2" charset="-78"/>
               </a:rPr>
               <a:t>Prepared at home (P6-L09, from P6-L06).</a:t>
             </a:r>
@@ -21780,8 +21380,7 @@
                   <a:srgbClr val="FFFFFF"/>
                 </a:solidFill>
                 <a:latin typeface="Calibri" pitchFamily="34" charset="0"/>
-                <a:ea typeface="Calibri" pitchFamily="34" charset="-122"/>
-                <a:cs typeface="Calibri" pitchFamily="34" charset="-120"/>
+                <a:cs typeface="Amiri" pitchFamily="2" charset="-78"/>
               </a:rPr>
               <a:t>4</a:t>
             </a:r>
@@ -21819,8 +21418,7 @@
                   <a:srgbClr val="1B3B6F"/>
                 </a:solidFill>
                 <a:latin typeface="Calibri" pitchFamily="34" charset="0"/>
-                <a:ea typeface="Calibri" pitchFamily="34" charset="-122"/>
-                <a:cs typeface="Calibri" pitchFamily="34" charset="-120"/>
+                <a:cs typeface="Amiri" pitchFamily="2" charset="-78"/>
               </a:rPr>
               <a:t>In the role play, one prompt is worth …</a:t>
             </a:r>
@@ -21883,8 +21481,7 @@
                   <a:srgbClr val="1B3B6F"/>
                 </a:solidFill>
                 <a:latin typeface="Calibri" pitchFamily="34" charset="0"/>
-                <a:ea typeface="Calibri" pitchFamily="34" charset="-122"/>
-                <a:cs typeface="Calibri" pitchFamily="34" charset="-120"/>
+                <a:cs typeface="Amiri" pitchFamily="2" charset="-78"/>
               </a:rPr>
               <a:t>A</a:t>
             </a:r>
@@ -21922,8 +21519,7 @@
                   <a:srgbClr val="9AA1AB"/>
                 </a:solidFill>
                 <a:latin typeface="Calibri" pitchFamily="34" charset="0"/>
-                <a:ea typeface="Calibri" pitchFamily="34" charset="-122"/>
-                <a:cs typeface="Calibri" pitchFamily="34" charset="-120"/>
+                <a:cs typeface="Amiri" pitchFamily="2" charset="-78"/>
               </a:rPr>
               <a:t>five marks</a:t>
             </a:r>
@@ -21986,8 +21582,7 @@
                   <a:srgbClr val="1B3B6F"/>
                 </a:solidFill>
                 <a:latin typeface="Calibri" pitchFamily="34" charset="0"/>
-                <a:ea typeface="Calibri" pitchFamily="34" charset="-122"/>
-                <a:cs typeface="Calibri" pitchFamily="34" charset="-120"/>
+                <a:cs typeface="Amiri" pitchFamily="2" charset="-78"/>
               </a:rPr>
               <a:t>B</a:t>
             </a:r>
@@ -22025,8 +21620,7 @@
                   <a:srgbClr val="9AA1AB"/>
                 </a:solidFill>
                 <a:latin typeface="Calibri" pitchFamily="34" charset="0"/>
-                <a:ea typeface="Calibri" pitchFamily="34" charset="-122"/>
-                <a:cs typeface="Calibri" pitchFamily="34" charset="-120"/>
+                <a:cs typeface="Amiri" pitchFamily="2" charset="-78"/>
               </a:rPr>
               <a:t>nothing unless it is perfect</a:t>
             </a:r>
@@ -22116,8 +21710,7 @@
                   <a:srgbClr val="FFFFFF"/>
                 </a:solidFill>
                 <a:latin typeface="Calibri" pitchFamily="34" charset="0"/>
-                <a:ea typeface="Calibri" pitchFamily="34" charset="-122"/>
-                <a:cs typeface="Calibri" pitchFamily="34" charset="-120"/>
+                <a:cs typeface="Amiri" pitchFamily="2" charset="-78"/>
               </a:rPr>
               <a:t>C</a:t>
             </a:r>
@@ -22155,8 +21748,7 @@
                   <a:srgbClr val="1F2A37"/>
                 </a:solidFill>
                 <a:latin typeface="Calibri" pitchFamily="34" charset="0"/>
-                <a:ea typeface="Calibri" pitchFamily="34" charset="-122"/>
-                <a:cs typeface="Calibri" pitchFamily="34" charset="-120"/>
+                <a:cs typeface="Amiri" pitchFamily="2" charset="-78"/>
               </a:rPr>
               <a:t>one Communication mark</a:t>
             </a:r>
@@ -22194,8 +21786,7 @@
                   <a:srgbClr val="8A6D1E"/>
                 </a:solidFill>
                 <a:latin typeface="Calibri" pitchFamily="34" charset="0"/>
-                <a:ea typeface="Calibri" pitchFamily="34" charset="-122"/>
-                <a:cs typeface="Calibri" pitchFamily="34" charset="-120"/>
+                <a:cs typeface="Amiri" pitchFamily="2" charset="-78"/>
               </a:rPr>
               <a:t>Role play: Communication 6 = one per prompt (P6-L06).</a:t>
             </a:r>
@@ -22292,8 +21883,7 @@
                   <a:srgbClr val="FFFFFF"/>
                 </a:solidFill>
                 <a:latin typeface="Calibri" pitchFamily="34" charset="0"/>
-                <a:ea typeface="Calibri" pitchFamily="34" charset="-122"/>
-                <a:cs typeface="Calibri" pitchFamily="34" charset="-120"/>
+                <a:cs typeface="Amiri" pitchFamily="2" charset="-78"/>
               </a:rPr>
               <a:t>5</a:t>
             </a:r>
@@ -22331,8 +21921,7 @@
                   <a:srgbClr val="1B3B6F"/>
                 </a:solidFill>
                 <a:latin typeface="Calibri" pitchFamily="34" charset="0"/>
-                <a:ea typeface="Calibri" pitchFamily="34" charset="-122"/>
-                <a:cs typeface="Calibri" pitchFamily="34" charset="-120"/>
+                <a:cs typeface="Amiri" pitchFamily="2" charset="-78"/>
               </a:rPr>
               <a:t>Which answer reaches Band 5 in the conversation?</a:t>
             </a:r>
@@ -22422,8 +22011,7 @@
                   <a:srgbClr val="FFFFFF"/>
                 </a:solidFill>
                 <a:latin typeface="Calibri" pitchFamily="34" charset="0"/>
-                <a:ea typeface="Calibri" pitchFamily="34" charset="-122"/>
-                <a:cs typeface="Calibri" pitchFamily="34" charset="-120"/>
+                <a:cs typeface="Amiri" pitchFamily="2" charset="-78"/>
               </a:rPr>
               <a:t>A</a:t>
             </a:r>
@@ -22461,8 +22049,7 @@
                   <a:srgbClr val="1F2A37"/>
                 </a:solidFill>
                 <a:latin typeface="Calibri" pitchFamily="34" charset="0"/>
-                <a:ea typeface="Calibri" pitchFamily="34" charset="-122"/>
-                <a:cs typeface="Calibri" pitchFamily="34" charset="-120"/>
+                <a:cs typeface="Amiri" pitchFamily="2" charset="-78"/>
               </a:rPr>
               <a:t>opinion + reason + example + a conditional</a:t>
             </a:r>
@@ -22525,8 +22112,7 @@
                   <a:srgbClr val="1B3B6F"/>
                 </a:solidFill>
                 <a:latin typeface="Calibri" pitchFamily="34" charset="0"/>
-                <a:ea typeface="Calibri" pitchFamily="34" charset="-122"/>
-                <a:cs typeface="Calibri" pitchFamily="34" charset="-120"/>
+                <a:cs typeface="Amiri" pitchFamily="2" charset="-78"/>
               </a:rPr>
               <a:t>B</a:t>
             </a:r>
@@ -22564,8 +22150,7 @@
                   <a:srgbClr val="9AA1AB"/>
                 </a:solidFill>
                 <a:latin typeface="Calibri" pitchFamily="34" charset="0"/>
-                <a:ea typeface="Calibri" pitchFamily="34" charset="-122"/>
-                <a:cs typeface="Calibri" pitchFamily="34" charset="-120"/>
+                <a:cs typeface="Amiri" pitchFamily="2" charset="-78"/>
               </a:rPr>
               <a:t>one correct sentence</a:t>
             </a:r>
@@ -22628,8 +22213,7 @@
                   <a:srgbClr val="1B3B6F"/>
                 </a:solidFill>
                 <a:latin typeface="Calibri" pitchFamily="34" charset="0"/>
-                <a:ea typeface="Calibri" pitchFamily="34" charset="-122"/>
-                <a:cs typeface="Calibri" pitchFamily="34" charset="-120"/>
+                <a:cs typeface="Amiri" pitchFamily="2" charset="-78"/>
               </a:rPr>
               <a:t>C</a:t>
             </a:r>
@@ -22667,8 +22251,7 @@
                   <a:srgbClr val="9AA1AB"/>
                 </a:solidFill>
                 <a:latin typeface="Calibri" pitchFamily="34" charset="0"/>
-                <a:ea typeface="Calibri" pitchFamily="34" charset="-122"/>
-                <a:cs typeface="Calibri" pitchFamily="34" charset="-120"/>
+                <a:cs typeface="Amiri" pitchFamily="2" charset="-78"/>
               </a:rPr>
               <a:t>a list of words</a:t>
             </a:r>
@@ -22706,8 +22289,7 @@
                   <a:srgbClr val="8A6D1E"/>
                 </a:solidFill>
                 <a:latin typeface="Calibri" pitchFamily="34" charset="0"/>
-                <a:ea typeface="Calibri" pitchFamily="34" charset="-122"/>
-                <a:cs typeface="Calibri" pitchFamily="34" charset="-120"/>
+                <a:cs typeface="Amiri" pitchFamily="2" charset="-78"/>
               </a:rPr>
               <a:t>Development earns the band (P6-L07).</a:t>
             </a:r>
@@ -22779,8 +22361,7 @@
                   <a:srgbClr val="8A6D1E"/>
                 </a:solidFill>
                 <a:latin typeface="Calibri" pitchFamily="34" charset="0"/>
-                <a:ea typeface="Calibri" pitchFamily="34" charset="-122"/>
-                <a:cs typeface="Calibri" pitchFamily="34" charset="-120"/>
+                <a:cs typeface="Amiri" pitchFamily="2" charset="-78"/>
               </a:rPr>
               <a:t>THE KEY IDEA FOR TODAY</a:t>
             </a:r>
@@ -22818,8 +22399,7 @@
                   <a:srgbClr val="1F2A37"/>
                 </a:solidFill>
                 <a:latin typeface="Calibri" pitchFamily="34" charset="0"/>
-                <a:ea typeface="Calibri" pitchFamily="34" charset="-122"/>
-                <a:cs typeface="Calibri" pitchFamily="34" charset="-120"/>
+                <a:cs typeface="Amiri" pitchFamily="2" charset="-78"/>
               </a:rPr>
               <a:t>Role play: precise, not long. Conversation: develop, develop, develop.</a:t>
             </a:r>
@@ -22859,9 +22439,8 @@
                 <a:solidFill>
                   <a:srgbClr val="1B3B6F"/>
                 </a:solidFill>
-                <a:latin typeface="Amiri" pitchFamily="34" charset="0"/>
-                <a:ea typeface="Amiri" pitchFamily="34" charset="-122"/>
-                <a:cs typeface="Amiri" pitchFamily="34" charset="-120"/>
+                <a:latin typeface="Amiri" pitchFamily="2" charset="-78"/>
+                <a:cs typeface="Amiri" pitchFamily="2" charset="-78"/>
               </a:rPr>
               <a:t>مُحَفِّزٌ وَاحِدٌ = دَرَجَةٌ · رَأْيٌ + سَبَبٌ + مِثَالٌ</a:t>
             </a:r>
@@ -22899,8 +22478,7 @@
                   <a:srgbClr val="8A93A0"/>
                 </a:solidFill>
                 <a:latin typeface="Calibri" pitchFamily="34" charset="0"/>
-                <a:ea typeface="Calibri" pitchFamily="34" charset="-122"/>
-                <a:cs typeface="Calibri" pitchFamily="34" charset="-120"/>
+                <a:cs typeface="Amiri" pitchFamily="2" charset="-78"/>
               </a:rPr>
               <a:t>5 / 17</a:t>
             </a:r>
@@ -22994,9 +22572,8 @@
                 <a:solidFill>
                   <a:srgbClr val="D4AF37"/>
                 </a:solidFill>
-                <a:latin typeface="Amiri" pitchFamily="34" charset="0"/>
-                <a:ea typeface="Amiri" pitchFamily="34" charset="-122"/>
-                <a:cs typeface="Amiri" pitchFamily="34" charset="-120"/>
+                <a:latin typeface="Amiri" pitchFamily="2" charset="-78"/>
+                <a:cs typeface="Amiri" pitchFamily="2" charset="-78"/>
               </a:rPr>
               <a:t>م</a:t>
             </a:r>
@@ -23034,8 +22611,7 @@
                   <a:srgbClr val="1B3B6F"/>
                 </a:solidFill>
                 <a:latin typeface="Cambria" pitchFamily="34" charset="0"/>
-                <a:ea typeface="Cambria" pitchFamily="34" charset="-122"/>
-                <a:cs typeface="Cambria" pitchFamily="34" charset="-120"/>
+                <a:cs typeface="Amiri" pitchFamily="2" charset="-78"/>
               </a:rPr>
               <a:t>Al Madina Online School</a:t>
             </a:r>
@@ -23073,8 +22649,7 @@
                   <a:srgbClr val="8A6D1E"/>
                 </a:solidFill>
                 <a:latin typeface="Calibri" pitchFamily="34" charset="0"/>
-                <a:ea typeface="Calibri" pitchFamily="34" charset="-122"/>
-                <a:cs typeface="Calibri" pitchFamily="34" charset="-120"/>
+                <a:cs typeface="Amiri" pitchFamily="2" charset="-78"/>
               </a:rPr>
               <a:t>ARABIC DEPARTMENT · MIFTAH ARABIC · IGCSE 0544</a:t>
             </a:r>
@@ -23139,8 +22714,7 @@
                   <a:srgbClr val="FFFFFF"/>
                 </a:solidFill>
                 <a:latin typeface="Calibri" pitchFamily="34" charset="0"/>
-                <a:ea typeface="Calibri" pitchFamily="34" charset="-122"/>
-                <a:cs typeface="Calibri" pitchFamily="34" charset="-120"/>
+                <a:cs typeface="Amiri" pitchFamily="2" charset="-78"/>
               </a:rPr>
               <a:t>P6-L10 · IGCSE Bridge</a:t>
             </a:r>
@@ -23205,8 +22779,7 @@
                   <a:srgbClr val="FFFFFF"/>
                 </a:solidFill>
                 <a:latin typeface="Calibri" pitchFamily="34" charset="0"/>
-                <a:ea typeface="Calibri" pitchFamily="34" charset="-122"/>
-                <a:cs typeface="Calibri" pitchFamily="34" charset="-120"/>
+                <a:cs typeface="Amiri" pitchFamily="2" charset="-78"/>
               </a:rPr>
               <a:t>WELCOME · 1 MIN</a:t>
             </a:r>
@@ -23244,8 +22817,7 @@
                   <a:srgbClr val="5A6472"/>
                 </a:solidFill>
                 <a:latin typeface="Calibri" pitchFamily="34" charset="0"/>
-                <a:ea typeface="Calibri" pitchFamily="34" charset="-122"/>
-                <a:cs typeface="Calibri" pitchFamily="34" charset="-120"/>
+                <a:cs typeface="Amiri" pitchFamily="2" charset="-78"/>
               </a:rPr>
               <a:t>LESSON OBJECTIVES</a:t>
             </a:r>
@@ -23283,8 +22855,7 @@
                   <a:srgbClr val="1B3B6F"/>
                 </a:solidFill>
                 <a:latin typeface="Cambria" pitchFamily="34" charset="0"/>
-                <a:ea typeface="Cambria" pitchFamily="34" charset="-122"/>
-                <a:cs typeface="Cambria" pitchFamily="34" charset="-120"/>
+                <a:cs typeface="Amiri" pitchFamily="2" charset="-78"/>
               </a:rPr>
               <a:t>Objectives and success criteria</a:t>
             </a:r>
@@ -23321,9 +22892,8 @@
                 <a:solidFill>
                   <a:srgbClr val="8A6D1E"/>
                 </a:solidFill>
-                <a:latin typeface="Amiri" pitchFamily="34" charset="0"/>
-                <a:ea typeface="Amiri" pitchFamily="34" charset="-122"/>
-                <a:cs typeface="Amiri" pitchFamily="34" charset="-120"/>
+                <a:latin typeface="Amiri" pitchFamily="2" charset="-78"/>
+                <a:cs typeface="Amiri" pitchFamily="2" charset="-78"/>
               </a:rPr>
               <a:t>الأَهْدَافُ وَمَعَايِيرُ النَّجَاحِ</a:t>
             </a:r>
@@ -23361,8 +22931,7 @@
                   <a:srgbClr val="8A93A0"/>
                 </a:solidFill>
                 <a:latin typeface="Calibri" pitchFamily="34" charset="0"/>
-                <a:ea typeface="Calibri" pitchFamily="34" charset="-122"/>
-                <a:cs typeface="Calibri" pitchFamily="34" charset="-120"/>
+                <a:cs typeface="Amiri" pitchFamily="2" charset="-78"/>
               </a:rPr>
               <a:t>Miftah Arabic · Progression P6 · IGCSE Bridge · P6-L10</a:t>
             </a:r>
@@ -23434,8 +23003,7 @@
                   <a:srgbClr val="1B3B6F"/>
                 </a:solidFill>
                 <a:latin typeface="Calibri" pitchFamily="34" charset="0"/>
-                <a:ea typeface="Calibri" pitchFamily="34" charset="-122"/>
-                <a:cs typeface="Calibri" pitchFamily="34" charset="-120"/>
+                <a:cs typeface="Amiri" pitchFamily="2" charset="-78"/>
               </a:rPr>
               <a:t>TODAY YOU WILL</a:t>
             </a:r>
@@ -23472,9 +23040,8 @@
                 <a:solidFill>
                   <a:srgbClr val="8A6D1E"/>
                 </a:solidFill>
-                <a:latin typeface="Amiri" pitchFamily="34" charset="0"/>
-                <a:ea typeface="Amiri" pitchFamily="34" charset="-122"/>
-                <a:cs typeface="Amiri" pitchFamily="34" charset="-120"/>
+                <a:latin typeface="Amiri" pitchFamily="2" charset="-78"/>
+                <a:cs typeface="Amiri" pitchFamily="2" charset="-78"/>
               </a:rPr>
               <a:t>سَتَتَعَلَّمُ اليَوْمَ</a:t>
             </a:r>
@@ -23537,8 +23104,7 @@
                   <a:srgbClr val="D4AF37"/>
                 </a:solidFill>
                 <a:latin typeface="Calibri" pitchFamily="34" charset="0"/>
-                <a:ea typeface="Calibri" pitchFamily="34" charset="-122"/>
-                <a:cs typeface="Calibri" pitchFamily="34" charset="-120"/>
+                <a:cs typeface="Amiri" pitchFamily="2" charset="-78"/>
               </a:rPr>
               <a:t>1</a:t>
             </a:r>
@@ -23576,8 +23142,7 @@
                   <a:srgbClr val="1F2A37"/>
                 </a:solidFill>
                 <a:latin typeface="Calibri" pitchFamily="34" charset="0"/>
-                <a:ea typeface="Calibri" pitchFamily="34" charset="-122"/>
-                <a:cs typeface="Calibri" pitchFamily="34" charset="-120"/>
+                <a:cs typeface="Amiri" pitchFamily="2" charset="-78"/>
               </a:rPr>
               <a:t>Sit the mock Paper 3 Speaking under full IGCSE format.</a:t>
             </a:r>
@@ -23640,8 +23205,7 @@
                   <a:srgbClr val="D4AF37"/>
                 </a:solidFill>
                 <a:latin typeface="Calibri" pitchFamily="34" charset="0"/>
-                <a:ea typeface="Calibri" pitchFamily="34" charset="-122"/>
-                <a:cs typeface="Calibri" pitchFamily="34" charset="-120"/>
+                <a:cs typeface="Amiri" pitchFamily="2" charset="-78"/>
               </a:rPr>
               <a:t>2</a:t>
             </a:r>
@@ -23679,8 +23243,7 @@
                   <a:srgbClr val="1F2A37"/>
                 </a:solidFill>
                 <a:latin typeface="Calibri" pitchFamily="34" charset="0"/>
-                <a:ea typeface="Calibri" pitchFamily="34" charset="-122"/>
-                <a:cs typeface="Calibri" pitchFamily="34" charset="-120"/>
+                <a:cs typeface="Amiri" pitchFamily="2" charset="-78"/>
               </a:rPr>
               <a:t>Address every role-play prompt and develop every topic-conversation answer.</a:t>
             </a:r>
@@ -23743,8 +23306,7 @@
                   <a:srgbClr val="D4AF37"/>
                 </a:solidFill>
                 <a:latin typeface="Calibri" pitchFamily="34" charset="0"/>
-                <a:ea typeface="Calibri" pitchFamily="34" charset="-122"/>
-                <a:cs typeface="Calibri" pitchFamily="34" charset="-120"/>
+                <a:cs typeface="Amiri" pitchFamily="2" charset="-78"/>
               </a:rPr>
               <a:t>3</a:t>
             </a:r>
@@ -23782,8 +23344,7 @@
                   <a:srgbClr val="1F2A37"/>
                 </a:solidFill>
                 <a:latin typeface="Calibri" pitchFamily="34" charset="0"/>
-                <a:ea typeface="Calibri" pitchFamily="34" charset="-122"/>
-                <a:cs typeface="Calibri" pitchFamily="34" charset="-120"/>
+                <a:cs typeface="Amiri" pitchFamily="2" charset="-78"/>
               </a:rPr>
               <a:t>Deploy conditionals, subjunctive triggers and concession-refutation spontaneously.</a:t>
             </a:r>
@@ -23846,8 +23407,7 @@
                   <a:srgbClr val="D4AF37"/>
                 </a:solidFill>
                 <a:latin typeface="Calibri" pitchFamily="34" charset="0"/>
-                <a:ea typeface="Calibri" pitchFamily="34" charset="-122"/>
-                <a:cs typeface="Calibri" pitchFamily="34" charset="-120"/>
+                <a:cs typeface="Amiri" pitchFamily="2" charset="-78"/>
               </a:rPr>
               <a:t>4</a:t>
             </a:r>
@@ -23885,8 +23445,7 @@
                   <a:srgbClr val="1F2A37"/>
                 </a:solidFill>
                 <a:latin typeface="Calibri" pitchFamily="34" charset="0"/>
-                <a:ea typeface="Calibri" pitchFamily="34" charset="-122"/>
-                <a:cs typeface="Calibri" pitchFamily="34" charset="-120"/>
+                <a:cs typeface="Amiri" pitchFamily="2" charset="-78"/>
               </a:rPr>
               <a:t>Record your Communication and Quality-of-Language scores.</a:t>
             </a:r>
@@ -23978,8 +23537,7 @@
                   <a:srgbClr val="FFFFFF"/>
                 </a:solidFill>
                 <a:latin typeface="Calibri" pitchFamily="34" charset="0"/>
-                <a:ea typeface="Calibri" pitchFamily="34" charset="-122"/>
-                <a:cs typeface="Calibri" pitchFamily="34" charset="-120"/>
+                <a:cs typeface="Amiri" pitchFamily="2" charset="-78"/>
               </a:rPr>
               <a:t>CORE</a:t>
             </a:r>
@@ -24017,8 +23575,7 @@
                   <a:srgbClr val="2E8B57"/>
                 </a:solidFill>
                 <a:latin typeface="Calibri" pitchFamily="34" charset="0"/>
-                <a:ea typeface="Calibri" pitchFamily="34" charset="-122"/>
-                <a:cs typeface="Calibri" pitchFamily="34" charset="-120"/>
+                <a:cs typeface="Amiri" pitchFamily="2" charset="-78"/>
               </a:rPr>
               <a:t>Everyone</a:t>
             </a:r>
@@ -24056,8 +23613,7 @@
                   <a:srgbClr val="2E8B57"/>
                 </a:solidFill>
                 <a:latin typeface="Calibri" pitchFamily="34" charset="0"/>
-                <a:ea typeface="Calibri" pitchFamily="34" charset="-122"/>
-                <a:cs typeface="Calibri" pitchFamily="34" charset="-120"/>
+                <a:cs typeface="Amiri" pitchFamily="2" charset="-78"/>
               </a:rPr>
               <a:t>☐  I can answer every role-play prompt with a full sentence.</a:t>
             </a:r>
@@ -24095,8 +23651,7 @@
                   <a:srgbClr val="2E8B57"/>
                 </a:solidFill>
                 <a:latin typeface="Calibri" pitchFamily="34" charset="0"/>
-                <a:ea typeface="Calibri" pitchFamily="34" charset="-122"/>
-                <a:cs typeface="Calibri" pitchFamily="34" charset="-120"/>
+                <a:cs typeface="Amiri" pitchFamily="2" charset="-78"/>
               </a:rPr>
               <a:t>☐  I can keep speaking for each conversation question.</a:t>
             </a:r>
@@ -24188,8 +23743,7 @@
                   <a:srgbClr val="FFFFFF"/>
                 </a:solidFill>
                 <a:latin typeface="Calibri" pitchFamily="34" charset="0"/>
-                <a:ea typeface="Calibri" pitchFamily="34" charset="-122"/>
-                <a:cs typeface="Calibri" pitchFamily="34" charset="-120"/>
+                <a:cs typeface="Amiri" pitchFamily="2" charset="-78"/>
               </a:rPr>
               <a:t>DEVELOP</a:t>
             </a:r>
@@ -24227,8 +23781,7 @@
                   <a:srgbClr val="C9780A"/>
                 </a:solidFill>
                 <a:latin typeface="Calibri" pitchFamily="34" charset="0"/>
-                <a:ea typeface="Calibri" pitchFamily="34" charset="-122"/>
-                <a:cs typeface="Calibri" pitchFamily="34" charset="-120"/>
+                <a:cs typeface="Amiri" pitchFamily="2" charset="-78"/>
               </a:rPr>
               <a:t>Most of us</a:t>
             </a:r>
@@ -24266,8 +23819,7 @@
                   <a:srgbClr val="C9780A"/>
                 </a:solidFill>
                 <a:latin typeface="Calibri" pitchFamily="34" charset="0"/>
-                <a:ea typeface="Calibri" pitchFamily="34" charset="-122"/>
-                <a:cs typeface="Calibri" pitchFamily="34" charset="-120"/>
+                <a:cs typeface="Amiri" pitchFamily="2" charset="-78"/>
               </a:rPr>
               <a:t>☐  I can develop each answer with opinion, reason and example.</a:t>
             </a:r>
@@ -24305,8 +23857,7 @@
                   <a:srgbClr val="C9780A"/>
                 </a:solidFill>
                 <a:latin typeface="Calibri" pitchFamily="34" charset="0"/>
-                <a:ea typeface="Calibri" pitchFamily="34" charset="-122"/>
-                <a:cs typeface="Calibri" pitchFamily="34" charset="-120"/>
+                <a:cs typeface="Amiri" pitchFamily="2" charset="-78"/>
               </a:rPr>
               <a:t>☐  I can recover from a pause with a pause-and-think phrase.</a:t>
             </a:r>
@@ -24398,8 +23949,7 @@
                   <a:srgbClr val="FFFFFF"/>
                 </a:solidFill>
                 <a:latin typeface="Calibri" pitchFamily="34" charset="0"/>
-                <a:ea typeface="Calibri" pitchFamily="34" charset="-122"/>
-                <a:cs typeface="Calibri" pitchFamily="34" charset="-120"/>
+                <a:cs typeface="Amiri" pitchFamily="2" charset="-78"/>
               </a:rPr>
               <a:t>STRETCH</a:t>
             </a:r>
@@ -24437,8 +23987,7 @@
                   <a:srgbClr val="B83227"/>
                 </a:solidFill>
                 <a:latin typeface="Calibri" pitchFamily="34" charset="0"/>
-                <a:ea typeface="Calibri" pitchFamily="34" charset="-122"/>
-                <a:cs typeface="Calibri" pitchFamily="34" charset="-120"/>
+                <a:cs typeface="Amiri" pitchFamily="2" charset="-78"/>
               </a:rPr>
               <a:t>Aim high</a:t>
             </a:r>
@@ -24476,8 +24025,7 @@
                   <a:srgbClr val="B83227"/>
                 </a:solidFill>
                 <a:latin typeface="Calibri" pitchFamily="34" charset="0"/>
-                <a:ea typeface="Calibri" pitchFamily="34" charset="-122"/>
-                <a:cs typeface="Calibri" pitchFamily="34" charset="-120"/>
+                <a:cs typeface="Amiri" pitchFamily="2" charset="-78"/>
               </a:rPr>
               <a:t>☐  I can use a conditional, a subjunctive and a concession.</a:t>
             </a:r>
@@ -24515,8 +24063,7 @@
                   <a:srgbClr val="B83227"/>
                 </a:solidFill>
                 <a:latin typeface="Calibri" pitchFamily="34" charset="0"/>
-                <a:ea typeface="Calibri" pitchFamily="34" charset="-122"/>
-                <a:cs typeface="Calibri" pitchFamily="34" charset="-120"/>
+                <a:cs typeface="Amiri" pitchFamily="2" charset="-78"/>
               </a:rPr>
               <a:t>☐  I can self-mark accurately against the scheme.</a:t>
             </a:r>
@@ -24554,8 +24101,7 @@
                   <a:srgbClr val="8A93A0"/>
                 </a:solidFill>
                 <a:latin typeface="Calibri" pitchFamily="34" charset="0"/>
-                <a:ea typeface="Calibri" pitchFamily="34" charset="-122"/>
-                <a:cs typeface="Calibri" pitchFamily="34" charset="-120"/>
+                <a:cs typeface="Amiri" pitchFamily="2" charset="-78"/>
               </a:rPr>
               <a:t>6 / 17</a:t>
             </a:r>
@@ -24649,9 +24195,8 @@
                 <a:solidFill>
                   <a:srgbClr val="D4AF37"/>
                 </a:solidFill>
-                <a:latin typeface="Amiri" pitchFamily="34" charset="0"/>
-                <a:ea typeface="Amiri" pitchFamily="34" charset="-122"/>
-                <a:cs typeface="Amiri" pitchFamily="34" charset="-120"/>
+                <a:latin typeface="Amiri" pitchFamily="2" charset="-78"/>
+                <a:cs typeface="Amiri" pitchFamily="2" charset="-78"/>
               </a:rPr>
               <a:t>م</a:t>
             </a:r>
@@ -24689,8 +24234,7 @@
                   <a:srgbClr val="1B3B6F"/>
                 </a:solidFill>
                 <a:latin typeface="Cambria" pitchFamily="34" charset="0"/>
-                <a:ea typeface="Cambria" pitchFamily="34" charset="-122"/>
-                <a:cs typeface="Cambria" pitchFamily="34" charset="-120"/>
+                <a:cs typeface="Amiri" pitchFamily="2" charset="-78"/>
               </a:rPr>
               <a:t>Al Madina Online School</a:t>
             </a:r>
@@ -24728,8 +24272,7 @@
                   <a:srgbClr val="8A6D1E"/>
                 </a:solidFill>
                 <a:latin typeface="Calibri" pitchFamily="34" charset="0"/>
-                <a:ea typeface="Calibri" pitchFamily="34" charset="-122"/>
-                <a:cs typeface="Calibri" pitchFamily="34" charset="-120"/>
+                <a:cs typeface="Amiri" pitchFamily="2" charset="-78"/>
               </a:rPr>
               <a:t>ARABIC DEPARTMENT · MIFTAH ARABIC · IGCSE 0544</a:t>
             </a:r>
@@ -24794,8 +24337,7 @@
                   <a:srgbClr val="FFFFFF"/>
                 </a:solidFill>
                 <a:latin typeface="Calibri" pitchFamily="34" charset="0"/>
-                <a:ea typeface="Calibri" pitchFamily="34" charset="-122"/>
-                <a:cs typeface="Calibri" pitchFamily="34" charset="-120"/>
+                <a:cs typeface="Amiri" pitchFamily="2" charset="-78"/>
               </a:rPr>
               <a:t>P6-L10 · IGCSE Bridge</a:t>
             </a:r>
@@ -24860,8 +24402,7 @@
                   <a:srgbClr val="FFFFFF"/>
                 </a:solidFill>
                 <a:latin typeface="Calibri" pitchFamily="34" charset="0"/>
-                <a:ea typeface="Calibri" pitchFamily="34" charset="-122"/>
-                <a:cs typeface="Calibri" pitchFamily="34" charset="-120"/>
+                <a:cs typeface="Amiri" pitchFamily="2" charset="-78"/>
               </a:rPr>
               <a:t>TEACHER INSTRUCTION · 3 MIN</a:t>
             </a:r>
@@ -24899,8 +24440,7 @@
                   <a:srgbClr val="1B3B6F"/>
                 </a:solidFill>
                 <a:latin typeface="Calibri" pitchFamily="34" charset="0"/>
-                <a:ea typeface="Calibri" pitchFamily="34" charset="-122"/>
-                <a:cs typeface="Calibri" pitchFamily="34" charset="-120"/>
+                <a:cs typeface="Amiri" pitchFamily="2" charset="-78"/>
               </a:rPr>
               <a:t>TEACH · BEFORE YOU SPEAK (WEBSITE) · THE ONLINE ROUTINE</a:t>
             </a:r>
@@ -24938,8 +24478,7 @@
                   <a:srgbClr val="1B3B6F"/>
                 </a:solidFill>
                 <a:latin typeface="Cambria" pitchFamily="34" charset="0"/>
-                <a:ea typeface="Cambria" pitchFamily="34" charset="-122"/>
-                <a:cs typeface="Cambria" pitchFamily="34" charset="-120"/>
+                <a:cs typeface="Amiri" pitchFamily="2" charset="-78"/>
               </a:rPr>
               <a:t>Before you speak</a:t>
             </a:r>
@@ -24976,9 +24515,8 @@
                 <a:solidFill>
                   <a:srgbClr val="8A6D1E"/>
                 </a:solidFill>
-                <a:latin typeface="Amiri" pitchFamily="34" charset="0"/>
-                <a:ea typeface="Amiri" pitchFamily="34" charset="-122"/>
-                <a:cs typeface="Amiri" pitchFamily="34" charset="-120"/>
+                <a:latin typeface="Amiri" pitchFamily="2" charset="-78"/>
+                <a:cs typeface="Amiri" pitchFamily="2" charset="-78"/>
               </a:rPr>
               <a:t>التَّهَيُّؤُ الذِّهْنِيُّ</a:t>
             </a:r>
@@ -25016,8 +24554,7 @@
                   <a:srgbClr val="8A93A0"/>
                 </a:solidFill>
                 <a:latin typeface="Calibri" pitchFamily="34" charset="0"/>
-                <a:ea typeface="Calibri" pitchFamily="34" charset="-122"/>
-                <a:cs typeface="Calibri" pitchFamily="34" charset="-120"/>
+                <a:cs typeface="Amiri" pitchFamily="2" charset="-78"/>
               </a:rPr>
               <a:t>Miftah Arabic · Progression P6 · IGCSE Bridge · P6-L10</a:t>
             </a:r>
@@ -25089,8 +24626,7 @@
                   <a:srgbClr val="1B3B6F"/>
                 </a:solidFill>
                 <a:latin typeface="Calibri" pitchFamily="34" charset="0"/>
-                <a:ea typeface="Calibri" pitchFamily="34" charset="-122"/>
-                <a:cs typeface="Calibri" pitchFamily="34" charset="-120"/>
+                <a:cs typeface="Amiri" pitchFamily="2" charset="-78"/>
               </a:rPr>
               <a:t>WHAT YOU NEED TO KNOW</a:t>
             </a:r>
@@ -25153,8 +24689,7 @@
                   <a:srgbClr val="D4AF37"/>
                 </a:solidFill>
                 <a:latin typeface="Calibri" pitchFamily="34" charset="0"/>
-                <a:ea typeface="Calibri" pitchFamily="34" charset="-122"/>
-                <a:cs typeface="Calibri" pitchFamily="34" charset="-120"/>
+                <a:cs typeface="Amiri" pitchFamily="2" charset="-78"/>
               </a:rPr>
               <a:t>1</a:t>
             </a:r>
@@ -25192,8 +24727,7 @@
                   <a:srgbClr val="1F2A37"/>
                 </a:solidFill>
                 <a:latin typeface="Calibri" pitchFamily="34" charset="0"/>
-                <a:ea typeface="Calibri" pitchFamily="34" charset="-122"/>
-                <a:cs typeface="Calibri" pitchFamily="34" charset="-120"/>
+                <a:cs typeface="Amiri" pitchFamily="2" charset="-78"/>
               </a:rPr>
               <a:t>Sit quietly for a moment. Bring to mind the Arabic sentence you are most proud of — proof of what you can do — then show the examiner that sentence and the many like it.</a:t>
             </a:r>
@@ -25256,8 +24790,7 @@
                   <a:srgbClr val="D4AF37"/>
                 </a:solidFill>
                 <a:latin typeface="Calibri" pitchFamily="34" charset="0"/>
-                <a:ea typeface="Calibri" pitchFamily="34" charset="-122"/>
-                <a:cs typeface="Calibri" pitchFamily="34" charset="-120"/>
+                <a:cs typeface="Amiri" pitchFamily="2" charset="-78"/>
               </a:rPr>
               <a:t>2</a:t>
             </a:r>
@@ -25295,8 +24828,7 @@
                   <a:srgbClr val="1F2A37"/>
                 </a:solidFill>
                 <a:latin typeface="Calibri" pitchFamily="34" charset="0"/>
-                <a:ea typeface="Calibri" pitchFamily="34" charset="-122"/>
-                <a:cs typeface="Calibri" pitchFamily="34" charset="-120"/>
+                <a:cs typeface="Amiri" pitchFamily="2" charset="-78"/>
               </a:rPr>
               <a:t>Paper 3 is about 12 minutes: a role play (about 5 minutes, 10 marks) and a topic conversation (about 7 minutes, 20 marks). Record yourself if you can, and self-mark against the scheme.</a:t>
             </a:r>
@@ -25359,8 +24891,7 @@
                   <a:srgbClr val="D4AF37"/>
                 </a:solidFill>
                 <a:latin typeface="Calibri" pitchFamily="34" charset="0"/>
-                <a:ea typeface="Calibri" pitchFamily="34" charset="-122"/>
-                <a:cs typeface="Calibri" pitchFamily="34" charset="-120"/>
+                <a:cs typeface="Amiri" pitchFamily="2" charset="-78"/>
               </a:rPr>
               <a:t>3</a:t>
             </a:r>
@@ -25398,8 +24929,7 @@
                   <a:srgbClr val="1F2A37"/>
                 </a:solidFill>
                 <a:latin typeface="Calibri" pitchFamily="34" charset="0"/>
-                <a:ea typeface="Calibri" pitchFamily="34" charset="-122"/>
-                <a:cs typeface="Calibri" pitchFamily="34" charset="-120"/>
+                <a:cs typeface="Amiri" pitchFamily="2" charset="-78"/>
               </a:rPr>
               <a:t>Today: stay muted in Teams; record yourself on your phone or laptop; answer each prompt when I read it.</a:t>
             </a:r>
@@ -25471,8 +25001,7 @@
                   <a:srgbClr val="8A6D1E"/>
                 </a:solidFill>
                 <a:latin typeface="Calibri" pitchFamily="34" charset="0"/>
-                <a:ea typeface="Calibri" pitchFamily="34" charset="-122"/>
-                <a:cs typeface="Calibri" pitchFamily="34" charset="-120"/>
+                <a:cs typeface="Amiri" pitchFamily="2" charset="-78"/>
               </a:rPr>
               <a:t>THE ROUTINE (TEACHER)</a:t>
             </a:r>
@@ -25509,9 +25038,8 @@
                 <a:solidFill>
                   <a:srgbClr val="1B3B6F"/>
                 </a:solidFill>
-                <a:latin typeface="Amiri" pitchFamily="34" charset="0"/>
-                <a:ea typeface="Amiri" pitchFamily="34" charset="-122"/>
-                <a:cs typeface="Amiri" pitchFamily="34" charset="-120"/>
+                <a:latin typeface="Amiri" pitchFamily="2" charset="-78"/>
+                <a:cs typeface="Amiri" pitchFamily="2" charset="-78"/>
               </a:rPr>
               <a:t>١. اِبْدَأِ التَّسْجِيلَ</a:t>
             </a:r>
@@ -25549,8 +25077,7 @@
                   <a:srgbClr val="5A6472"/>
                 </a:solidFill>
                 <a:latin typeface="Calibri" pitchFamily="34" charset="0"/>
-                <a:ea typeface="Calibri" pitchFamily="34" charset="-122"/>
-                <a:cs typeface="Calibri" pitchFamily="34" charset="-120"/>
+                <a:cs typeface="Amiri" pitchFamily="2" charset="-78"/>
               </a:rPr>
               <a:t>1. Start your recording — say your name and the date.</a:t>
             </a:r>
@@ -25610,9 +25137,8 @@
                 <a:solidFill>
                   <a:srgbClr val="1B3B6F"/>
                 </a:solidFill>
-                <a:latin typeface="Amiri" pitchFamily="34" charset="0"/>
-                <a:ea typeface="Amiri" pitchFamily="34" charset="-122"/>
-                <a:cs typeface="Amiri" pitchFamily="34" charset="-120"/>
+                <a:latin typeface="Amiri" pitchFamily="2" charset="-78"/>
+                <a:cs typeface="Amiri" pitchFamily="2" charset="-78"/>
               </a:rPr>
               <a:t>٢. اِسْتَمِعْ ثُمَّ أَجِبْ</a:t>
             </a:r>
@@ -25650,8 +25176,7 @@
                   <a:srgbClr val="5A6472"/>
                 </a:solidFill>
                 <a:latin typeface="Calibri" pitchFamily="34" charset="0"/>
-                <a:ea typeface="Calibri" pitchFamily="34" charset="-122"/>
-                <a:cs typeface="Calibri" pitchFamily="34" charset="-120"/>
+                <a:cs typeface="Amiri" pitchFamily="2" charset="-78"/>
               </a:rPr>
               <a:t>2. Listen to my prompt, then answer straight away.</a:t>
             </a:r>
@@ -25711,9 +25236,8 @@
                 <a:solidFill>
                   <a:srgbClr val="1B3B6F"/>
                 </a:solidFill>
-                <a:latin typeface="Amiri" pitchFamily="34" charset="0"/>
-                <a:ea typeface="Amiri" pitchFamily="34" charset="-122"/>
-                <a:cs typeface="Amiri" pitchFamily="34" charset="-120"/>
+                <a:latin typeface="Amiri" pitchFamily="2" charset="-78"/>
+                <a:cs typeface="Amiri" pitchFamily="2" charset="-78"/>
               </a:rPr>
               <a:t>٣. لَا صَمْتَ</a:t>
             </a:r>
@@ -25751,8 +25275,7 @@
                   <a:srgbClr val="5A6472"/>
                 </a:solidFill>
                 <a:latin typeface="Calibri" pitchFamily="34" charset="0"/>
-                <a:ea typeface="Calibri" pitchFamily="34" charset="-122"/>
-                <a:cs typeface="Calibri" pitchFamily="34" charset="-120"/>
+                <a:cs typeface="Amiri" pitchFamily="2" charset="-78"/>
               </a:rPr>
               <a:t>3. No silence: use a pause-and-think phrase.</a:t>
             </a:r>
@@ -25790,8 +25313,7 @@
                   <a:srgbClr val="8A93A0"/>
                 </a:solidFill>
                 <a:latin typeface="Calibri" pitchFamily="34" charset="0"/>
-                <a:ea typeface="Calibri" pitchFamily="34" charset="-122"/>
-                <a:cs typeface="Calibri" pitchFamily="34" charset="-120"/>
+                <a:cs typeface="Amiri" pitchFamily="2" charset="-78"/>
               </a:rPr>
               <a:t>7 / 17</a:t>
             </a:r>
@@ -25885,9 +25407,8 @@
                 <a:solidFill>
                   <a:srgbClr val="D4AF37"/>
                 </a:solidFill>
-                <a:latin typeface="Amiri" pitchFamily="34" charset="0"/>
-                <a:ea typeface="Amiri" pitchFamily="34" charset="-122"/>
-                <a:cs typeface="Amiri" pitchFamily="34" charset="-120"/>
+                <a:latin typeface="Amiri" pitchFamily="2" charset="-78"/>
+                <a:cs typeface="Amiri" pitchFamily="2" charset="-78"/>
               </a:rPr>
               <a:t>م</a:t>
             </a:r>
@@ -25925,8 +25446,7 @@
                   <a:srgbClr val="1B3B6F"/>
                 </a:solidFill>
                 <a:latin typeface="Cambria" pitchFamily="34" charset="0"/>
-                <a:ea typeface="Cambria" pitchFamily="34" charset="-122"/>
-                <a:cs typeface="Cambria" pitchFamily="34" charset="-120"/>
+                <a:cs typeface="Amiri" pitchFamily="2" charset="-78"/>
               </a:rPr>
               <a:t>Al Madina Online School</a:t>
             </a:r>
@@ -25964,8 +25484,7 @@
                   <a:srgbClr val="8A6D1E"/>
                 </a:solidFill>
                 <a:latin typeface="Calibri" pitchFamily="34" charset="0"/>
-                <a:ea typeface="Calibri" pitchFamily="34" charset="-122"/>
-                <a:cs typeface="Calibri" pitchFamily="34" charset="-120"/>
+                <a:cs typeface="Amiri" pitchFamily="2" charset="-78"/>
               </a:rPr>
               <a:t>ARABIC DEPARTMENT · MIFTAH ARABIC · IGCSE 0544</a:t>
             </a:r>
@@ -26030,8 +25549,7 @@
                   <a:srgbClr val="FFFFFF"/>
                 </a:solidFill>
                 <a:latin typeface="Calibri" pitchFamily="34" charset="0"/>
-                <a:ea typeface="Calibri" pitchFamily="34" charset="-122"/>
-                <a:cs typeface="Calibri" pitchFamily="34" charset="-120"/>
+                <a:cs typeface="Amiri" pitchFamily="2" charset="-78"/>
               </a:rPr>
               <a:t>P6-L10 · IGCSE Bridge</a:t>
             </a:r>
@@ -26096,8 +25614,7 @@
                   <a:srgbClr val="FFFFFF"/>
                 </a:solidFill>
                 <a:latin typeface="Calibri" pitchFamily="34" charset="0"/>
-                <a:ea typeface="Calibri" pitchFamily="34" charset="-122"/>
-                <a:cs typeface="Calibri" pitchFamily="34" charset="-120"/>
+                <a:cs typeface="Amiri" pitchFamily="2" charset="-78"/>
               </a:rPr>
               <a:t>TEACHER INSTRUCTION · 2 MIN</a:t>
             </a:r>
@@ -26135,8 +25652,7 @@
                   <a:srgbClr val="1B3B6F"/>
                 </a:solidFill>
                 <a:latin typeface="Calibri" pitchFamily="34" charset="0"/>
-                <a:ea typeface="Calibri" pitchFamily="34" charset="-122"/>
-                <a:cs typeface="Calibri" pitchFamily="34" charset="-120"/>
+                <a:cs typeface="Amiri" pitchFamily="2" charset="-78"/>
               </a:rPr>
               <a:t>TEACH · KNOW HOW YOU ARE MARKED</a:t>
             </a:r>
@@ -26174,8 +25690,7 @@
                   <a:srgbClr val="1B3B6F"/>
                 </a:solidFill>
                 <a:latin typeface="Cambria" pitchFamily="34" charset="0"/>
-                <a:ea typeface="Cambria" pitchFamily="34" charset="-122"/>
-                <a:cs typeface="Cambria" pitchFamily="34" charset="-120"/>
+                <a:cs typeface="Amiri" pitchFamily="2" charset="-78"/>
               </a:rPr>
               <a:t>The Paper 3 mark scheme: 30 marks</a:t>
             </a:r>
@@ -26212,9 +25727,8 @@
                 <a:solidFill>
                   <a:srgbClr val="8A6D1E"/>
                 </a:solidFill>
-                <a:latin typeface="Amiri" pitchFamily="34" charset="0"/>
-                <a:ea typeface="Amiri" pitchFamily="34" charset="-122"/>
-                <a:cs typeface="Amiri" pitchFamily="34" charset="-120"/>
+                <a:latin typeface="Amiri" pitchFamily="2" charset="-78"/>
+                <a:cs typeface="Amiri" pitchFamily="2" charset="-78"/>
               </a:rPr>
               <a:t>مِعْيَارُ الوَرَقَةِ الثَّالِثَةِ</a:t>
             </a:r>
@@ -26252,8 +25766,7 @@
                   <a:srgbClr val="8A93A0"/>
                 </a:solidFill>
                 <a:latin typeface="Calibri" pitchFamily="34" charset="0"/>
-                <a:ea typeface="Calibri" pitchFamily="34" charset="-122"/>
-                <a:cs typeface="Calibri" pitchFamily="34" charset="-120"/>
+                <a:cs typeface="Amiri" pitchFamily="2" charset="-78"/>
               </a:rPr>
               <a:t>Miftah Arabic · Progression P6 · IGCSE Bridge · P6-L10</a:t>
             </a:r>
@@ -26316,8 +25829,7 @@
                   <a:srgbClr val="FFFFFF"/>
                 </a:solidFill>
                 <a:latin typeface="Calibri" pitchFamily="34" charset="0"/>
-                <a:ea typeface="Calibri" pitchFamily="34" charset="-122"/>
-                <a:cs typeface="Calibri" pitchFamily="34" charset="-120"/>
+                <a:cs typeface="Amiri" pitchFamily="2" charset="-78"/>
               </a:rPr>
               <a:t>What the examiner looks for (website)</a:t>
             </a:r>
@@ -26355,8 +25867,7 @@
                   <a:srgbClr val="FFFFFF"/>
                 </a:solidFill>
                 <a:latin typeface="Calibri" pitchFamily="34" charset="0"/>
-                <a:ea typeface="Calibri" pitchFamily="34" charset="-122"/>
-                <a:cs typeface="Calibri" pitchFamily="34" charset="-120"/>
+                <a:cs typeface="Amiri" pitchFamily="2" charset="-78"/>
               </a:rPr>
               <a:t>Marks</a:t>
             </a:r>
@@ -26394,8 +25905,7 @@
                   <a:srgbClr val="FFFFFF"/>
                 </a:solidFill>
                 <a:latin typeface="Calibri" pitchFamily="34" charset="0"/>
-                <a:ea typeface="Calibri" pitchFamily="34" charset="-122"/>
-                <a:cs typeface="Calibri" pitchFamily="34" charset="-120"/>
+                <a:cs typeface="Amiri" pitchFamily="2" charset="-78"/>
               </a:rPr>
               <a:t>Criterion</a:t>
             </a:r>
@@ -26460,8 +25970,7 @@
                   <a:srgbClr val="5A6472"/>
                 </a:solidFill>
                 <a:latin typeface="Calibri" pitchFamily="34" charset="0"/>
-                <a:ea typeface="Calibri" pitchFamily="34" charset="-122"/>
-                <a:cs typeface="Calibri" pitchFamily="34" charset="-120"/>
+                <a:cs typeface="Amiri" pitchFamily="2" charset="-78"/>
               </a:rPr>
               <a:t>Communication (6): one mark per prompt successfully addressed. · Accuracy (4): overall language accuracy across the role play.</a:t>
             </a:r>
@@ -26499,8 +26008,7 @@
                   <a:srgbClr val="5A6472"/>
                 </a:solidFill>
                 <a:latin typeface="Calibri" pitchFamily="34" charset="0"/>
-                <a:ea typeface="Calibri" pitchFamily="34" charset="-122"/>
-                <a:cs typeface="Calibri" pitchFamily="34" charset="-120"/>
+                <a:cs typeface="Amiri" pitchFamily="2" charset="-78"/>
               </a:rPr>
               <a:t>10</a:t>
             </a:r>
@@ -26538,8 +26046,7 @@
                   <a:srgbClr val="5A6472"/>
                 </a:solidFill>
                 <a:latin typeface="Calibri" pitchFamily="34" charset="0"/>
-                <a:ea typeface="Calibri" pitchFamily="34" charset="-122"/>
-                <a:cs typeface="Calibri" pitchFamily="34" charset="-120"/>
+                <a:cs typeface="Amiri" pitchFamily="2" charset="-78"/>
               </a:rPr>
               <a:t>Role play</a:t>
             </a:r>
@@ -26604,8 +26111,7 @@
                   <a:srgbClr val="FFFFFF"/>
                 </a:solidFill>
                 <a:latin typeface="Calibri" pitchFamily="34" charset="0"/>
-                <a:ea typeface="Calibri" pitchFamily="34" charset="-122"/>
-                <a:cs typeface="Calibri" pitchFamily="34" charset="-120"/>
+                <a:cs typeface="Amiri" pitchFamily="2" charset="-78"/>
               </a:rPr>
               <a:t>CORE</a:t>
             </a:r>
@@ -26670,8 +26176,7 @@
                   <a:srgbClr val="5A6472"/>
                 </a:solidFill>
                 <a:latin typeface="Calibri" pitchFamily="34" charset="0"/>
-                <a:ea typeface="Calibri" pitchFamily="34" charset="-122"/>
-                <a:cs typeface="Calibri" pitchFamily="34" charset="-120"/>
+                <a:cs typeface="Amiri" pitchFamily="2" charset="-78"/>
               </a:rPr>
               <a:t>Communication (15): 5 per question — develop with opinion, reason and example. · Quality of Language (5): consistent complex structures — tenses, conditionals, subjunctives.</a:t>
             </a:r>
@@ -26709,8 +26214,7 @@
                   <a:srgbClr val="5A6472"/>
                 </a:solidFill>
                 <a:latin typeface="Calibri" pitchFamily="34" charset="0"/>
-                <a:ea typeface="Calibri" pitchFamily="34" charset="-122"/>
-                <a:cs typeface="Calibri" pitchFamily="34" charset="-120"/>
+                <a:cs typeface="Amiri" pitchFamily="2" charset="-78"/>
               </a:rPr>
               <a:t>20</a:t>
             </a:r>
@@ -26748,8 +26252,7 @@
                   <a:srgbClr val="5A6472"/>
                 </a:solidFill>
                 <a:latin typeface="Calibri" pitchFamily="34" charset="0"/>
-                <a:ea typeface="Calibri" pitchFamily="34" charset="-122"/>
-                <a:cs typeface="Calibri" pitchFamily="34" charset="-120"/>
+                <a:cs typeface="Amiri" pitchFamily="2" charset="-78"/>
               </a:rPr>
               <a:t>Topic conversation</a:t>
             </a:r>
@@ -26787,8 +26290,7 @@
                   <a:srgbClr val="1B3B6F"/>
                 </a:solidFill>
                 <a:latin typeface="Calibri" pitchFamily="34" charset="0"/>
-                <a:ea typeface="Calibri" pitchFamily="34" charset="-122"/>
-                <a:cs typeface="Calibri" pitchFamily="34" charset="-120"/>
+                <a:cs typeface="Amiri" pitchFamily="2" charset="-78"/>
               </a:rPr>
               <a:t>Role play: precise, not long. Topic conversation: develop every answer.</a:t>
             </a:r>
@@ -26826,8 +26328,7 @@
                   <a:srgbClr val="8A93A0"/>
                 </a:solidFill>
                 <a:latin typeface="Calibri" pitchFamily="34" charset="0"/>
-                <a:ea typeface="Calibri" pitchFamily="34" charset="-122"/>
-                <a:cs typeface="Calibri" pitchFamily="34" charset="-120"/>
+                <a:cs typeface="Amiri" pitchFamily="2" charset="-78"/>
               </a:rPr>
               <a:t>8 / 17</a:t>
             </a:r>
@@ -26921,9 +26422,8 @@
                 <a:solidFill>
                   <a:srgbClr val="D4AF37"/>
                 </a:solidFill>
-                <a:latin typeface="Amiri" pitchFamily="34" charset="0"/>
-                <a:ea typeface="Amiri" pitchFamily="34" charset="-122"/>
-                <a:cs typeface="Amiri" pitchFamily="34" charset="-120"/>
+                <a:latin typeface="Amiri" pitchFamily="2" charset="-78"/>
+                <a:cs typeface="Amiri" pitchFamily="2" charset="-78"/>
               </a:rPr>
               <a:t>م</a:t>
             </a:r>
@@ -26961,8 +26461,7 @@
                   <a:srgbClr val="1B3B6F"/>
                 </a:solidFill>
                 <a:latin typeface="Cambria" pitchFamily="34" charset="0"/>
-                <a:ea typeface="Cambria" pitchFamily="34" charset="-122"/>
-                <a:cs typeface="Cambria" pitchFamily="34" charset="-120"/>
+                <a:cs typeface="Amiri" pitchFamily="2" charset="-78"/>
               </a:rPr>
               <a:t>Al Madina Online School</a:t>
             </a:r>
@@ -27000,8 +26499,7 @@
                   <a:srgbClr val="8A6D1E"/>
                 </a:solidFill>
                 <a:latin typeface="Calibri" pitchFamily="34" charset="0"/>
-                <a:ea typeface="Calibri" pitchFamily="34" charset="-122"/>
-                <a:cs typeface="Calibri" pitchFamily="34" charset="-120"/>
+                <a:cs typeface="Amiri" pitchFamily="2" charset="-78"/>
               </a:rPr>
               <a:t>ARABIC DEPARTMENT · MIFTAH ARABIC · IGCSE 0544</a:t>
             </a:r>
@@ -27066,8 +26564,7 @@
                   <a:srgbClr val="FFFFFF"/>
                 </a:solidFill>
                 <a:latin typeface="Calibri" pitchFamily="34" charset="0"/>
-                <a:ea typeface="Calibri" pitchFamily="34" charset="-122"/>
-                <a:cs typeface="Calibri" pitchFamily="34" charset="-120"/>
+                <a:cs typeface="Amiri" pitchFamily="2" charset="-78"/>
               </a:rPr>
               <a:t>P6-L10 · IGCSE Bridge</a:t>
             </a:r>
@@ -27132,8 +26629,7 @@
                   <a:srgbClr val="FFFFFF"/>
                 </a:solidFill>
                 <a:latin typeface="Calibri" pitchFamily="34" charset="0"/>
-                <a:ea typeface="Calibri" pitchFamily="34" charset="-122"/>
-                <a:cs typeface="Calibri" pitchFamily="34" charset="-120"/>
+                <a:cs typeface="Amiri" pitchFamily="2" charset="-78"/>
               </a:rPr>
               <a:t>YOU DO · 7 MIN</a:t>
             </a:r>
@@ -27171,8 +26667,7 @@
                   <a:srgbClr val="1E6B52"/>
                 </a:solidFill>
                 <a:latin typeface="Calibri" pitchFamily="34" charset="0"/>
-                <a:ea typeface="Calibri" pitchFamily="34" charset="-122"/>
-                <a:cs typeface="Calibri" pitchFamily="34" charset="-120"/>
+                <a:cs typeface="Amiri" pitchFamily="2" charset="-78"/>
               </a:rPr>
               <a:t>MOCK · PAPER 3 · PART 1 — ROLE PLAY (10 MARKS) · ABOUT 5 MINUTES</a:t>
             </a:r>
@@ -27210,8 +26705,7 @@
                   <a:srgbClr val="1B3B6F"/>
                 </a:solidFill>
                 <a:latin typeface="Cambria" pitchFamily="34" charset="0"/>
-                <a:ea typeface="Cambria" pitchFamily="34" charset="-122"/>
-                <a:cs typeface="Cambria" pitchFamily="34" charset="-120"/>
+                <a:cs typeface="Amiri" pitchFamily="2" charset="-78"/>
               </a:rPr>
               <a:t>Part 1 — Role play at a cultural centre</a:t>
             </a:r>
@@ -27248,9 +26742,8 @@
                 <a:solidFill>
                   <a:srgbClr val="8A6D1E"/>
                 </a:solidFill>
-                <a:latin typeface="Amiri" pitchFamily="34" charset="0"/>
-                <a:ea typeface="Amiri" pitchFamily="34" charset="-122"/>
-                <a:cs typeface="Amiri" pitchFamily="34" charset="-120"/>
+                <a:latin typeface="Amiri" pitchFamily="2" charset="-78"/>
+                <a:cs typeface="Amiri" pitchFamily="2" charset="-78"/>
               </a:rPr>
               <a:t>تَمْثِيلُ الدَّوْرِ</a:t>
             </a:r>
@@ -27288,8 +26781,7 @@
                   <a:srgbClr val="8A93A0"/>
                 </a:solidFill>
                 <a:latin typeface="Calibri" pitchFamily="34" charset="0"/>
-                <a:ea typeface="Calibri" pitchFamily="34" charset="-122"/>
-                <a:cs typeface="Calibri" pitchFamily="34" charset="-120"/>
+                <a:cs typeface="Amiri" pitchFamily="2" charset="-78"/>
               </a:rPr>
               <a:t>Miftah Arabic · Progression P6 · IGCSE Bridge · P6-L10</a:t>
             </a:r>
@@ -27352,8 +26844,7 @@
                   <a:srgbClr val="FFFFFF"/>
                 </a:solidFill>
                 <a:latin typeface="Calibri" pitchFamily="34" charset="0"/>
-                <a:ea typeface="Calibri" pitchFamily="34" charset="-122"/>
-                <a:cs typeface="Calibri" pitchFamily="34" charset="-120"/>
+                <a:cs typeface="Amiri" pitchFamily="2" charset="-78"/>
               </a:rPr>
               <a:t>Time to answer</a:t>
             </a:r>
@@ -27391,8 +26882,7 @@
                   <a:srgbClr val="FFFFFF"/>
                 </a:solidFill>
                 <a:latin typeface="Calibri" pitchFamily="34" charset="0"/>
-                <a:ea typeface="Calibri" pitchFamily="34" charset="-122"/>
-                <a:cs typeface="Calibri" pitchFamily="34" charset="-120"/>
+                <a:cs typeface="Amiri" pitchFamily="2" charset="-78"/>
               </a:rPr>
               <a:t>Meaning</a:t>
             </a:r>
@@ -27430,8 +26920,7 @@
                   <a:srgbClr val="FFFFFF"/>
                 </a:solidFill>
                 <a:latin typeface="Calibri" pitchFamily="34" charset="0"/>
-                <a:ea typeface="Calibri" pitchFamily="34" charset="-122"/>
-                <a:cs typeface="Calibri" pitchFamily="34" charset="-120"/>
+                <a:cs typeface="Amiri" pitchFamily="2" charset="-78"/>
               </a:rPr>
               <a:t>Prompt (website)</a:t>
             </a:r>
@@ -27496,8 +26985,7 @@
                   <a:srgbClr val="5A6472"/>
                 </a:solidFill>
                 <a:latin typeface="Calibri" pitchFamily="34" charset="0"/>
-                <a:ea typeface="Calibri" pitchFamily="34" charset="-122"/>
-                <a:cs typeface="Calibri" pitchFamily="34" charset="-120"/>
+                <a:cs typeface="Amiri" pitchFamily="2" charset="-78"/>
               </a:rPr>
               <a:t>30–40 seconds</a:t>
             </a:r>
@@ -27535,8 +27023,7 @@
                   <a:srgbClr val="5A6472"/>
                 </a:solidFill>
                 <a:latin typeface="Calibri" pitchFamily="34" charset="0"/>
-                <a:ea typeface="Calibri" pitchFamily="34" charset="-122"/>
-                <a:cs typeface="Calibri" pitchFamily="34" charset="-120"/>
+                <a:cs typeface="Amiri" pitchFamily="2" charset="-78"/>
               </a:rPr>
               <a:t>Introduce yourself and your interests.</a:t>
             </a:r>
@@ -27573,9 +27060,8 @@
                 <a:solidFill>
                   <a:srgbClr val="1B3B6F"/>
                 </a:solidFill>
-                <a:latin typeface="Amiri" pitchFamily="34" charset="0"/>
-                <a:ea typeface="Amiri" pitchFamily="34" charset="-122"/>
-                <a:cs typeface="Amiri" pitchFamily="34" charset="-120"/>
+                <a:latin typeface="Amiri" pitchFamily="2" charset="-78"/>
+                <a:cs typeface="Amiri" pitchFamily="2" charset="-78"/>
               </a:rPr>
               <a:t>أَنْتَ فِي مَرْكَزٍ ثَقَافِيٍّ: عَرِّفْ بِنَفْسِكَ وَاهْتِمَامَاتِكَ.</a:t>
             </a:r>
@@ -27640,8 +27126,7 @@
                   <a:srgbClr val="5A6472"/>
                 </a:solidFill>
                 <a:latin typeface="Calibri" pitchFamily="34" charset="0"/>
-                <a:ea typeface="Calibri" pitchFamily="34" charset="-122"/>
-                <a:cs typeface="Calibri" pitchFamily="34" charset="-120"/>
+                <a:cs typeface="Amiri" pitchFamily="2" charset="-78"/>
               </a:rPr>
               <a:t>30–40 seconds</a:t>
             </a:r>
@@ -27679,8 +27164,7 @@
                   <a:srgbClr val="5A6472"/>
                 </a:solidFill>
                 <a:latin typeface="Calibri" pitchFamily="34" charset="0"/>
-                <a:ea typeface="Calibri" pitchFamily="34" charset="-122"/>
-                <a:cs typeface="Calibri" pitchFamily="34" charset="-120"/>
+                <a:cs typeface="Amiri" pitchFamily="2" charset="-78"/>
               </a:rPr>
               <a:t>Ask about the available activities.</a:t>
             </a:r>
@@ -27717,9 +27201,8 @@
                 <a:solidFill>
                   <a:srgbClr val="1B3B6F"/>
                 </a:solidFill>
-                <a:latin typeface="Amiri" pitchFamily="34" charset="0"/>
-                <a:ea typeface="Amiri" pitchFamily="34" charset="-122"/>
-                <a:cs typeface="Amiri" pitchFamily="34" charset="-120"/>
+                <a:latin typeface="Amiri" pitchFamily="2" charset="-78"/>
+                <a:cs typeface="Amiri" pitchFamily="2" charset="-78"/>
               </a:rPr>
               <a:t>اسْأَلْ عَنِ الأَنْشِطَةِ المُتَاحَةِ.</a:t>
             </a:r>
@@ -27784,8 +27267,7 @@
                   <a:srgbClr val="5A6472"/>
                 </a:solidFill>
                 <a:latin typeface="Calibri" pitchFamily="34" charset="0"/>
-                <a:ea typeface="Calibri" pitchFamily="34" charset="-122"/>
-                <a:cs typeface="Calibri" pitchFamily="34" charset="-120"/>
+                <a:cs typeface="Amiri" pitchFamily="2" charset="-78"/>
               </a:rPr>
               <a:t>30–40 seconds</a:t>
             </a:r>
@@ -27823,8 +27305,7 @@
                   <a:srgbClr val="5A6472"/>
                 </a:solidFill>
                 <a:latin typeface="Calibri" pitchFamily="34" charset="0"/>
-                <a:ea typeface="Calibri" pitchFamily="34" charset="-122"/>
-                <a:cs typeface="Calibri" pitchFamily="34" charset="-120"/>
+                <a:cs typeface="Amiri" pitchFamily="2" charset="-78"/>
               </a:rPr>
               <a:t>Suggest a new activity and explain its benefit (subjunctive trigger).</a:t>
             </a:r>
@@ -27861,9 +27342,8 @@
                 <a:solidFill>
                   <a:srgbClr val="1B3B6F"/>
                 </a:solidFill>
-                <a:latin typeface="Amiri" pitchFamily="34" charset="0"/>
-                <a:ea typeface="Amiri" pitchFamily="34" charset="-122"/>
-                <a:cs typeface="Amiri" pitchFamily="34" charset="-120"/>
+                <a:latin typeface="Amiri" pitchFamily="2" charset="-78"/>
+                <a:cs typeface="Amiri" pitchFamily="2" charset="-78"/>
               </a:rPr>
               <a:t>اقْتَرِحْ نَشَاطًا جَدِيدًا وَاشْرَحْ فَائِدَتَهُ (مُسَبِّبُ نَصْبٍ).</a:t>
             </a:r>
@@ -27928,8 +27408,7 @@
                   <a:srgbClr val="5A6472"/>
                 </a:solidFill>
                 <a:latin typeface="Calibri" pitchFamily="34" charset="0"/>
-                <a:ea typeface="Calibri" pitchFamily="34" charset="-122"/>
-                <a:cs typeface="Calibri" pitchFamily="34" charset="-120"/>
+                <a:cs typeface="Amiri" pitchFamily="2" charset="-78"/>
               </a:rPr>
               <a:t>30–40 seconds</a:t>
             </a:r>
@@ -27967,8 +27446,7 @@
                   <a:srgbClr val="5A6472"/>
                 </a:solidFill>
                 <a:latin typeface="Calibri" pitchFamily="34" charset="0"/>
-                <a:ea typeface="Calibri" pitchFamily="34" charset="-122"/>
-                <a:cs typeface="Calibri" pitchFamily="34" charset="-120"/>
+                <a:cs typeface="Amiri" pitchFamily="2" charset="-78"/>
               </a:rPr>
               <a:t>Agree on a registration time (conditional).</a:t>
             </a:r>
@@ -28005,9 +27483,8 @@
                 <a:solidFill>
                   <a:srgbClr val="1B3B6F"/>
                 </a:solidFill>
-                <a:latin typeface="Amiri" pitchFamily="34" charset="0"/>
-                <a:ea typeface="Amiri" pitchFamily="34" charset="-122"/>
-                <a:cs typeface="Amiri" pitchFamily="34" charset="-120"/>
+                <a:latin typeface="Amiri" pitchFamily="2" charset="-78"/>
+                <a:cs typeface="Amiri" pitchFamily="2" charset="-78"/>
               </a:rPr>
               <a:t>اتَّفِقْ عَلَى مَوْعِدِ التَّسْجِيلِ (شَرْطٌ).</a:t>
             </a:r>
@@ -28045,8 +27522,7 @@
                   <a:srgbClr val="1B3B6F"/>
                 </a:solidFill>
                 <a:latin typeface="Calibri" pitchFamily="34" charset="0"/>
-                <a:ea typeface="Calibri" pitchFamily="34" charset="-122"/>
-                <a:cs typeface="Calibri" pitchFamily="34" charset="-120"/>
+                <a:cs typeface="Amiri" pitchFamily="2" charset="-78"/>
               </a:rPr>
               <a:t>Marks (website): Communication 6 · Accuracy 4. One prompt = one mark — a full, relevant sentence each time.</a:t>
             </a:r>
@@ -28084,8 +27560,7 @@
                   <a:srgbClr val="8A93A0"/>
                 </a:solidFill>
                 <a:latin typeface="Calibri" pitchFamily="34" charset="0"/>
-                <a:ea typeface="Calibri" pitchFamily="34" charset="-122"/>
-                <a:cs typeface="Calibri" pitchFamily="34" charset="-120"/>
+                <a:cs typeface="Amiri" pitchFamily="2" charset="-78"/>
               </a:rPr>
               <a:t>9 / 17</a:t>
             </a:r>

--- a/Progression_P6/P6-L10_Mock_Paper_3_Speaking.pptx
+++ b/Progression_P6/P6-L10_Mock_Paper_3_Speaking.pptx
@@ -615,7 +615,11 @@
           <a:lstStyle/>
           <a:p>
             <a:r>
-              <a:rPr lang="en-US" dirty="0"/>
+              <a:rPr lang="ar-SA" dirty="0">
+                <a:latin typeface="Amiri" pitchFamily="2" charset="-78"/>
+                <a:ea typeface="Amiri" pitchFamily="2" charset="-78"/>
+                <a:cs typeface="Amiri" pitchFamily="2" charset="-78"/>
+              </a:rPr>
               <a:t>EXAMINER: read each question twice, then allow about 2 minutes. If a student stops early in a live examination, prompt once: لِمَاذَا؟ · هَلْ عِنْدَكَ مِثَالٌ؟ — as the real examiner may.
 WEBSITE MODEL: Examiner: هَلْ تُعَمِّقُ التِّقْنِيَّةُ العُزْلَةَ؟ (Question 2) · You: صَحِيحٌ أَنَّ التِّقْنِيَّةَ تُقَرِّبُ البَعِيدَ، غَيْرَ أَنَّهَا قَدْ تُبْعِدُ القَرِيبَ. وَلَوِ اسْتَخْدَمْنَاهَا بِوَعْيٍ، لَحَقَّقْنَا التَّوَازُنَ. (Concession-refutation + Type 2)
 Website feedback prompt: Feedback note (which structures appeared spontaneously?)</a:t>
@@ -793,7 +797,11 @@
           <a:lstStyle/>
           <a:p>
             <a:r>
-              <a:rPr lang="en-US" dirty="0"/>
+              <a:rPr lang="ar-SA" dirty="0">
+                <a:latin typeface="Amiri" pitchFamily="2" charset="-78"/>
+                <a:ea typeface="Amiri" pitchFamily="2" charset="-78"/>
+                <a:cs typeface="Amiri" pitchFamily="2" charset="-78"/>
+              </a:rPr>
               <a:t>MODELS (3 min) — website models for role-play prompt 1 and conversation question 2. Note the elegant contrast تُقَرِّبُ البَعِيدَ … تُبْعِدُ القَرِيبَ (brings the far near … pushes the near away) — students may borrow it.</a:t>
             </a:r>
             <a:endParaRPr lang="en-US" dirty="0"/>
@@ -1326,7 +1334,11 @@
           <a:lstStyle/>
           <a:p>
             <a:r>
-              <a:rPr lang="en-US" dirty="0"/>
+              <a:rPr lang="ar-SA" dirty="0">
+                <a:latin typeface="Amiri" pitchFamily="2" charset="-78"/>
+                <a:ea typeface="Amiri" pitchFamily="2" charset="-78"/>
+                <a:cs typeface="Amiri" pitchFamily="2" charset="-78"/>
+              </a:rPr>
               <a:t>WELCOME (1 min) — while students join.
 • Greet each student by name as they arrive: السَّلَامُ عَلَيْكُمْ. Take the register (Pastoral Tracker: attendance 0/1).
 • 2-MINUTE CHECK-IN (SEND training): a private chat to any student who seemed unsettled last lesson — “Are you okay today? 👍 / 👎”.
@@ -1959,7 +1971,11 @@
           <a:lstStyle/>
           <a:p>
             <a:r>
-              <a:rPr lang="en-US" dirty="0"/>
+              <a:rPr lang="ar-SA" dirty="0">
+                <a:latin typeface="Amiri" pitchFamily="2" charset="-78"/>
+                <a:ea typeface="Amiri" pitchFamily="2" charset="-78"/>
+                <a:cs typeface="Amiri" pitchFamily="2" charset="-78"/>
+              </a:rPr>
               <a:t>EXAMINER SCRIPT — read each prompt as a question, then wait 30–40 seconds: (1) أَهْلًا بِكَ فِي المَرْكَزِ الثَّقَافِيِّ. عَرِّفْنَا بِنَفْسِكَ وَبِاهْتِمَامَاتِكَ. (2) مَاذَا تُرِيدُ أَنْ تَعْرِفَ عَنْ أَنْشِطَتِنَا؟ (3) هَلْ عِنْدَكَ اقْتِرَاحٌ لِنَشَاطٍ جَدِيدٍ؟ مَا فَائِدَتُهُ؟ (4) مَتَى تُرِيدُ أَنْ تُسَجِّلَ؟ Prompts 3 and 4 name the structure (a subjunctive trigger · a conditional).
 WEBSITE MODEL: Examiner: عَرِّفْ بِنَفْسِكَ. (Prompt 1) · You: اسْمِي سَامِي، وَأُحِبُّ القِرَاءَةَ وَكُرَةَ القَدَمِ، وَأَرْغَبُ فِي تَعَلُّمِ مَهَارَاتٍ جَدِيدَةٍ. (Full-sentence response)
 Website feedback prompt: Feedback note (which prompt was hardest? which structure worked?)</a:t>
@@ -2445,6 +2461,7 @@
                   <a:srgbClr val="D4AF37"/>
                 </a:solidFill>
                 <a:latin typeface="Amiri" pitchFamily="2" charset="-78"/>
+                <a:ea typeface="Amiri" pitchFamily="2" charset="-78"/>
                 <a:cs typeface="Amiri" pitchFamily="2" charset="-78"/>
               </a:rPr>
               <a:t>م</a:t>
@@ -2651,6 +2668,7 @@
                   <a:srgbClr val="D4AF37"/>
                 </a:solidFill>
                 <a:latin typeface="Amiri" pitchFamily="2" charset="-78"/>
+                <a:ea typeface="Amiri" pitchFamily="2" charset="-78"/>
                 <a:cs typeface="Amiri" pitchFamily="2" charset="-78"/>
               </a:rPr>
               <a:t>امْتِحَانُ المُحَاكَاةِ — الوَرَقَةُ الثَّالِثَةُ: التَّحَدُّثُ</a:t>
@@ -3108,6 +3126,7 @@
                   <a:srgbClr val="D4AF37"/>
                 </a:solidFill>
                 <a:latin typeface="Amiri" pitchFamily="2" charset="-78"/>
+                <a:ea typeface="Amiri" pitchFamily="2" charset="-78"/>
                 <a:cs typeface="Amiri" pitchFamily="2" charset="-78"/>
               </a:rPr>
               <a:t>م</a:t>
@@ -3428,6 +3447,7 @@
                   <a:srgbClr val="8A6D1E"/>
                 </a:solidFill>
                 <a:latin typeface="Amiri" pitchFamily="2" charset="-78"/>
+                <a:ea typeface="Amiri" pitchFamily="2" charset="-78"/>
                 <a:cs typeface="Amiri" pitchFamily="2" charset="-78"/>
               </a:rPr>
               <a:t>المُحَادَثَةُ المَوْضُوعِيَّةُ</a:t>
@@ -3749,6 +3769,7 @@
                   <a:srgbClr val="1B3B6F"/>
                 </a:solidFill>
                 <a:latin typeface="Amiri" pitchFamily="2" charset="-78"/>
+                <a:ea typeface="Amiri" pitchFamily="2" charset="-78"/>
                 <a:cs typeface="Amiri" pitchFamily="2" charset="-78"/>
               </a:rPr>
               <a:t>مَا أَكْبَرُ تَحَدٍّ اجْتِمَاعِيٍّ يُوَاجِهُ الشَّبَابَ اليَوْمَ؟ وَلِمَاذَا؟</a:t>
@@ -3890,6 +3911,7 @@
                   <a:srgbClr val="1B3B6F"/>
                 </a:solidFill>
                 <a:latin typeface="Amiri" pitchFamily="2" charset="-78"/>
+                <a:ea typeface="Amiri" pitchFamily="2" charset="-78"/>
                 <a:cs typeface="Amiri" pitchFamily="2" charset="-78"/>
               </a:rPr>
               <a:t>هَلْ تُعَمِّقُ التِّقْنِيَّةُ العُزْلَةَ أَمْ تُقَلِّلُهَا؟</a:t>
@@ -4031,6 +4053,7 @@
                   <a:srgbClr val="1B3B6F"/>
                 </a:solidFill>
                 <a:latin typeface="Amiri" pitchFamily="2" charset="-78"/>
+                <a:ea typeface="Amiri" pitchFamily="2" charset="-78"/>
                 <a:cs typeface="Amiri" pitchFamily="2" charset="-78"/>
               </a:rPr>
               <a:t>لَوْ كُنْتَ مَسْؤُولًا عَنِ التَّعْلِيمِ، مَاذَا كُنْتَ سَتُغَيِّرُ؟</a:t>
@@ -4202,6 +4225,7 @@
                   <a:srgbClr val="D4AF37"/>
                 </a:solidFill>
                 <a:latin typeface="Amiri" pitchFamily="2" charset="-78"/>
+                <a:ea typeface="Amiri" pitchFamily="2" charset="-78"/>
                 <a:cs typeface="Amiri" pitchFamily="2" charset="-78"/>
               </a:rPr>
               <a:t>م</a:t>
@@ -4522,6 +4546,7 @@
                   <a:srgbClr val="8A6D1E"/>
                 </a:solidFill>
                 <a:latin typeface="Amiri" pitchFamily="2" charset="-78"/>
+                <a:ea typeface="Amiri" pitchFamily="2" charset="-78"/>
                 <a:cs typeface="Amiri" pitchFamily="2" charset="-78"/>
               </a:rPr>
               <a:t>قَيِّمْ تَسْجِيلَكَ</a:t>
@@ -5674,6 +5699,7 @@
                   <a:srgbClr val="D4AF37"/>
                 </a:solidFill>
                 <a:latin typeface="Amiri" pitchFamily="2" charset="-78"/>
+                <a:ea typeface="Amiri" pitchFamily="2" charset="-78"/>
                 <a:cs typeface="Amiri" pitchFamily="2" charset="-78"/>
               </a:rPr>
               <a:t>م</a:t>
@@ -5994,6 +6020,7 @@
                   <a:srgbClr val="8A6D1E"/>
                 </a:solidFill>
                 <a:latin typeface="Amiri" pitchFamily="2" charset="-78"/>
+                <a:ea typeface="Amiri" pitchFamily="2" charset="-78"/>
                 <a:cs typeface="Amiri" pitchFamily="2" charset="-78"/>
               </a:rPr>
               <a:t>نَمُوذَجُ الإِجَابَةِ</a:t>
@@ -6107,6 +6134,7 @@
                   <a:srgbClr val="1F2A37"/>
                 </a:solidFill>
                 <a:latin typeface="Amiri" pitchFamily="2" charset="-78"/>
+                <a:ea typeface="Amiri" pitchFamily="2" charset="-78"/>
                 <a:cs typeface="Amiri" pitchFamily="2" charset="-78"/>
               </a:rPr>
               <a:t>اسْمِي سَامِي، وَأُحِبُّ القِرَاءَةَ وَكُرَةَ القَدَمِ، وَأَرْغَبُ فِي تَعَلُّمِ مَهَارَاتٍ جَدِيدَةٍ.</a:t>
@@ -6135,6 +6163,7 @@
                   <a:srgbClr val="1F2A37"/>
                 </a:solidFill>
                 <a:latin typeface="Amiri" pitchFamily="2" charset="-78"/>
+                <a:ea typeface="Amiri" pitchFamily="2" charset="-78"/>
                 <a:cs typeface="Amiri" pitchFamily="2" charset="-78"/>
               </a:rPr>
               <a:t>صَحِيحٌ أَنَّ التِّقْنِيَّةَ تُقَرِّبُ البَعِيدَ، غَيْرَ أَنَّهَا قَدْ تُبْعِدُ القَرِيبَ. وَلَوِ اسْتَخْدَمْنَاهَا بِوَعْيٍ، لَحَقَّقْنَا التَّوَازُنَ.</a:t>
@@ -6298,11 +6327,12 @@
               <a:buNone/>
             </a:pPr>
             <a:r>
-              <a:rPr lang="en-US" sz="950" b="1" dirty="0">
+              <a:rPr lang="ar-SA" sz="950" b="1" dirty="0">
                 <a:solidFill>
                   <a:srgbClr val="FFFFFF"/>
                 </a:solidFill>
                 <a:latin typeface="Calibri" pitchFamily="34" charset="0"/>
+                <a:ea typeface="Amiri" pitchFamily="2" charset="-78"/>
                 <a:cs typeface="Amiri" pitchFamily="2" charset="-78"/>
               </a:rPr>
               <a:t>وَأَرْغَبُ فِي</a:t>
@@ -6363,11 +6393,12 @@
               <a:buNone/>
             </a:pPr>
             <a:r>
-              <a:rPr lang="en-US" sz="950" b="1" dirty="0">
+              <a:rPr lang="ar-SA" sz="950" b="1" dirty="0">
                 <a:solidFill>
                   <a:srgbClr val="FFFFFF"/>
                 </a:solidFill>
                 <a:latin typeface="Calibri" pitchFamily="34" charset="0"/>
+                <a:ea typeface="Amiri" pitchFamily="2" charset="-78"/>
                 <a:cs typeface="Amiri" pitchFamily="2" charset="-78"/>
               </a:rPr>
               <a:t>صَحِيحٌ أَنَّ … غَيْرَ أَنَّ</a:t>
@@ -6428,11 +6459,12 @@
               <a:buNone/>
             </a:pPr>
             <a:r>
-              <a:rPr lang="en-US" sz="950" b="1" dirty="0">
+              <a:rPr lang="ar-SA" sz="950" b="1" dirty="0">
                 <a:solidFill>
                   <a:srgbClr val="FFFFFF"/>
                 </a:solidFill>
                 <a:latin typeface="Calibri" pitchFamily="34" charset="0"/>
+                <a:ea typeface="Amiri" pitchFamily="2" charset="-78"/>
                 <a:cs typeface="Amiri" pitchFamily="2" charset="-78"/>
               </a:rPr>
               <a:t>لَوِ اسْتَخْدَمْنَاهَا</a:t>
@@ -6493,11 +6525,12 @@
               <a:buNone/>
             </a:pPr>
             <a:r>
-              <a:rPr lang="en-US" sz="950" b="1" dirty="0">
+              <a:rPr lang="ar-SA" sz="950" b="1" dirty="0">
                 <a:solidFill>
                   <a:srgbClr val="FFFFFF"/>
                 </a:solidFill>
                 <a:latin typeface="Calibri" pitchFamily="34" charset="0"/>
+                <a:ea typeface="Amiri" pitchFamily="2" charset="-78"/>
                 <a:cs typeface="Amiri" pitchFamily="2" charset="-78"/>
               </a:rPr>
               <a:t>لَحَقَّقْنَا</a:t>
@@ -6631,6 +6664,7 @@
                   <a:srgbClr val="D4AF37"/>
                 </a:solidFill>
                 <a:latin typeface="Amiri" pitchFamily="2" charset="-78"/>
+                <a:ea typeface="Amiri" pitchFamily="2" charset="-78"/>
                 <a:cs typeface="Amiri" pitchFamily="2" charset="-78"/>
               </a:rPr>
               <a:t>م</a:t>
@@ -6951,6 +6985,7 @@
                   <a:srgbClr val="8A6D1E"/>
                 </a:solidFill>
                 <a:latin typeface="Amiri" pitchFamily="2" charset="-78"/>
+                <a:ea typeface="Amiri" pitchFamily="2" charset="-78"/>
                 <a:cs typeface="Amiri" pitchFamily="2" charset="-78"/>
               </a:rPr>
               <a:t>سَجِّلْ نَتِيجَتَكَ</a:t>
@@ -7993,6 +8028,7 @@
                   <a:srgbClr val="D4AF37"/>
                 </a:solidFill>
                 <a:latin typeface="Amiri" pitchFamily="2" charset="-78"/>
+                <a:ea typeface="Amiri" pitchFamily="2" charset="-78"/>
                 <a:cs typeface="Amiri" pitchFamily="2" charset="-78"/>
               </a:rPr>
               <a:t>م</a:t>
@@ -8313,6 +8349,7 @@
                   <a:srgbClr val="8A6D1E"/>
                 </a:solidFill>
                 <a:latin typeface="Amiri" pitchFamily="2" charset="-78"/>
+                <a:ea typeface="Amiri" pitchFamily="2" charset="-78"/>
                 <a:cs typeface="Amiri" pitchFamily="2" charset="-78"/>
               </a:rPr>
               <a:t>التَّأَمُّلُ</a:t>
@@ -8943,6 +8980,7 @@
                   <a:srgbClr val="D4AF37"/>
                 </a:solidFill>
                 <a:latin typeface="Amiri" pitchFamily="2" charset="-78"/>
+                <a:ea typeface="Amiri" pitchFamily="2" charset="-78"/>
                 <a:cs typeface="Amiri" pitchFamily="2" charset="-78"/>
               </a:rPr>
               <a:t>م</a:t>
@@ -9263,6 +9301,7 @@
                   <a:srgbClr val="8A6D1E"/>
                 </a:solidFill>
                 <a:latin typeface="Amiri" pitchFamily="2" charset="-78"/>
+                <a:ea typeface="Amiri" pitchFamily="2" charset="-78"/>
                 <a:cs typeface="Amiri" pitchFamily="2" charset="-78"/>
               </a:rPr>
               <a:t>قَيِّمْ عَمَلَكَ</a:t>
@@ -10258,6 +10297,7 @@
                   <a:srgbClr val="D4AF37"/>
                 </a:solidFill>
                 <a:latin typeface="Amiri" pitchFamily="2" charset="-78"/>
+                <a:ea typeface="Amiri" pitchFamily="2" charset="-78"/>
                 <a:cs typeface="Amiri" pitchFamily="2" charset="-78"/>
               </a:rPr>
               <a:t>م</a:t>
@@ -10578,6 +10618,7 @@
                   <a:srgbClr val="8A6D1E"/>
                 </a:solidFill>
                 <a:latin typeface="Amiri" pitchFamily="2" charset="-78"/>
+                <a:ea typeface="Amiri" pitchFamily="2" charset="-78"/>
                 <a:cs typeface="Amiri" pitchFamily="2" charset="-78"/>
               </a:rPr>
               <a:t>التَّحْضِيرُ لِلدَّرْسِ القَادِمِ</a:t>
@@ -10791,6 +10832,7 @@
                   <a:srgbClr val="1B3B6F"/>
                 </a:solidFill>
                 <a:latin typeface="Amiri" pitchFamily="2" charset="-78"/>
+                <a:ea typeface="Amiri" pitchFamily="2" charset="-78"/>
                 <a:cs typeface="Amiri" pitchFamily="2" charset="-78"/>
               </a:rPr>
               <a:t>المُرَاجَعَةُ</a:t>
@@ -10837,11 +10879,12 @@
               <a:buNone/>
             </a:pPr>
             <a:r>
-              <a:rPr lang="en-US" sz="1000" i="1" dirty="0">
+              <a:rPr lang="ar-SA" sz="1000" i="1" dirty="0">
                 <a:solidFill>
                   <a:srgbClr val="5A6472"/>
                 </a:solidFill>
                 <a:latin typeface="Calibri" pitchFamily="34" charset="0"/>
+                <a:ea typeface="Amiri" pitchFamily="2" charset="-78"/>
                 <a:cs typeface="Amiri" pitchFamily="2" charset="-78"/>
               </a:rPr>
               <a:t>  v. رَاجَعَ</a:t>
@@ -10880,6 +10923,7 @@
                   <a:srgbClr val="1B3B6F"/>
                 </a:solidFill>
                 <a:latin typeface="Amiri" pitchFamily="2" charset="-78"/>
+                <a:ea typeface="Amiri" pitchFamily="2" charset="-78"/>
                 <a:cs typeface="Amiri" pitchFamily="2" charset="-78"/>
               </a:rPr>
               <a:t>نِقَاطُ القُوَّةِ</a:t>
@@ -10926,11 +10970,12 @@
               <a:buNone/>
             </a:pPr>
             <a:r>
-              <a:rPr lang="en-US" sz="1000" i="1" dirty="0">
+              <a:rPr lang="ar-SA" sz="1000" i="1" dirty="0">
                 <a:solidFill>
                   <a:srgbClr val="5A6472"/>
                 </a:solidFill>
                 <a:latin typeface="Calibri" pitchFamily="34" charset="0"/>
+                <a:ea typeface="Amiri" pitchFamily="2" charset="-78"/>
                 <a:cs typeface="Amiri" pitchFamily="2" charset="-78"/>
               </a:rPr>
               <a:t>  sg. نُقْطَةُ قُوَّةٍ</a:t>
@@ -10969,6 +11014,7 @@
                   <a:srgbClr val="1B3B6F"/>
                 </a:solidFill>
                 <a:latin typeface="Amiri" pitchFamily="2" charset="-78"/>
+                <a:ea typeface="Amiri" pitchFamily="2" charset="-78"/>
                 <a:cs typeface="Amiri" pitchFamily="2" charset="-78"/>
               </a:rPr>
               <a:t>نِقَاطُ الضَّعْفِ</a:t>
@@ -11015,11 +11061,12 @@
               <a:buNone/>
             </a:pPr>
             <a:r>
-              <a:rPr lang="en-US" sz="1000" i="1" dirty="0">
+              <a:rPr lang="ar-SA" sz="1000" i="1" dirty="0">
                 <a:solidFill>
                   <a:srgbClr val="5A6472"/>
                 </a:solidFill>
                 <a:latin typeface="Calibri" pitchFamily="34" charset="0"/>
+                <a:ea typeface="Amiri" pitchFamily="2" charset="-78"/>
                 <a:cs typeface="Amiri" pitchFamily="2" charset="-78"/>
               </a:rPr>
               <a:t>  sg. نُقْطَةُ ضَعْفٍ</a:t>
@@ -11058,6 +11105,7 @@
                   <a:srgbClr val="1B3B6F"/>
                 </a:solidFill>
                 <a:latin typeface="Amiri" pitchFamily="2" charset="-78"/>
+                <a:ea typeface="Amiri" pitchFamily="2" charset="-78"/>
                 <a:cs typeface="Amiri" pitchFamily="2" charset="-78"/>
               </a:rPr>
               <a:t>الأَخْطَاءُ الشَّائِعَةُ</a:t>
@@ -11104,11 +11152,12 @@
               <a:buNone/>
             </a:pPr>
             <a:r>
-              <a:rPr lang="en-US" sz="1000" i="1" dirty="0">
+              <a:rPr lang="ar-SA" sz="1000" i="1" dirty="0">
                 <a:solidFill>
                   <a:srgbClr val="5A6472"/>
                 </a:solidFill>
                 <a:latin typeface="Calibri" pitchFamily="34" charset="0"/>
+                <a:ea typeface="Amiri" pitchFamily="2" charset="-78"/>
                 <a:cs typeface="Amiri" pitchFamily="2" charset="-78"/>
               </a:rPr>
               <a:t>  sg. خَطَأٌ شَائِعٌ</a:t>
@@ -11147,6 +11196,7 @@
                   <a:srgbClr val="1B3B6F"/>
                 </a:solidFill>
                 <a:latin typeface="Amiri" pitchFamily="2" charset="-78"/>
+                <a:ea typeface="Amiri" pitchFamily="2" charset="-78"/>
                 <a:cs typeface="Amiri" pitchFamily="2" charset="-78"/>
               </a:rPr>
               <a:t>خُطَّةُ المُرَاجَعَةِ</a:t>
@@ -11193,11 +11243,12 @@
               <a:buNone/>
             </a:pPr>
             <a:r>
-              <a:rPr lang="en-US" sz="1000" i="1" dirty="0">
+              <a:rPr lang="ar-SA" sz="1000" i="1" dirty="0">
                 <a:solidFill>
                   <a:srgbClr val="5A6472"/>
                 </a:solidFill>
                 <a:latin typeface="Calibri" pitchFamily="34" charset="0"/>
+                <a:ea typeface="Amiri" pitchFamily="2" charset="-78"/>
                 <a:cs typeface="Amiri" pitchFamily="2" charset="-78"/>
               </a:rPr>
               <a:t>  pl. خُطَطٌ</a:t>
@@ -11315,6 +11366,7 @@
                   <a:srgbClr val="1B3B6F"/>
                 </a:solidFill>
                 <a:latin typeface="Amiri" pitchFamily="2" charset="-78"/>
+                <a:ea typeface="Amiri" pitchFamily="2" charset="-78"/>
                 <a:cs typeface="Amiri" pitchFamily="2" charset="-78"/>
               </a:rPr>
               <a:t>أَقْوَى وَرَقَةٍ عِنْدِي هِيَ ______ ، وَأَحْتَاجُ إِلَى مُرَاجَعَةِ ______ .</a:t>
@@ -11984,6 +12036,7 @@
                   <a:srgbClr val="FFFFFF"/>
                 </a:solidFill>
                 <a:latin typeface="Amiri" pitchFamily="2" charset="-78"/>
+                <a:ea typeface="Amiri" pitchFamily="2" charset="-78"/>
                 <a:cs typeface="Amiri" pitchFamily="2" charset="-78"/>
               </a:rPr>
               <a:t>أَحْسَنْتُمْ! إِلَى اللِّقَاءِ</a:t>
@@ -12136,6 +12189,7 @@
                   <a:srgbClr val="D4AF37"/>
                 </a:solidFill>
                 <a:latin typeface="Amiri" pitchFamily="2" charset="-78"/>
+                <a:ea typeface="Amiri" pitchFamily="2" charset="-78"/>
                 <a:cs typeface="Amiri" pitchFamily="2" charset="-78"/>
               </a:rPr>
               <a:t>نَتَائِجُ المُحَاكَاةِ وَالمُرَاجَعَةُ المُوَجَّهَةُ</a:t>
@@ -12269,6 +12323,7 @@
                   <a:srgbClr val="D4AF37"/>
                 </a:solidFill>
                 <a:latin typeface="Amiri" pitchFamily="2" charset="-78"/>
+                <a:ea typeface="Amiri" pitchFamily="2" charset="-78"/>
                 <a:cs typeface="Amiri" pitchFamily="2" charset="-78"/>
               </a:rPr>
               <a:t>م</a:t>
@@ -12589,6 +12644,7 @@
                   <a:srgbClr val="8A6D1E"/>
                 </a:solidFill>
                 <a:latin typeface="Amiri" pitchFamily="2" charset="-78"/>
+                <a:ea typeface="Amiri" pitchFamily="2" charset="-78"/>
                 <a:cs typeface="Amiri" pitchFamily="2" charset="-78"/>
               </a:rPr>
               <a:t>آدَابُ الصَّفِّ</a:t>
@@ -14120,6 +14176,7 @@
                   <a:srgbClr val="D4AF37"/>
                 </a:solidFill>
                 <a:latin typeface="Amiri" pitchFamily="2" charset="-78"/>
+                <a:ea typeface="Amiri" pitchFamily="2" charset="-78"/>
                 <a:cs typeface="Amiri" pitchFamily="2" charset="-78"/>
               </a:rPr>
               <a:t>م</a:t>
@@ -14440,6 +14497,7 @@
                   <a:srgbClr val="8A6D1E"/>
                 </a:solidFill>
                 <a:latin typeface="Amiri" pitchFamily="2" charset="-78"/>
+                <a:ea typeface="Amiri" pitchFamily="2" charset="-78"/>
                 <a:cs typeface="Amiri" pitchFamily="2" charset="-78"/>
               </a:rPr>
               <a:t>خَرِيطَةُ الدَّرْسِ</a:t>
@@ -14754,6 +14812,7 @@
                   <a:srgbClr val="0E7C86"/>
                 </a:solidFill>
                 <a:latin typeface="Amiri" pitchFamily="2" charset="-78"/>
+                <a:ea typeface="Amiri" pitchFamily="2" charset="-78"/>
                 <a:cs typeface="Amiri" pitchFamily="2" charset="-78"/>
               </a:rPr>
               <a:t>اِبْدَأِ الآنَ</a:t>
@@ -15030,6 +15089,7 @@
                   <a:srgbClr val="1B3B6F"/>
                 </a:solidFill>
                 <a:latin typeface="Amiri" pitchFamily="2" charset="-78"/>
+                <a:ea typeface="Amiri" pitchFamily="2" charset="-78"/>
                 <a:cs typeface="Amiri" pitchFamily="2" charset="-78"/>
               </a:rPr>
               <a:t>التَّهَيُّؤُ</a:t>
@@ -15306,6 +15366,7 @@
                   <a:srgbClr val="1E6B52"/>
                 </a:solidFill>
                 <a:latin typeface="Amiri" pitchFamily="2" charset="-78"/>
+                <a:ea typeface="Amiri" pitchFamily="2" charset="-78"/>
                 <a:cs typeface="Amiri" pitchFamily="2" charset="-78"/>
               </a:rPr>
               <a:t>الامْتِحَانُ</a:t>
@@ -15582,6 +15643,7 @@
                   <a:srgbClr val="8A6D1E"/>
                 </a:solidFill>
                 <a:latin typeface="Amiri" pitchFamily="2" charset="-78"/>
+                <a:ea typeface="Amiri" pitchFamily="2" charset="-78"/>
                 <a:cs typeface="Amiri" pitchFamily="2" charset="-78"/>
               </a:rPr>
               <a:t>صَحِّحْ</a:t>
@@ -15858,6 +15920,7 @@
                   <a:srgbClr val="8A6D1E"/>
                 </a:solidFill>
                 <a:latin typeface="Amiri" pitchFamily="2" charset="-78"/>
+                <a:ea typeface="Amiri" pitchFamily="2" charset="-78"/>
                 <a:cs typeface="Amiri" pitchFamily="2" charset="-78"/>
               </a:rPr>
               <a:t>قَيِّمْ</a:t>
@@ -16134,6 +16197,7 @@
                   <a:srgbClr val="C45A3C"/>
                 </a:solidFill>
                 <a:latin typeface="Amiri" pitchFamily="2" charset="-78"/>
+                <a:ea typeface="Amiri" pitchFamily="2" charset="-78"/>
                 <a:cs typeface="Amiri" pitchFamily="2" charset="-78"/>
               </a:rPr>
               <a:t>اِسْتَعِدَّ</a:t>
@@ -16377,6 +16441,7 @@
                   <a:srgbClr val="D4AF37"/>
                 </a:solidFill>
                 <a:latin typeface="Amiri" pitchFamily="2" charset="-78"/>
+                <a:ea typeface="Amiri" pitchFamily="2" charset="-78"/>
                 <a:cs typeface="Amiri" pitchFamily="2" charset="-78"/>
               </a:rPr>
               <a:t>م</a:t>
@@ -16697,6 +16762,7 @@
                   <a:srgbClr val="8A6D1E"/>
                 </a:solidFill>
                 <a:latin typeface="Amiri" pitchFamily="2" charset="-78"/>
+                <a:ea typeface="Amiri" pitchFamily="2" charset="-78"/>
                 <a:cs typeface="Amiri" pitchFamily="2" charset="-78"/>
               </a:rPr>
               <a:t>اِبْدَأِ الآنَ</a:t>
@@ -16883,6 +16949,7 @@
                   <a:srgbClr val="1B3B6F"/>
                 </a:solidFill>
                 <a:latin typeface="Amiri" pitchFamily="2" charset="-78"/>
+                <a:ea typeface="Amiri" pitchFamily="2" charset="-78"/>
                 <a:cs typeface="Amiri" pitchFamily="2" charset="-78"/>
               </a:rPr>
               <a:t>التَّوْسِيعُ فِي الإِجَابَةِ</a:t>
@@ -17347,6 +17414,7 @@
                   <a:srgbClr val="1B3B6F"/>
                 </a:solidFill>
                 <a:latin typeface="Amiri" pitchFamily="2" charset="-78"/>
+                <a:ea typeface="Amiri" pitchFamily="2" charset="-78"/>
                 <a:cs typeface="Amiri" pitchFamily="2" charset="-78"/>
               </a:rPr>
               <a:t>لُغَةُ التَّوَقُّفِ وَالتَّفْكِيرِ</a:t>
@@ -17811,6 +17879,7 @@
                   <a:srgbClr val="1B3B6F"/>
                 </a:solidFill>
                 <a:latin typeface="Amiri" pitchFamily="2" charset="-78"/>
+                <a:ea typeface="Amiri" pitchFamily="2" charset="-78"/>
                 <a:cs typeface="Amiri" pitchFamily="2" charset="-78"/>
               </a:rPr>
               <a:t>التَّحَدُّثُ بِثِقَةٍ</a:t>
@@ -19338,6 +19407,7 @@
                   <a:srgbClr val="D4AF37"/>
                 </a:solidFill>
                 <a:latin typeface="Amiri" pitchFamily="2" charset="-78"/>
+                <a:ea typeface="Amiri" pitchFamily="2" charset="-78"/>
                 <a:cs typeface="Amiri" pitchFamily="2" charset="-78"/>
               </a:rPr>
               <a:t>م</a:t>
@@ -19658,6 +19728,7 @@
                   <a:srgbClr val="8A6D1E"/>
                 </a:solidFill>
                 <a:latin typeface="Amiri" pitchFamily="2" charset="-78"/>
+                <a:ea typeface="Amiri" pitchFamily="2" charset="-78"/>
                 <a:cs typeface="Amiri" pitchFamily="2" charset="-78"/>
               </a:rPr>
               <a:t>الإِجَابَاتُ وَالتَّعْلِيلُ</a:t>
@@ -19844,6 +19915,7 @@
                   <a:srgbClr val="1B3B6F"/>
                 </a:solidFill>
                 <a:latin typeface="Amiri" pitchFamily="2" charset="-78"/>
+                <a:ea typeface="Amiri" pitchFamily="2" charset="-78"/>
                 <a:cs typeface="Amiri" pitchFamily="2" charset="-78"/>
               </a:rPr>
               <a:t>التَّوْسِيعُ فِي الإِجَابَةِ</a:t>
@@ -20373,6 +20445,7 @@
                   <a:srgbClr val="1B3B6F"/>
                 </a:solidFill>
                 <a:latin typeface="Amiri" pitchFamily="2" charset="-78"/>
+                <a:ea typeface="Amiri" pitchFamily="2" charset="-78"/>
                 <a:cs typeface="Amiri" pitchFamily="2" charset="-78"/>
               </a:rPr>
               <a:t>لُغَةُ التَّوَقُّفِ وَالتَّفْكِيرِ</a:t>
@@ -20902,6 +20975,7 @@
                   <a:srgbClr val="1B3B6F"/>
                 </a:solidFill>
                 <a:latin typeface="Amiri" pitchFamily="2" charset="-78"/>
+                <a:ea typeface="Amiri" pitchFamily="2" charset="-78"/>
                 <a:cs typeface="Amiri" pitchFamily="2" charset="-78"/>
               </a:rPr>
               <a:t>التَّحَدُّثُ بِثِقَةٍ</a:t>
@@ -22440,6 +22514,7 @@
                   <a:srgbClr val="1B3B6F"/>
                 </a:solidFill>
                 <a:latin typeface="Amiri" pitchFamily="2" charset="-78"/>
+                <a:ea typeface="Amiri" pitchFamily="2" charset="-78"/>
                 <a:cs typeface="Amiri" pitchFamily="2" charset="-78"/>
               </a:rPr>
               <a:t>مُحَفِّزٌ وَاحِدٌ = دَرَجَةٌ · رَأْيٌ + سَبَبٌ + مِثَالٌ</a:t>
@@ -22573,6 +22648,7 @@
                   <a:srgbClr val="D4AF37"/>
                 </a:solidFill>
                 <a:latin typeface="Amiri" pitchFamily="2" charset="-78"/>
+                <a:ea typeface="Amiri" pitchFamily="2" charset="-78"/>
                 <a:cs typeface="Amiri" pitchFamily="2" charset="-78"/>
               </a:rPr>
               <a:t>م</a:t>
@@ -22893,6 +22969,7 @@
                   <a:srgbClr val="8A6D1E"/>
                 </a:solidFill>
                 <a:latin typeface="Amiri" pitchFamily="2" charset="-78"/>
+                <a:ea typeface="Amiri" pitchFamily="2" charset="-78"/>
                 <a:cs typeface="Amiri" pitchFamily="2" charset="-78"/>
               </a:rPr>
               <a:t>الأَهْدَافُ وَمَعَايِيرُ النَّجَاحِ</a:t>
@@ -23041,6 +23118,7 @@
                   <a:srgbClr val="8A6D1E"/>
                 </a:solidFill>
                 <a:latin typeface="Amiri" pitchFamily="2" charset="-78"/>
+                <a:ea typeface="Amiri" pitchFamily="2" charset="-78"/>
                 <a:cs typeface="Amiri" pitchFamily="2" charset="-78"/>
               </a:rPr>
               <a:t>سَتَتَعَلَّمُ اليَوْمَ</a:t>
@@ -24196,6 +24274,7 @@
                   <a:srgbClr val="D4AF37"/>
                 </a:solidFill>
                 <a:latin typeface="Amiri" pitchFamily="2" charset="-78"/>
+                <a:ea typeface="Amiri" pitchFamily="2" charset="-78"/>
                 <a:cs typeface="Amiri" pitchFamily="2" charset="-78"/>
               </a:rPr>
               <a:t>م</a:t>
@@ -24516,6 +24595,7 @@
                   <a:srgbClr val="8A6D1E"/>
                 </a:solidFill>
                 <a:latin typeface="Amiri" pitchFamily="2" charset="-78"/>
+                <a:ea typeface="Amiri" pitchFamily="2" charset="-78"/>
                 <a:cs typeface="Amiri" pitchFamily="2" charset="-78"/>
               </a:rPr>
               <a:t>التَّهَيُّؤُ الذِّهْنِيُّ</a:t>
@@ -25039,6 +25119,7 @@
                   <a:srgbClr val="1B3B6F"/>
                 </a:solidFill>
                 <a:latin typeface="Amiri" pitchFamily="2" charset="-78"/>
+                <a:ea typeface="Amiri" pitchFamily="2" charset="-78"/>
                 <a:cs typeface="Amiri" pitchFamily="2" charset="-78"/>
               </a:rPr>
               <a:t>١. اِبْدَأِ التَّسْجِيلَ</a:t>
@@ -25138,6 +25219,7 @@
                   <a:srgbClr val="1B3B6F"/>
                 </a:solidFill>
                 <a:latin typeface="Amiri" pitchFamily="2" charset="-78"/>
+                <a:ea typeface="Amiri" pitchFamily="2" charset="-78"/>
                 <a:cs typeface="Amiri" pitchFamily="2" charset="-78"/>
               </a:rPr>
               <a:t>٢. اِسْتَمِعْ ثُمَّ أَجِبْ</a:t>
@@ -25237,6 +25319,7 @@
                   <a:srgbClr val="1B3B6F"/>
                 </a:solidFill>
                 <a:latin typeface="Amiri" pitchFamily="2" charset="-78"/>
+                <a:ea typeface="Amiri" pitchFamily="2" charset="-78"/>
                 <a:cs typeface="Amiri" pitchFamily="2" charset="-78"/>
               </a:rPr>
               <a:t>٣. لَا صَمْتَ</a:t>
@@ -25408,6 +25491,7 @@
                   <a:srgbClr val="D4AF37"/>
                 </a:solidFill>
                 <a:latin typeface="Amiri" pitchFamily="2" charset="-78"/>
+                <a:ea typeface="Amiri" pitchFamily="2" charset="-78"/>
                 <a:cs typeface="Amiri" pitchFamily="2" charset="-78"/>
               </a:rPr>
               <a:t>م</a:t>
@@ -25728,6 +25812,7 @@
                   <a:srgbClr val="8A6D1E"/>
                 </a:solidFill>
                 <a:latin typeface="Amiri" pitchFamily="2" charset="-78"/>
+                <a:ea typeface="Amiri" pitchFamily="2" charset="-78"/>
                 <a:cs typeface="Amiri" pitchFamily="2" charset="-78"/>
               </a:rPr>
               <a:t>مِعْيَارُ الوَرَقَةِ الثَّالِثَةِ</a:t>
@@ -26423,6 +26508,7 @@
                   <a:srgbClr val="D4AF37"/>
                 </a:solidFill>
                 <a:latin typeface="Amiri" pitchFamily="2" charset="-78"/>
+                <a:ea typeface="Amiri" pitchFamily="2" charset="-78"/>
                 <a:cs typeface="Amiri" pitchFamily="2" charset="-78"/>
               </a:rPr>
               <a:t>م</a:t>
@@ -26743,6 +26829,7 @@
                   <a:srgbClr val="8A6D1E"/>
                 </a:solidFill>
                 <a:latin typeface="Amiri" pitchFamily="2" charset="-78"/>
+                <a:ea typeface="Amiri" pitchFamily="2" charset="-78"/>
                 <a:cs typeface="Amiri" pitchFamily="2" charset="-78"/>
               </a:rPr>
               <a:t>تَمْثِيلُ الدَّوْرِ</a:t>
@@ -27061,6 +27148,7 @@
                   <a:srgbClr val="1B3B6F"/>
                 </a:solidFill>
                 <a:latin typeface="Amiri" pitchFamily="2" charset="-78"/>
+                <a:ea typeface="Amiri" pitchFamily="2" charset="-78"/>
                 <a:cs typeface="Amiri" pitchFamily="2" charset="-78"/>
               </a:rPr>
               <a:t>أَنْتَ فِي مَرْكَزٍ ثَقَافِيٍّ: عَرِّفْ بِنَفْسِكَ وَاهْتِمَامَاتِكَ.</a:t>
@@ -27202,6 +27290,7 @@
                   <a:srgbClr val="1B3B6F"/>
                 </a:solidFill>
                 <a:latin typeface="Amiri" pitchFamily="2" charset="-78"/>
+                <a:ea typeface="Amiri" pitchFamily="2" charset="-78"/>
                 <a:cs typeface="Amiri" pitchFamily="2" charset="-78"/>
               </a:rPr>
               <a:t>اسْأَلْ عَنِ الأَنْشِطَةِ المُتَاحَةِ.</a:t>
@@ -27343,6 +27432,7 @@
                   <a:srgbClr val="1B3B6F"/>
                 </a:solidFill>
                 <a:latin typeface="Amiri" pitchFamily="2" charset="-78"/>
+                <a:ea typeface="Amiri" pitchFamily="2" charset="-78"/>
                 <a:cs typeface="Amiri" pitchFamily="2" charset="-78"/>
               </a:rPr>
               <a:t>اقْتَرِحْ نَشَاطًا جَدِيدًا وَاشْرَحْ فَائِدَتَهُ (مُسَبِّبُ نَصْبٍ).</a:t>
@@ -27484,6 +27574,7 @@
                   <a:srgbClr val="1B3B6F"/>
                 </a:solidFill>
                 <a:latin typeface="Amiri" pitchFamily="2" charset="-78"/>
+                <a:ea typeface="Amiri" pitchFamily="2" charset="-78"/>
                 <a:cs typeface="Amiri" pitchFamily="2" charset="-78"/>
               </a:rPr>
               <a:t>اتَّفِقْ عَلَى مَوْعِدِ التَّسْجِيلِ (شَرْطٌ).</a:t>
@@ -27620,13 +27711,9 @@
     <a:fontScheme name="Office">
       <a:majorFont>
         <a:latin typeface="Calibri Light" panose="020F0302020204030204"/>
-        <a:ea typeface=""/>
-        <a:cs typeface=""/>
-        <a:font script="Jpan" typeface="游ゴシック Light"/>
-        <a:font script="Hang" typeface="맑은 고딕"/>
-        <a:font script="Hans" typeface="等线 Light"/>
-        <a:font script="Hant" typeface="新細明體"/>
-        <a:font script="Arab" typeface="Times New Roman"/>
+        <a:ea typeface="Amiri" pitchFamily="2" charset="-78"/>
+        <a:cs typeface="Amiri" pitchFamily="2" charset="-78"/>
+        <a:font script="Arab" typeface="Amiri"/>
         <a:font script="Hebr" typeface="Times New Roman"/>
         <a:font script="Thai" typeface="Angsana New"/>
         <a:font script="Ethi" typeface="Nyala"/>
@@ -27672,13 +27759,9 @@
       </a:majorFont>
       <a:minorFont>
         <a:latin typeface="Calibri" panose="020F0502020204030204"/>
-        <a:ea typeface=""/>
-        <a:cs typeface=""/>
-        <a:font script="Jpan" typeface="游ゴシック"/>
-        <a:font script="Hang" typeface="맑은 고딕"/>
-        <a:font script="Hans" typeface="等线"/>
-        <a:font script="Hant" typeface="新細明體"/>
-        <a:font script="Arab" typeface="Arial"/>
+        <a:ea typeface="Amiri" pitchFamily="2" charset="-78"/>
+        <a:cs typeface="Amiri" pitchFamily="2" charset="-78"/>
+        <a:font script="Arab" typeface="Amiri"/>
         <a:font script="Hebr" typeface="Arial"/>
         <a:font script="Thai" typeface="Cordia New"/>
         <a:font script="Ethi" typeface="Nyala"/>

--- a/Progression_P6/P6-L10_Mock_Paper_3_Speaking.pptx
+++ b/Progression_P6/P6-L10_Mock_Paper_3_Speaking.pptx
@@ -6331,7 +6331,7 @@
                 <a:solidFill>
                   <a:srgbClr val="FFFFFF"/>
                 </a:solidFill>
-                <a:latin typeface="Calibri" pitchFamily="34" charset="0"/>
+                <a:latin typeface="Amiri" pitchFamily="2" charset="-78"/>
                 <a:ea typeface="Amiri" pitchFamily="2" charset="-78"/>
                 <a:cs typeface="Amiri" pitchFamily="2" charset="-78"/>
               </a:rPr>
@@ -6397,7 +6397,7 @@
                 <a:solidFill>
                   <a:srgbClr val="FFFFFF"/>
                 </a:solidFill>
-                <a:latin typeface="Calibri" pitchFamily="34" charset="0"/>
+                <a:latin typeface="Amiri" pitchFamily="2" charset="-78"/>
                 <a:ea typeface="Amiri" pitchFamily="2" charset="-78"/>
                 <a:cs typeface="Amiri" pitchFamily="2" charset="-78"/>
               </a:rPr>
@@ -6463,7 +6463,7 @@
                 <a:solidFill>
                   <a:srgbClr val="FFFFFF"/>
                 </a:solidFill>
-                <a:latin typeface="Calibri" pitchFamily="34" charset="0"/>
+                <a:latin typeface="Amiri" pitchFamily="2" charset="-78"/>
                 <a:ea typeface="Amiri" pitchFamily="2" charset="-78"/>
                 <a:cs typeface="Amiri" pitchFamily="2" charset="-78"/>
               </a:rPr>
@@ -6529,7 +6529,7 @@
                 <a:solidFill>
                   <a:srgbClr val="FFFFFF"/>
                 </a:solidFill>
-                <a:latin typeface="Calibri" pitchFamily="34" charset="0"/>
+                <a:latin typeface="Amiri" pitchFamily="2" charset="-78"/>
                 <a:ea typeface="Amiri" pitchFamily="2" charset="-78"/>
                 <a:cs typeface="Amiri" pitchFamily="2" charset="-78"/>
               </a:rPr>
